--- a/results/viz/motorai_seminar_20260807.pptx
+++ b/results/viz/motorai_seminar_20260807.pptx
@@ -19,6 +19,9 @@
     <p:sldId id="267" r:id="rId19"/>
     <p:sldId id="268" r:id="rId20"/>
     <p:sldId id="269" r:id="rId21"/>
+    <p:sldId id="270" r:id="rId22"/>
+    <p:sldId id="271" r:id="rId23"/>
+    <p:sldId id="272" r:id="rId24"/>
   </p:sldIdLst>
   <p:sldSz cx="12191695" cy="6858000" type="screen4x3"/>
   <p:notesSz cx="6858000" cy="9144000"/>
@@ -535,23 +538,23 @@
               <a:rPr sz="1100">
                 <a:latin typeface="맑은 고딕"/>
               </a:rPr>
-              <a:t>한 줄로 먼저 말씀드리면 — Motor-CAD FEA를 대체할 GNN 서로게이트를 만들고 있고,</a:t>
-            </a:r>
-          </a:p>
-          <a:p>
-            <a:r>
-              <a:rPr sz="1100">
-                <a:latin typeface="맑은 고딕"/>
-              </a:rPr>
-              <a:t>지금 공극 필드 오차 7.14%, 토크 3.35%입니다. 목표는 5%와 3%입니다.</a:t>
-            </a:r>
-          </a:p>
-          <a:p>
-            <a:r>
-              <a:rPr sz="1100">
-                <a:latin typeface="맑은 고딕"/>
-              </a:rPr>
-              <a:t>공극은 아직 2.1pp 남았지만, 토크는 0.35pp까지 붙었습니다.</a:t>
+              <a:t>한 줄로 먼저 말씀드리면 — Motor-CAD 해석을 대신 계산해 주는 AI 모델을 만들고 있고,</a:t>
+            </a:r>
+          </a:p>
+          <a:p>
+            <a:r>
+              <a:rPr sz="1100">
+                <a:latin typeface="맑은 고딕"/>
+              </a:rPr>
+              <a:t>지금 공극 자속밀도 오차 7.14%, 토크 오차 3.35%입니다. 합격선은 5%와 3%입니다.</a:t>
+            </a:r>
+          </a:p>
+          <a:p>
+            <a:r>
+              <a:rPr sz="1100">
+                <a:latin typeface="맑은 고딕"/>
+              </a:rPr>
+              <a:t>공극은 아직 2.1%p 남았지만, 토크는 0.35%p까지 붙었습니다.</a:t>
             </a:r>
           </a:p>
           <a:p>
@@ -640,7 +643,7 @@
               <a:rPr sz="1100">
                 <a:latin typeface="맑은 고딕"/>
               </a:rPr>
-              <a:t>이번 주에 나온 발견입니다. 유쾌하진 않지만 그래서 더 공유드려야 합니다.</a:t>
+              <a:t>"그 숫자들을 왜 믿느냐"에 대한 답입니다. 짧게 세 가지만.</a:t>
             </a:r>
           </a:p>
           <a:p/>
@@ -649,23 +652,55 @@
               <a:rPr sz="1100">
                 <a:latin typeface="맑은 고딕"/>
               </a:rPr>
-              <a:t>저희 DOE는 4축이라고 알고 있었습니다. 형상 둘, 위상 진각, 그리고 피크 전류.</a:t>
-            </a:r>
-          </a:p>
-          <a:p>
-            <a:r>
-              <a:rPr sz="1100">
-                <a:latin typeface="맑은 고딕"/>
-              </a:rPr>
-              <a:t>그런데 export된 전류밀도를 감사해보니 도체 암페어-턴이 전 케이스에서 325로 상수였습니다.</a:t>
-            </a:r>
-          </a:p>
-          <a:p>
-            <a:r>
-              <a:rPr sz="1100">
-                <a:latin typeface="맑은 고딕"/>
-              </a:rPr>
-              <a:t>피크 전류가 18A인 케이스나 646A인 케이스나 여자가 같습니다. 35배 차이나는데 0.03% 안에서 동일합니다.</a:t>
+              <a:t>첫째, 컨닝을 잡았습니다. time_s라는 입력값이 있었는데,</a:t>
+            </a:r>
+          </a:p>
+          <a:p>
+            <a:r>
+              <a:rPr sz="1100">
+                <a:latin typeface="맑은 고딕"/>
+              </a:rPr>
+              <a:t>저희 DOE는 전 케이스가 같은 속도라 이게 회전자각과 완전히 같은 정보였습니다</a:t>
+            </a:r>
+          </a:p>
+          <a:p>
+            <a:r>
+              <a:rPr sz="1100">
+                <a:latin typeface="맑은 고딕"/>
+              </a:rPr>
+              <a:t>(상관계수 1.0000 — 두 값이 완벽히 같이 움직인다는 뜻).</a:t>
+            </a:r>
+          </a:p>
+          <a:p>
+            <a:r>
+              <a:rPr sz="1100">
+                <a:latin typeface="맑은 고딕"/>
+              </a:rPr>
+              <a:t>독립 정보가 하나도 없는 중복 입력인데 AI가 이걸 주 단서로 학습했습니다.</a:t>
+            </a:r>
+          </a:p>
+          <a:p>
+            <a:r>
+              <a:rPr sz="1100">
+                <a:latin typeface="맑은 고딕"/>
+              </a:rPr>
+              <a:t>이 값만 바꿔서 다시 예측시키니 토크가 −264에서 +48로 부호까지 뒤집혔습니다.</a:t>
+            </a:r>
+          </a:p>
+          <a:p>
+            <a:r>
+              <a:rPr sz="1100">
+                <a:latin typeface="맑은 고딕"/>
+              </a:rPr>
+              <a:t>제거하고 홀드아웃을 케이스 단위로 바꾸니 그때까지 비교하던 모든 모델의 순위가 바뀌었습니다.</a:t>
+            </a:r>
+          </a:p>
+          <a:p>
+            <a:r>
+              <a:rPr sz="1100">
+                <a:latin typeface="맑은 고딕"/>
+              </a:rPr>
+              <a:t>즉 그 전의 비교는 전부 무의미했습니다. 필드 오차만 봤으면 못 잡았을 겁니다.</a:t>
             </a:r>
           </a:p>
           <a:p/>
@@ -674,15 +709,31 @@
               <a:rPr sz="1100">
                 <a:latin typeface="맑은 고딕"/>
               </a:rPr>
-              <a:t>원인은 확정했습니다. 파일이 전부 RMS 전류 모드였고, 그 모드에서 PeakCurrent는</a:t>
-            </a:r>
-          </a:p>
-          <a:p>
-            <a:r>
-              <a:rPr sz="1100">
-                <a:latin typeface="맑은 고딕"/>
-              </a:rPr>
-              <a:t>솔브 입력이 아니라 화면 표시용 파생값입니다. DOE가 표시값만 열심히 바꾸고 있었던 거죠.</a:t>
+              <a:t>둘째, 표현 바닥값입니다. 성능이 안 나올 때 모델을 탓하기 전에,</a:t>
+            </a:r>
+          </a:p>
+          <a:p>
+            <a:r>
+              <a:rPr sz="1100">
+                <a:latin typeface="맑은 고딕"/>
+              </a:rPr>
+              <a:t>참값을 그 출력 표현으로 한 번 왕복시켜 보면 도달 불가능한 하한이 나옵니다.</a:t>
+            </a:r>
+          </a:p>
+          <a:p>
+            <a:r>
+              <a:rPr sz="1100">
+                <a:latin typeface="맑은 고딕"/>
+              </a:rPr>
+              <a:t>절점 왕복 방식은 토크 바닥이 59%입니다. 쓸 수가 없죠.</a:t>
+            </a:r>
+          </a:p>
+          <a:p>
+            <a:r>
+              <a:rPr sz="1100">
+                <a:latin typeface="맑은 고딕"/>
+              </a:rPr>
+              <a:t>이산 curl은 1.6%입니다. 표현만 바꿔도 37배 차이가 납니다.</a:t>
             </a:r>
           </a:p>
           <a:p/>
@@ -691,23 +742,23 @@
               <a:rPr sz="1100">
                 <a:latin typeface="맑은 고딕"/>
               </a:rPr>
-              <a:t>문서만 보고 판단하지 않고 원본 사본으로 인과 솔브를 두 번 돌렸습니다.</a:t>
-            </a:r>
-          </a:p>
-          <a:p>
-            <a:r>
-              <a:rPr sz="1100">
-                <a:latin typeface="맑은 고딕"/>
-              </a:rPr>
-              <a:t>PeakCurrent를 바꾸면 토크가 소수 넷째 자리까지 안 움직이고,</a:t>
-            </a:r>
-          </a:p>
-          <a:p>
-            <a:r>
-              <a:rPr sz="1100">
-                <a:latin typeface="맑은 고딕"/>
-              </a:rPr>
-              <a:t>RMSCurrent를 바꾸면 43% 떨어집니다. 확정입니다.</a:t>
+              <a:t>셋째, 토크 계산기 자체를 Motor-CAD와 대조했습니다. 평균 차이 0.35%,</a:t>
+            </a:r>
+          </a:p>
+          <a:p>
+            <a:r>
+              <a:rPr sz="1100">
+                <a:latin typeface="맑은 고딕"/>
+              </a:rPr>
+              <a:t>파형 상관계수 0.9955 — 두 곡선이 거의 같은 모양으로 움직인다는 뜻입니다.</a:t>
+            </a:r>
+          </a:p>
+          <a:p>
+            <a:r>
+              <a:rPr sz="1100">
+                <a:latin typeface="맑은 고딕"/>
+              </a:rPr>
+              <a:t>그래서 토크를 1급 지표로 쓸 수 있는 겁니다.</a:t>
             </a:r>
           </a:p>
           <a:p/>
@@ -716,56 +767,7 @@
               <a:rPr sz="1100">
                 <a:latin typeface="맑은 고딕"/>
               </a:rPr>
-              <a:t>함의는 나눠서 봐야 합니다.</a:t>
-            </a:r>
-          </a:p>
-          <a:p>
-            <a:r>
-              <a:rPr sz="1100">
-                <a:latin typeface="맑은 고딕"/>
-              </a:rPr>
-              <a:t>나쁜 소식은 학습 데이터에 포화 다양성이 없다는 겁니다. 전부 같은 여자에서 풀렸습니다.</a:t>
-            </a:r>
-          </a:p>
-          <a:p>
-            <a:r>
-              <a:rPr sz="1100">
-                <a:latin typeface="맑은 고딕"/>
-              </a:rPr>
-              <a:t>그래서 배포할 때 전류 의존성을 기대하면 안 됩니다. 모델이 본 적이 없으니까요.</a:t>
-            </a:r>
-          </a:p>
-          <a:p>
-            <a:r>
-              <a:rPr sz="1100">
-                <a:latin typeface="맑은 고딕"/>
-              </a:rPr>
-              <a:t>좋은 소식은 형상 축은 제대로 전달됐다는 겁니다. 오늘 보여드린 스케일링 결론은 안 흔들립니다.</a:t>
-            </a:r>
-          </a:p>
-          <a:p/>
-          <a:p>
-            <a:r>
-              <a:rPr sz="1100">
-                <a:latin typeface="맑은 고딕"/>
-              </a:rPr>
-              <a:t>대응은 두 가지입니다. 전류 모드를 고치고,</a:t>
-            </a:r>
-          </a:p>
-          <a:p>
-            <a:r>
-              <a:rPr sz="1100">
-                <a:latin typeface="맑은 고딕"/>
-              </a:rPr>
-              <a:t>"바꾼 축이 실제로 필드에 도달했는지"를 자동 검사하는 게이트를 파이프라인에 상설화합니다.</a:t>
-            </a:r>
-          </a:p>
-          <a:p>
-            <a:r>
-              <a:rPr sz="1100">
-                <a:latin typeface="맑은 고딕"/>
-              </a:rPr>
-              <a:t>이번에 이걸 잡은 감사 절차 자체가 재사용 가능한 자산입니다.</a:t>
+              <a:t>이 세 가지가 없었으면 앞에서 보여드린 소거 결론을 저희 스스로도 못 믿습니다.</a:t>
             </a:r>
           </a:p>
         </p:txBody>
@@ -838,7 +840,7 @@
               <a:rPr sz="1100">
                 <a:latin typeface="맑은 고딕"/>
               </a:rPr>
-              <a:t>그래서 어떻게 개선하고 있느냐. 두 갈래입니다.</a:t>
+              <a:t>이번 주에 나온 발견입니다. 유쾌하진 않지만 그래서 더 공유드려야 합니다.</a:t>
             </a:r>
           </a:p>
           <a:p/>
@@ -847,31 +849,23 @@
               <a:rPr sz="1100">
                 <a:latin typeface="맑은 고딕"/>
               </a:rPr>
-              <a:t>첫 번째는 끝난 겁니다. 물리 사전해 주입.</a:t>
-            </a:r>
-          </a:p>
-          <a:p>
-            <a:r>
-              <a:rPr sz="1100">
-                <a:latin typeface="맑은 고딕"/>
-              </a:rPr>
-              <a:t>논리는 단순합니다 — 필드 오차를 움직인 유일한 레버가 데이터, 즉 정보였습니다.</a:t>
-            </a:r>
-          </a:p>
-          <a:p>
-            <a:r>
-              <a:rPr sz="1100">
-                <a:latin typeface="맑은 고딕"/>
-              </a:rPr>
-              <a:t>그러면 정보를 직접 넣어주면 되지 않나. 해석 모델로 계산한 사전해를 입력 특징으로 넣어서,</a:t>
-            </a:r>
-          </a:p>
-          <a:p>
-            <a:r>
-              <a:rPr sz="1100">
-                <a:latin typeface="맑은 고딕"/>
-              </a:rPr>
-              <a:t>네트워크가 장 전체가 아니라 사전해에 대한 보정만 학습하게 했습니다.</a:t>
+              <a:t>저희 DOE는 4축이라고 알고 있었습니다. 형상 둘, 위상 진각, 그리고 피크 전류.</a:t>
+            </a:r>
+          </a:p>
+          <a:p>
+            <a:r>
+              <a:rPr sz="1100">
+                <a:latin typeface="맑은 고딕"/>
+              </a:rPr>
+              <a:t>그런데 export된 전류밀도를 감사해보니 도체 암페어-턴이 전 케이스에서 325로 상수였습니다.</a:t>
+            </a:r>
+          </a:p>
+          <a:p>
+            <a:r>
+              <a:rPr sz="1100">
+                <a:latin typeface="맑은 고딕"/>
+              </a:rPr>
+              <a:t>피크 전류가 18A인 케이스나 646A인 케이스나 여자가 같습니다. 35배 차이나는데 0.03% 안에서 동일합니다.</a:t>
             </a:r>
           </a:p>
           <a:p/>
@@ -880,15 +874,15 @@
               <a:rPr sz="1100">
                 <a:latin typeface="맑은 고딕"/>
               </a:rPr>
-              <a:t>같은 물리를 손실 함수에 넣어보기도 했고 학습 후 사후 보정으로 넣어보기도 했는데</a:t>
-            </a:r>
-          </a:p>
-          <a:p>
-            <a:r>
-              <a:rPr sz="1100">
-                <a:latin typeface="맑은 고딕"/>
-              </a:rPr>
-              <a:t>둘 다 필드 오차는 안 움직였습니다. 입력측 주입만 안 해본 축이었습니다.</a:t>
+              <a:t>원인은 확정했습니다. 파일이 전부 RMS 전류 모드였고, 그 모드에서 PeakCurrent는</a:t>
+            </a:r>
+          </a:p>
+          <a:p>
+            <a:r>
+              <a:rPr sz="1100">
+                <a:latin typeface="맑은 고딕"/>
+              </a:rPr>
+              <a:t>솔브 입력이 아니라 화면 표시용 파생값입니다. DOE가 표시값만 열심히 바꾸고 있었던 거죠.</a:t>
             </a:r>
           </a:p>
           <a:p/>
@@ -897,47 +891,23 @@
               <a:rPr sz="1100">
                 <a:latin typeface="맑은 고딕"/>
               </a:rPr>
-              <a:t>결과가 카드에 있습니다. 토크가 2.05pp 개선됐고 전체 필드 오차도 0.54pp 내려갔습니다.</a:t>
-            </a:r>
-          </a:p>
-          <a:p>
-            <a:r>
-              <a:rPr sz="1100">
-                <a:latin typeface="맑은 고딕"/>
-              </a:rPr>
-              <a:t>공극은 0.16pp로, 사전 등록 기준을 못 넘어 1차 지표는 음성입니다.</a:t>
-            </a:r>
-          </a:p>
-          <a:p>
-            <a:r>
-              <a:rPr sz="1100">
-                <a:latin typeface="맑은 고딕"/>
-              </a:rPr>
-              <a:t>등록 문구대로 읽으면 "2차 지표 양성, 1차 음성"입니다.</a:t>
-            </a:r>
-          </a:p>
-          <a:p>
-            <a:r>
-              <a:rPr sz="1100">
-                <a:latin typeface="맑은 고딕"/>
-              </a:rPr>
-              <a:t>그래서 prior를 계속 쓸지를 따로 판단해야 했는데, 유지하기로 결정했습니다.</a:t>
-            </a:r>
-          </a:p>
-          <a:p>
-            <a:r>
-              <a:rPr sz="1100">
-                <a:latin typeface="맑은 고딕"/>
-              </a:rPr>
-              <a:t>이유는 토크가 G1' 게이트의 실패 항목이었고, 그걸 움직인 레버가 이것뿐이기 때문입니다.</a:t>
-            </a:r>
-          </a:p>
-          <a:p>
-            <a:r>
-              <a:rPr sz="1100">
-                <a:latin typeface="맑은 고딕"/>
-              </a:rPr>
-              <a:t>데이터 축은 토크를 배가당 0.08pp밖에 못 움직입니다.</a:t>
+              <a:t>문서만 보고 판단하지 않고 원본 사본으로 인과 솔브를 두 번 돌렸습니다.</a:t>
+            </a:r>
+          </a:p>
+          <a:p>
+            <a:r>
+              <a:rPr sz="1100">
+                <a:latin typeface="맑은 고딕"/>
+              </a:rPr>
+              <a:t>PeakCurrent를 바꾸면 토크가 소수 넷째 자리까지 안 움직이고,</a:t>
+            </a:r>
+          </a:p>
+          <a:p>
+            <a:r>
+              <a:rPr sz="1100">
+                <a:latin typeface="맑은 고딕"/>
+              </a:rPr>
+              <a:t>RMSCurrent를 바꾸면 43% 떨어집니다. 확정입니다.</a:t>
             </a:r>
           </a:p>
           <a:p/>
@@ -946,31 +916,31 @@
               <a:rPr sz="1100">
                 <a:latin typeface="맑은 고딕"/>
               </a:rPr>
-              <a:t>두 번째가 지금 돌고 있는 겁니다. 전류축 복구입니다.</a:t>
-            </a:r>
-          </a:p>
-          <a:p>
-            <a:r>
-              <a:rPr sz="1100">
-                <a:latin typeface="맑은 고딕"/>
-              </a:rPr>
-              <a:t>앞에서 말씀드린 배선 문제를 고치고, 형상에 전류를 곱한 320케이스로 재학습 중입니다.</a:t>
-            </a:r>
-          </a:p>
-          <a:p>
-            <a:r>
-              <a:rPr sz="1100">
-                <a:latin typeface="맑은 고딕"/>
-              </a:rPr>
-              <a:t>전류가 실제로 솔브에 반영되는 첫 데이터셋입니다.</a:t>
-            </a:r>
-          </a:p>
-          <a:p>
-            <a:r>
-              <a:rPr sz="1100">
-                <a:latin typeface="맑은 고딕"/>
-              </a:rPr>
-              <a:t>【발표 시점에 진행 상황이나 결과를 갱신하십시오.】</a:t>
+              <a:t>함의는 나눠서 봐야 합니다.</a:t>
+            </a:r>
+          </a:p>
+          <a:p>
+            <a:r>
+              <a:rPr sz="1100">
+                <a:latin typeface="맑은 고딕"/>
+              </a:rPr>
+              <a:t>나쁜 소식은 학습 데이터에 포화 다양성이 없다는 겁니다. 전부 같은 여자에서 풀렸습니다.</a:t>
+            </a:r>
+          </a:p>
+          <a:p>
+            <a:r>
+              <a:rPr sz="1100">
+                <a:latin typeface="맑은 고딕"/>
+              </a:rPr>
+              <a:t>그래서 배포할 때 전류 의존성을 기대하면 안 됩니다. 모델이 본 적이 없으니까요.</a:t>
+            </a:r>
+          </a:p>
+          <a:p>
+            <a:r>
+              <a:rPr sz="1100">
+                <a:latin typeface="맑은 고딕"/>
+              </a:rPr>
+              <a:t>좋은 소식은 형상 축은 제대로 전달됐다는 겁니다. 오늘 보여드린 스케일링 결론은 안 흔들립니다.</a:t>
             </a:r>
           </a:p>
           <a:p/>
@@ -979,49 +949,23 @@
               <a:rPr sz="1100">
                 <a:latin typeface="맑은 고딕"/>
               </a:rPr>
-              <a:t>부가 자산도 하나 언급드리면, warm-start PoC를 만들다가 numpy와 scipy만으로 도는</a:t>
-            </a:r>
-          </a:p>
-          <a:p>
-            <a:r>
-              <a:rPr sz="1100">
-                <a:latin typeface="맑은 고딕"/>
-              </a:rPr>
-              <a:t>참조 FEM 솔버를 확보했습니다. Motor-CAD 토크를 0.2% 이내로 재현합니다.</a:t>
-            </a:r>
-          </a:p>
-          <a:p>
-            <a:r>
-              <a:rPr sz="1100">
-                <a:latin typeface="맑은 고딕"/>
-              </a:rPr>
-              <a:t>상용 라이선스 없이 정답을 만들 수 있다는 뜻이라, 데이터를 우리 손으로 생성할 때 엔진이 됩니다.</a:t>
-            </a:r>
-          </a:p>
-          <a:p/>
-          <a:p>
-            <a:r>
-              <a:rPr sz="1100">
-                <a:latin typeface="맑은 고딕"/>
-              </a:rPr>
-              <a:t>병행해서 논문화도 진행 중입니다. 음성 결과와 게이트를 다시 정의한 것 자체가</a:t>
-            </a:r>
-          </a:p>
-          <a:p>
-            <a:r>
-              <a:rPr sz="1100">
-                <a:latin typeface="맑은 고딕"/>
-              </a:rPr>
-              <a:t>방법론 기여로 들어갑니다.</a:t>
-            </a:r>
-          </a:p>
-          <a:p/>
-          <a:p>
-            <a:r>
-              <a:rPr sz="1100">
-                <a:latin typeface="맑은 고딕"/>
-              </a:rPr>
-              <a:t>여기까지입니다. 질문 받겠습니다.</a:t>
+              <a:t>대응은 두 가지입니다. 전류 입력 모드를 고치고,</a:t>
+            </a:r>
+          </a:p>
+          <a:p>
+            <a:r>
+              <a:rPr sz="1100">
+                <a:latin typeface="맑은 고딕"/>
+              </a:rPr>
+              <a:t>"바꾼 변수가 실제로 필드에 도달했는지"를 자동 검사하는 검문을 데이터 생성 절차에</a:t>
+            </a:r>
+          </a:p>
+          <a:p>
+            <a:r>
+              <a:rPr sz="1100">
+                <a:latin typeface="맑은 고딕"/>
+              </a:rPr>
+              <a:t>상설화합니다. 이번에 이걸 잡은 감사 절차 자체가 재사용 가능한 자산입니다.</a:t>
             </a:r>
           </a:p>
         </p:txBody>
@@ -1094,7 +1038,182 @@
               <a:rPr sz="1100">
                 <a:latin typeface="맑은 고딕"/>
               </a:rPr>
-              <a:t>여기까지가 본편입니다. 이하는 질문이 나올 때만 띄우는 백업 슬라이드입니다.</a:t>
+              <a:t>그래서 어떻게 개선하고 있느냐. 두 갈래입니다.</a:t>
+            </a:r>
+          </a:p>
+          <a:p/>
+          <a:p>
+            <a:r>
+              <a:rPr sz="1100">
+                <a:latin typeface="맑은 고딕"/>
+              </a:rPr>
+              <a:t>첫 번째는 끝난 겁니다. 물리 힌트 입력.</a:t>
+            </a:r>
+          </a:p>
+          <a:p>
+            <a:r>
+              <a:rPr sz="1100">
+                <a:latin typeface="맑은 고딕"/>
+              </a:rPr>
+              <a:t>논리는 단순합니다 — 오차를 움직인 유일한 레버가 데이터, 즉 정보였습니다.</a:t>
+            </a:r>
+          </a:p>
+          <a:p>
+            <a:r>
+              <a:rPr sz="1100">
+                <a:latin typeface="맑은 고딕"/>
+              </a:rPr>
+              <a:t>그러면 정보를 직접 넣어주면 되지 않나. 간이 선형 자기해석을 절점마다 미리 계산해서</a:t>
+            </a:r>
+          </a:p>
+          <a:p>
+            <a:r>
+              <a:rPr sz="1100">
+                <a:latin typeface="맑은 고딕"/>
+              </a:rPr>
+              <a:t>입력에 넣고, AI가 장 전체가 아니라 "간이해와 실제의 차이"만 배우게 했습니다.</a:t>
+            </a:r>
+          </a:p>
+          <a:p/>
+          <a:p>
+            <a:r>
+              <a:rPr sz="1100">
+                <a:latin typeface="맑은 고딕"/>
+              </a:rPr>
+              <a:t>같은 물리를 채점 기준에 넣어보기도 했고 학습 후 보정으로 넣어보기도 했는데</a:t>
+            </a:r>
+          </a:p>
+          <a:p>
+            <a:r>
+              <a:rPr sz="1100">
+                <a:latin typeface="맑은 고딕"/>
+              </a:rPr>
+              <a:t>둘 다 오차는 안 움직였습니다. 입력에 넣는 것만 안 해본 방법이었습니다.</a:t>
+            </a:r>
+          </a:p>
+          <a:p/>
+          <a:p>
+            <a:r>
+              <a:rPr sz="1100">
+                <a:latin typeface="맑은 고딕"/>
+              </a:rPr>
+              <a:t>결과가 카드에 있습니다. 토크가 2.05%p 개선됐고 전체 오차도 0.54%p 내려갔습니다.</a:t>
+            </a:r>
+          </a:p>
+          <a:p>
+            <a:r>
+              <a:rPr sz="1100">
+                <a:latin typeface="맑은 고딕"/>
+              </a:rPr>
+              <a:t>공극은 0.16%p 개선에 그쳐, 미리 정한 1차 기준(7.05% 미만)을 못 넘었습니다.</a:t>
+            </a:r>
+          </a:p>
+          <a:p>
+            <a:r>
+              <a:rPr sz="1100">
+                <a:latin typeface="맑은 고딕"/>
+              </a:rPr>
+              <a:t>그래서 힌트를 계속 쓸지를 따로 판단해야 했는데, 유지하기로 결정했습니다.</a:t>
+            </a:r>
+          </a:p>
+          <a:p>
+            <a:r>
+              <a:rPr sz="1100">
+                <a:latin typeface="맑은 고딕"/>
+              </a:rPr>
+              <a:t>이유는 토크가 합격 기준의 실패 항목이었고, 그걸 움직인 레버가 이것뿐이기 때문입니다.</a:t>
+            </a:r>
+          </a:p>
+          <a:p>
+            <a:r>
+              <a:rPr sz="1100">
+                <a:latin typeface="맑은 고딕"/>
+              </a:rPr>
+              <a:t>데이터 늘리기는 토크를 두 배당 0.08%p밖에 못 움직입니다.</a:t>
+            </a:r>
+          </a:p>
+          <a:p/>
+          <a:p>
+            <a:r>
+              <a:rPr sz="1100">
+                <a:latin typeface="맑은 고딕"/>
+              </a:rPr>
+              <a:t>두 번째가 지금 돌고 있는 겁니다. 전류축 복구입니다.</a:t>
+            </a:r>
+          </a:p>
+          <a:p>
+            <a:r>
+              <a:rPr sz="1100">
+                <a:latin typeface="맑은 고딕"/>
+              </a:rPr>
+              <a:t>앞에서 말씀드린 배선 문제를 고치고, 형상에 전류를 곱한 320케이스로 재학습 중입니다.</a:t>
+            </a:r>
+          </a:p>
+          <a:p>
+            <a:r>
+              <a:rPr sz="1100">
+                <a:latin typeface="맑은 고딕"/>
+              </a:rPr>
+              <a:t>전류가 실제로 솔브에 반영되는 첫 데이터셋입니다.</a:t>
+            </a:r>
+          </a:p>
+          <a:p>
+            <a:r>
+              <a:rPr sz="1100">
+                <a:latin typeface="맑은 고딕"/>
+              </a:rPr>
+              <a:t>【발표 시점에 진행 상황이나 결과를 갱신하십시오.】</a:t>
+            </a:r>
+          </a:p>
+          <a:p/>
+          <a:p>
+            <a:r>
+              <a:rPr sz="1100">
+                <a:latin typeface="맑은 고딕"/>
+              </a:rPr>
+              <a:t>부가 자산도 하나 언급드리면, warm-start PoC를 만들다가 numpy와 scipy만으로 도는</a:t>
+            </a:r>
+          </a:p>
+          <a:p>
+            <a:r>
+              <a:rPr sz="1100">
+                <a:latin typeface="맑은 고딕"/>
+              </a:rPr>
+              <a:t>참조 FEM 솔버를 확보했습니다. Motor-CAD 토크를 0.2% 이내로 재현합니다.</a:t>
+            </a:r>
+          </a:p>
+          <a:p>
+            <a:r>
+              <a:rPr sz="1100">
+                <a:latin typeface="맑은 고딕"/>
+              </a:rPr>
+              <a:t>상용 라이선스 없이 정답을 만들 수 있다는 뜻이라, 데이터를 우리 손으로 생성할 때 엔진이 됩니다.</a:t>
+            </a:r>
+          </a:p>
+          <a:p/>
+          <a:p>
+            <a:r>
+              <a:rPr sz="1100">
+                <a:latin typeface="맑은 고딕"/>
+              </a:rPr>
+              <a:t>병행해서 논문화도 진행 중입니다. 음성 결과와 게이트를 다시 정의한 것 자체가</a:t>
+            </a:r>
+          </a:p>
+          <a:p>
+            <a:r>
+              <a:rPr sz="1100">
+                <a:latin typeface="맑은 고딕"/>
+              </a:rPr>
+              <a:t>방법론 기여로 들어갑니다.</a:t>
+            </a:r>
+          </a:p>
+          <a:p/>
+          <a:p>
+            <a:r>
+              <a:rPr sz="1100">
+                <a:latin typeface="맑은 고딕"/>
+              </a:rPr>
+              <a:t>여기까지입니다. 질문 받겠습니다.</a:t>
             </a:r>
           </a:p>
         </p:txBody>
@@ -1167,81 +1286,7 @@
               <a:rPr sz="1100">
                 <a:latin typeface="맑은 고딕"/>
               </a:rPr>
-              <a:t>서로게이트를 Newton 반복의 초기값으로 쓰면 FEM 보장을 유지하면서 속도를 벌 수 있지 않나 —</a:t>
-            </a:r>
-          </a:p>
-          <a:p>
-            <a:r>
-              <a:rPr sz="1100">
-                <a:latin typeface="맑은 고딕"/>
-              </a:rPr>
-              <a:t>Monumo가 제시한 방향이고, 저희는 future work로 남기지 않고 만들어서 쟀습니다.</a:t>
-            </a:r>
-          </a:p>
-          <a:p>
-            <a:r>
-              <a:rPr sz="1100">
-                <a:latin typeface="맑은 고딕"/>
-              </a:rPr>
-              <a:t>평가 형상 2개 × 45자세 = 90번 솔브입니다.</a:t>
-            </a:r>
-          </a:p>
-          <a:p/>
-          <a:p>
-            <a:r>
-              <a:rPr sz="1100">
-                <a:latin typeface="맑은 고딕"/>
-              </a:rPr>
-              <a:t>결과는 음성입니다. 0에서 시작하면 17.5회인데 AI 초기값은 14.8회로 15% 줄었습니다.</a:t>
-            </a:r>
-          </a:p>
-          <a:p>
-            <a:r>
-              <a:rPr sz="1100">
-                <a:latin typeface="맑은 고딕"/>
-              </a:rPr>
-              <a:t>그런데 실무에서는 아무도 0에서 시작하지 않습니다. 직전 자세의 해를 이월하는데 그게 9.27회입니다.</a:t>
-            </a:r>
-          </a:p>
-          <a:p>
-            <a:r>
-              <a:rPr sz="1100">
-                <a:latin typeface="맑은 고딕"/>
-              </a:rPr>
-              <a:t>AI가 60% 더 느립니다.</a:t>
-            </a:r>
-          </a:p>
-          <a:p/>
-          <a:p>
-            <a:r>
-              <a:rPr sz="1100">
-                <a:latin typeface="맑은 고딕"/>
-              </a:rPr>
-              <a:t>왜 졌는지도 알아냈습니다. 이 체크포인트의 필드 오차가 18.7%인데,</a:t>
-            </a:r>
-          </a:p>
-          <a:p>
-            <a:r>
-              <a:rPr sz="1100">
-                <a:latin typeface="맑은 고딕"/>
-              </a:rPr>
-              <a:t>2도 회전한 이웃 자세의 수렴해는 그보다 훨씬 정확합니다.</a:t>
-            </a:r>
-          </a:p>
-          <a:p>
-            <a:r>
-              <a:rPr sz="1100">
-                <a:latin typeface="맑은 고딕"/>
-              </a:rPr>
-              <a:t>서로게이트가 이기려면 "2도 회전만큼"보다 정확해야 하는데 근처도 못 갑니다.</a:t>
-            </a:r>
-          </a:p>
-          <a:p>
-            <a:r>
-              <a:rPr sz="1100">
-                <a:latin typeface="맑은 고딕"/>
-              </a:rPr>
-              <a:t>아이디어의 반증이 아니라 현재 정확도의 결과입니다. 정확도가 올라가면 다시 볼 만합니다.</a:t>
+              <a:t>여기까지가 본편입니다. 이하는 질문이 나올 때만 띄우는 백업 슬라이드이고, 맨 뒤 두 장은 오늘 나온 용어를 정리한 용어집입니다.</a:t>
             </a:r>
           </a:p>
         </p:txBody>
@@ -1314,6 +1359,153 @@
               <a:rPr sz="1100">
                 <a:latin typeface="맑은 고딕"/>
               </a:rPr>
+              <a:t>AI 예측을 Newton 반복의 초기값으로 쓰면 FEM의 보장을 유지하면서 속도를 벌 수 있지 않나 —</a:t>
+            </a:r>
+          </a:p>
+          <a:p>
+            <a:r>
+              <a:rPr sz="1100">
+                <a:latin typeface="맑은 고딕"/>
+              </a:rPr>
+              <a:t>모터 AI 스타트업 Monumo가 제시한 방향이고, 저희는 숙제로 남기지 않고 만들어서 쟀습니다.</a:t>
+            </a:r>
+          </a:p>
+          <a:p>
+            <a:r>
+              <a:rPr sz="1100">
+                <a:latin typeface="맑은 고딕"/>
+              </a:rPr>
+              <a:t>평가 형상 2개 × 45자세 = 90번 솔브입니다.</a:t>
+            </a:r>
+          </a:p>
+          <a:p/>
+          <a:p>
+            <a:r>
+              <a:rPr sz="1100">
+                <a:latin typeface="맑은 고딕"/>
+              </a:rPr>
+              <a:t>결과는 "효과 없음"입니다. 0에서 시작하면 17.5회인데 AI 초기값은 14.8회로 15% 줄었습니다.</a:t>
+            </a:r>
+          </a:p>
+          <a:p>
+            <a:r>
+              <a:rPr sz="1100">
+                <a:latin typeface="맑은 고딕"/>
+              </a:rPr>
+              <a:t>그런데 실무에서는 아무도 0에서 시작하지 않습니다. 직전 자세의 해를 이월하는데 그게 9.27회입니다.</a:t>
+            </a:r>
+          </a:p>
+          <a:p>
+            <a:r>
+              <a:rPr sz="1100">
+                <a:latin typeface="맑은 고딕"/>
+              </a:rPr>
+              <a:t>AI가 60% 더 느립니다.</a:t>
+            </a:r>
+          </a:p>
+          <a:p/>
+          <a:p>
+            <a:r>
+              <a:rPr sz="1100">
+                <a:latin typeface="맑은 고딕"/>
+              </a:rPr>
+              <a:t>왜 졌는지도 알아냈습니다. 이 실험 당시 모델의 필드 오차가 18.7%인데,</a:t>
+            </a:r>
+          </a:p>
+          <a:p>
+            <a:r>
+              <a:rPr sz="1100">
+                <a:latin typeface="맑은 고딕"/>
+              </a:rPr>
+              <a:t>2도 회전한 이웃 자세의 수렴해는 그보다 훨씬 정확합니다.</a:t>
+            </a:r>
+          </a:p>
+          <a:p>
+            <a:r>
+              <a:rPr sz="1100">
+                <a:latin typeface="맑은 고딕"/>
+              </a:rPr>
+              <a:t>서로게이트가 이기려면 "2도 회전만큼"보다 정확해야 하는데 근처도 못 갑니다.</a:t>
+            </a:r>
+          </a:p>
+          <a:p>
+            <a:r>
+              <a:rPr sz="1100">
+                <a:latin typeface="맑은 고딕"/>
+              </a:rPr>
+              <a:t>아이디어의 반증이 아니라 현재 정확도의 결과입니다. 정확도가 올라가면 다시 볼 만합니다.</a:t>
+            </a:r>
+          </a:p>
+        </p:txBody>
+      </p:sp>
+      <p:sp>
+        <p:nvSpPr>
+          <p:cNvPr id="4" name="Slide Number Placeholder 3"/>
+          <p:cNvSpPr>
+            <a:spLocks noGrp="1"/>
+          </p:cNvSpPr>
+          <p:nvPr>
+            <p:ph type="sldNum" idx="5" sz="quarter"/>
+          </p:nvPr>
+        </p:nvSpPr>
+        <p:spPr/>
+      </p:sp>
+    </p:spTree>
+  </p:cSld>
+  <p:clrMapOvr>
+    <a:masterClrMapping/>
+  </p:clrMapOvr>
+</p:notes>
+</file>
+
+<file path=ppt/notesSlides/notesSlide15.xml><?xml version="1.0" encoding="utf-8"?>
+<p:notes xmlns:a="http://schemas.openxmlformats.org/drawingml/2006/main" xmlns:p="http://schemas.openxmlformats.org/presentationml/2006/main" xmlns:r="http://schemas.openxmlformats.org/officeDocument/2006/relationships">
+  <p:cSld>
+    <p:spTree>
+      <p:nvGrpSpPr>
+        <p:cNvPr id="1" name=""/>
+        <p:cNvGrpSpPr/>
+        <p:nvPr/>
+      </p:nvGrpSpPr>
+      <p:grpSpPr>
+        <a:xfrm>
+          <a:off x="0" y="0"/>
+          <a:ext cx="0" cy="0"/>
+          <a:chOff x="0" y="0"/>
+          <a:chExt cx="0" cy="0"/>
+        </a:xfrm>
+      </p:grpSpPr>
+      <p:sp>
+        <p:nvSpPr>
+          <p:cNvPr id="2" name="Slide Image Placeholder 1"/>
+          <p:cNvSpPr>
+            <a:spLocks noGrp="1"/>
+          </p:cNvSpPr>
+          <p:nvPr>
+            <p:ph type="sldImg" idx="2"/>
+          </p:nvPr>
+        </p:nvSpPr>
+        <p:spPr/>
+      </p:sp>
+      <p:sp>
+        <p:nvSpPr>
+          <p:cNvPr id="3" name="Notes Placeholder 2"/>
+          <p:cNvSpPr>
+            <a:spLocks noGrp="1"/>
+          </p:cNvSpPr>
+          <p:nvPr>
+            <p:ph type="body" idx="3" sz="quarter"/>
+          </p:nvPr>
+        </p:nvSpPr>
+        <p:spPr/>
+        <p:txBody>
+          <a:bodyPr/>
+          <a:lstStyle/>
+          <a:p>
+            <a:r>
+              <a:rPr sz="1100">
+                <a:latin typeface="맑은 고딕"/>
+              </a:rPr>
               <a:t>영역별로 쪼갠 성적표입니다. 오른쪽이 도달 가능 바닥입니다.</a:t>
             </a:r>
           </a:p>
@@ -1323,23 +1515,23 @@
               <a:rPr sz="1100">
                 <a:latin typeface="맑은 고딕"/>
               </a:rPr>
-              <a:t>전체 pooled 11.6%라는 숫자는 사실 오해를 부릅니다.</a:t>
-            </a:r>
-          </a:p>
-          <a:p>
-            <a:r>
-              <a:rPr sz="1100">
-                <a:latin typeface="맑은 고딕"/>
-              </a:rPr>
-              <a:t>권선이나 회전자 공기층처럼 장이 거의 0이라 정규화가 폭발하는 영역이 섞여 있습니다.</a:t>
-            </a:r>
-          </a:p>
-          <a:p>
-            <a:r>
-              <a:rPr sz="1100">
-                <a:latin typeface="맑은 고딕"/>
-              </a:rPr>
-              <a:t>그래서 저희는 pooled보다 공극과 토크를 주 지표로 봅니다.</a:t>
+              <a:t>전체 평균 11.6%라는 숫자는 사실 오해를 부릅니다.</a:t>
+            </a:r>
+          </a:p>
+          <a:p>
+            <a:r>
+              <a:rPr sz="1100">
+                <a:latin typeface="맑은 고딕"/>
+              </a:rPr>
+              <a:t>권선이나 회전자 공기층처럼 장이 거의 0이라, 나누는 분모가 작아져 %가 튀는 영역이</a:t>
+            </a:r>
+          </a:p>
+          <a:p>
+            <a:r>
+              <a:rPr sz="1100">
+                <a:latin typeface="맑은 고딕"/>
+              </a:rPr>
+              <a:t>섞여 있습니다. 그래서 저희는 전체 평균보다 공극과 토크를 주 지표로 봅니다.</a:t>
             </a:r>
           </a:p>
           <a:p/>
@@ -1389,7 +1581,7 @@
               <a:rPr sz="1100">
                 <a:latin typeface="맑은 고딕"/>
               </a:rPr>
-              <a:t>스케일링 곡선도 3점이라 기울기는 정해지지만 함수형은 안 정해집니다.</a:t>
+              <a:t>데이터-오차 곡선도 3점뿐이라 기울기는 정해지지만 곡선의 정확한 모양은 안 정해집니다.</a:t>
             </a:r>
           </a:p>
           <a:p>
@@ -1398,6 +1590,152 @@
                 <a:latin typeface="맑은 고딕"/>
               </a:rPr>
               <a:t>그래서 "3만 4천 형상 필요" 같은 숫자는 예측이 아니라 자릿수 수준의 비현실성 논증으로만 읽어야 합니다.</a:t>
+            </a:r>
+          </a:p>
+        </p:txBody>
+      </p:sp>
+      <p:sp>
+        <p:nvSpPr>
+          <p:cNvPr id="4" name="Slide Number Placeholder 3"/>
+          <p:cNvSpPr>
+            <a:spLocks noGrp="1"/>
+          </p:cNvSpPr>
+          <p:nvPr>
+            <p:ph type="sldNum" idx="5" sz="quarter"/>
+          </p:nvPr>
+        </p:nvSpPr>
+        <p:spPr/>
+      </p:sp>
+    </p:spTree>
+  </p:cSld>
+  <p:clrMapOvr>
+    <a:masterClrMapping/>
+  </p:clrMapOvr>
+</p:notes>
+</file>
+
+<file path=ppt/notesSlides/notesSlide16.xml><?xml version="1.0" encoding="utf-8"?>
+<p:notes xmlns:a="http://schemas.openxmlformats.org/drawingml/2006/main" xmlns:p="http://schemas.openxmlformats.org/presentationml/2006/main" xmlns:r="http://schemas.openxmlformats.org/officeDocument/2006/relationships">
+  <p:cSld>
+    <p:spTree>
+      <p:nvGrpSpPr>
+        <p:cNvPr id="1" name=""/>
+        <p:cNvGrpSpPr/>
+        <p:nvPr/>
+      </p:nvGrpSpPr>
+      <p:grpSpPr>
+        <a:xfrm>
+          <a:off x="0" y="0"/>
+          <a:ext cx="0" cy="0"/>
+          <a:chOff x="0" y="0"/>
+          <a:chExt cx="0" cy="0"/>
+        </a:xfrm>
+      </p:grpSpPr>
+      <p:sp>
+        <p:nvSpPr>
+          <p:cNvPr id="2" name="Slide Image Placeholder 1"/>
+          <p:cNvSpPr>
+            <a:spLocks noGrp="1"/>
+          </p:cNvSpPr>
+          <p:nvPr>
+            <p:ph type="sldImg" idx="2"/>
+          </p:nvPr>
+        </p:nvSpPr>
+        <p:spPr/>
+      </p:sp>
+      <p:sp>
+        <p:nvSpPr>
+          <p:cNvPr id="3" name="Notes Placeholder 2"/>
+          <p:cNvSpPr>
+            <a:spLocks noGrp="1"/>
+          </p:cNvSpPr>
+          <p:nvPr>
+            <p:ph type="body" idx="3" sz="quarter"/>
+          </p:nvPr>
+        </p:nvSpPr>
+        <p:spPr/>
+        <p:txBody>
+          <a:bodyPr/>
+          <a:lstStyle/>
+          <a:p>
+            <a:r>
+              <a:rPr sz="1100">
+                <a:latin typeface="맑은 고딕"/>
+              </a:rPr>
+              <a:t>발표 중 낯선 용어가 나오면 이 페이지로 돌아와서 짚고 갑니다.</a:t>
+            </a:r>
+          </a:p>
+        </p:txBody>
+      </p:sp>
+      <p:sp>
+        <p:nvSpPr>
+          <p:cNvPr id="4" name="Slide Number Placeholder 3"/>
+          <p:cNvSpPr>
+            <a:spLocks noGrp="1"/>
+          </p:cNvSpPr>
+          <p:nvPr>
+            <p:ph type="sldNum" idx="5" sz="quarter"/>
+          </p:nvPr>
+        </p:nvSpPr>
+        <p:spPr/>
+      </p:sp>
+    </p:spTree>
+  </p:cSld>
+  <p:clrMapOvr>
+    <a:masterClrMapping/>
+  </p:clrMapOvr>
+</p:notes>
+</file>
+
+<file path=ppt/notesSlides/notesSlide17.xml><?xml version="1.0" encoding="utf-8"?>
+<p:notes xmlns:a="http://schemas.openxmlformats.org/drawingml/2006/main" xmlns:p="http://schemas.openxmlformats.org/presentationml/2006/main" xmlns:r="http://schemas.openxmlformats.org/officeDocument/2006/relationships">
+  <p:cSld>
+    <p:spTree>
+      <p:nvGrpSpPr>
+        <p:cNvPr id="1" name=""/>
+        <p:cNvGrpSpPr/>
+        <p:nvPr/>
+      </p:nvGrpSpPr>
+      <p:grpSpPr>
+        <a:xfrm>
+          <a:off x="0" y="0"/>
+          <a:ext cx="0" cy="0"/>
+          <a:chOff x="0" y="0"/>
+          <a:chExt cx="0" cy="0"/>
+        </a:xfrm>
+      </p:grpSpPr>
+      <p:sp>
+        <p:nvSpPr>
+          <p:cNvPr id="2" name="Slide Image Placeholder 1"/>
+          <p:cNvSpPr>
+            <a:spLocks noGrp="1"/>
+          </p:cNvSpPr>
+          <p:nvPr>
+            <p:ph type="sldImg" idx="2"/>
+          </p:nvPr>
+        </p:nvSpPr>
+        <p:spPr/>
+      </p:sp>
+      <p:sp>
+        <p:nvSpPr>
+          <p:cNvPr id="3" name="Notes Placeholder 2"/>
+          <p:cNvSpPr>
+            <a:spLocks noGrp="1"/>
+          </p:cNvSpPr>
+          <p:nvPr>
+            <p:ph type="body" idx="3" sz="quarter"/>
+          </p:nvPr>
+        </p:nvSpPr>
+        <p:spPr/>
+        <p:txBody>
+          <a:bodyPr/>
+          <a:lstStyle/>
+          <a:p>
+            <a:r>
+              <a:rPr sz="1100">
+                <a:latin typeface="맑은 고딕"/>
+              </a:rPr>
+              <a:t>발표 중 낯선 용어가 나오면 이 페이지로 돌아와서 짚고 갑니다.</a:t>
             </a:r>
           </a:p>
         </p:txBody>
@@ -1479,23 +1817,31 @@
               <a:rPr sz="1100">
                 <a:latin typeface="맑은 고딕"/>
               </a:rPr>
-              <a:t>왼쪽, 지금 위치. 공극 7.14%, 토크 3.35%입니다. 목표는 5%와 3%.</a:t>
-            </a:r>
-          </a:p>
-          <a:p>
-            <a:r>
-              <a:rPr sz="1100">
-                <a:latin typeface="맑은 고딕"/>
-              </a:rPr>
-              <a:t>다만 용도를 나눠서 봐야 합니다. "후보 설계를 순위 매겨서 거르는" 스크리닝 용도는</a:t>
-            </a:r>
-          </a:p>
-          <a:p>
-            <a:r>
-              <a:rPr sz="1100">
-                <a:latin typeface="맑은 고딕"/>
-              </a:rPr>
-              <a:t>지금 정확도로 이미 됩니다. 뒤에 근거를 보여드립니다.</a:t>
+              <a:t>왼쪽, 지금 위치. 공극 오차 7.14%, 토크 오차 3.35%입니다. 합격선은 5%와 3%.</a:t>
+            </a:r>
+          </a:p>
+          <a:p>
+            <a:r>
+              <a:rPr sz="1100">
+                <a:latin typeface="맑은 고딕"/>
+              </a:rPr>
+              <a:t>"오차 7%"는 시험용 형상에서 AI 예측과 FEM 참값의 차이를 참값 크기로 나눈 값입니다.</a:t>
+            </a:r>
+          </a:p>
+          <a:p>
+            <a:r>
+              <a:rPr sz="1100">
+                <a:latin typeface="맑은 고딕"/>
+              </a:rPr>
+              <a:t>다만 용도를 나눠서 봐야 합니다. "후보 설계 여럿 중 좋은 것을 골라내는" 용도는</a:t>
+            </a:r>
+          </a:p>
+          <a:p>
+            <a:r>
+              <a:rPr sz="1100">
+                <a:latin typeface="맑은 고딕"/>
+              </a:rPr>
+              <a:t>지금 정확도로 이미 됩니다 — 순위가 FEM과 일치합니다. 뒤에 근거를 보여드립니다.</a:t>
             </a:r>
           </a:p>
           <a:p>
@@ -1512,31 +1858,39 @@
               <a:rPr sz="1100">
                 <a:latin typeface="맑은 고딕"/>
               </a:rPr>
-              <a:t>가운데, 병목 진단. 이게 지난 몇 주의 핵심 결과입니다.</a:t>
-            </a:r>
-          </a:p>
-          <a:p>
-            <a:r>
-              <a:rPr sz="1100">
-                <a:latin typeface="맑은 고딕"/>
-              </a:rPr>
-              <a:t>모델을 키우고, 손실을 바꾸고, 아키텍처를 바꾸고, 출력 표현을 바꿨습니다.</a:t>
-            </a:r>
-          </a:p>
-          <a:p>
-            <a:r>
-              <a:rPr sz="1100">
-                <a:latin typeface="맑은 고딕"/>
-              </a:rPr>
-              <a:t>한 번에 한 축씩만 바꾸는 통제 실험으로요. 전부 안 움직였습니다.</a:t>
-            </a:r>
-          </a:p>
-          <a:p>
-            <a:r>
-              <a:rPr sz="1100">
-                <a:latin typeface="맑은 고딕"/>
-              </a:rPr>
-              <a:t>움직인 건 학습 데이터 양 하나뿐인데, 그 기울기가 너무 얕아서 목표까지 못 갑니다.</a:t>
+              <a:t>가운데, 왜 안 내려가느냐. 이게 지난 몇 주의 핵심 결과입니다.</a:t>
+            </a:r>
+          </a:p>
+          <a:p>
+            <a:r>
+              <a:rPr sz="1100">
+                <a:latin typeface="맑은 고딕"/>
+              </a:rPr>
+              <a:t>모델을 키우고, 학습 방법을 바꾸고, 구조를 바꾸고, 출력 방식을 바꿨습니다.</a:t>
+            </a:r>
+          </a:p>
+          <a:p>
+            <a:r>
+              <a:rPr sz="1100">
+                <a:latin typeface="맑은 고딕"/>
+              </a:rPr>
+              <a:t>한 번에 하나씩만 바꿔서 원인을 특정할 수 있게요. 전부 효과가 없었습니다.</a:t>
+            </a:r>
+          </a:p>
+          <a:p>
+            <a:r>
+              <a:rPr sz="1100">
+                <a:latin typeface="맑은 고딕"/>
+              </a:rPr>
+              <a:t>효과가 있던 건 학습 데이터 양 하나뿐인데, 줄어드는 속도가 너무 느려서</a:t>
+            </a:r>
+          </a:p>
+          <a:p>
+            <a:r>
+              <a:rPr sz="1100">
+                <a:latin typeface="맑은 고딕"/>
+              </a:rPr>
+              <a:t>그 길로는 합격선까지 못 갑니다.</a:t>
             </a:r>
           </a:p>
           <a:p/>
@@ -1545,39 +1899,63 @@
               <a:rPr sz="1100">
                 <a:latin typeface="맑은 고딕"/>
               </a:rPr>
-              <a:t>오른쪽, 그래서 뭘 했고 뭐가 나왔나. 해석 모델로 푼 사전해를 입력 특징에 넣었습니다.</a:t>
-            </a:r>
-          </a:p>
-          <a:p>
-            <a:r>
-              <a:rPr sz="1100">
-                <a:latin typeface="맑은 고딕"/>
-              </a:rPr>
-              <a:t>토크가 5.40에서 3.35%로 움직였습니다. 목표 3%까지 0.35pp 남았습니다.</a:t>
-            </a:r>
-          </a:p>
-          <a:p>
-            <a:r>
-              <a:rPr sz="1100">
-                <a:latin typeface="맑은 고딕"/>
-              </a:rPr>
-              <a:t>다만 정직하게 말씀드리면 사전에 등록한 1차 지표는 공극이었고, 그건 음성입니다.</a:t>
-            </a:r>
-          </a:p>
-          <a:p>
-            <a:r>
-              <a:rPr sz="1100">
-                <a:latin typeface="맑은 고딕"/>
-              </a:rPr>
-              <a:t>공극 7.138%인데 기준이 7.05%였습니다. 0.09pp 차이라 변동 밴드 안입니다.</a:t>
-            </a:r>
-          </a:p>
-          <a:p>
-            <a:r>
-              <a:rPr sz="1100">
-                <a:latin typeface="맑은 고딕"/>
-              </a:rPr>
-              <a:t>그래서 "1차 지표는 음성, 토크는 크게 개선"이라고 둘 다 보고합니다.</a:t>
+              <a:t>오른쪽, 그래서 뭘 했고 뭐가 나왔나. 간이 자기해석(선형 계산) 결과를</a:t>
+            </a:r>
+          </a:p>
+          <a:p>
+            <a:r>
+              <a:rPr sz="1100">
+                <a:latin typeface="맑은 고딕"/>
+              </a:rPr>
+              <a:t>AI 입력에 힌트로 넣었습니다. 토크가 5.40에서 3.35%로 움직였습니다.</a:t>
+            </a:r>
+          </a:p>
+          <a:p>
+            <a:r>
+              <a:rPr sz="1100">
+                <a:latin typeface="맑은 고딕"/>
+              </a:rPr>
+              <a:t>합격선 3%까지 0.35%p 남았습니다.</a:t>
+            </a:r>
+          </a:p>
+          <a:p>
+            <a:r>
+              <a:rPr sz="1100">
+                <a:latin typeface="맑은 고딕"/>
+              </a:rPr>
+              <a:t>다만 정직하게 말씀드리면, 결과를 보기 전에 정해둔 1차 판정 기준은 공극이었고</a:t>
+            </a:r>
+          </a:p>
+          <a:p>
+            <a:r>
+              <a:rPr sz="1100">
+                <a:latin typeface="맑은 고딕"/>
+              </a:rPr>
+              <a:t>그 기준은 통과하지 못했습니다. 공극 7.138%인데 기준이 7.05% 미만이었습니다.</a:t>
+            </a:r>
+          </a:p>
+          <a:p>
+            <a:r>
+              <a:rPr sz="1100">
+                <a:latin typeface="맑은 고딕"/>
+              </a:rPr>
+              <a:t>0.09%p 차이인데, 이 정도는 학습을 다시 돌릴 때마다 생기는 우연 변동 폭 안이라</a:t>
+            </a:r>
+          </a:p>
+          <a:p>
+            <a:r>
+              <a:rPr sz="1100">
+                <a:latin typeface="맑은 고딕"/>
+              </a:rPr>
+              <a:t>"넘었다"고 주장할 수 없습니다. 그래서 "1차 기준은 미달, 토크는 크게 개선" —</a:t>
+            </a:r>
+          </a:p>
+          <a:p>
+            <a:r>
+              <a:rPr sz="1100">
+                <a:latin typeface="맑은 고딕"/>
+              </a:rPr>
+              <a:t>두 사실을 그대로 같이 보고합니다.</a:t>
             </a:r>
           </a:p>
           <a:p/>
@@ -1702,23 +2080,23 @@
               <a:rPr sz="1100">
                 <a:latin typeface="맑은 고딕"/>
               </a:rPr>
-              <a:t>그래서 서로게이트를 학습시킵니다. 메시를 그래프로 바꿔서 GNN에 넣습니다.</a:t>
-            </a:r>
-          </a:p>
-          <a:p>
-            <a:r>
-              <a:rPr sz="1100">
-                <a:latin typeface="맑은 고딕"/>
-              </a:rPr>
-              <a:t>왜 GNN이냐 하면, 형상이 바뀌면 메시가 통째로 달라지기 때문입니다.</a:t>
-            </a:r>
-          </a:p>
-          <a:p>
-            <a:r>
-              <a:rPr sz="1100">
-                <a:latin typeface="맑은 고딕"/>
-              </a:rPr>
-              <a:t>격자에 얹는 CNN 방식으로는 IPM 형상을 담을 수가 없습니다.</a:t>
+              <a:t>그래서 대신 계산해 주는 AI를 학습시킵니다. 메시를 점과 선의 그래프로 바꿔서 넣습니다.</a:t>
+            </a:r>
+          </a:p>
+          <a:p>
+            <a:r>
+              <a:rPr sz="1100">
+                <a:latin typeface="맑은 고딕"/>
+              </a:rPr>
+              <a:t>왜 이 방식이냐 하면, 형상이 바뀌면 메시가 통째로 달라지기 때문입니다.</a:t>
+            </a:r>
+          </a:p>
+          <a:p>
+            <a:r>
+              <a:rPr sz="1100">
+                <a:latin typeface="맑은 고딕"/>
+              </a:rPr>
+              <a:t>사진처럼 규칙적인 격자를 전제하는 AI로는 IPM 형상을 담을 수가 없습니다.</a:t>
             </a:r>
           </a:p>
           <a:p>
@@ -1751,15 +2129,15 @@
               <a:rPr sz="1100">
                 <a:latin typeface="맑은 고딕"/>
               </a:rPr>
-              <a:t>보통 이런 연구는 필드 오차 norm만 보고합니다. 그런데 설계자가 보는 건 토크입니다.</a:t>
-            </a:r>
-          </a:p>
-          <a:p>
-            <a:r>
-              <a:rPr sz="1100">
-                <a:latin typeface="맑은 고딕"/>
-              </a:rPr>
-              <a:t>그래서 저희는 모델이 뱉은 장에 Arkkio 응력 적분을 걸어 토크까지 계산해서 판정합니다.</a:t>
+              <a:t>보통 이런 연구는 필드 오차 수치만 보고합니다. 그런데 설계자가 보는 건 토크입니다.</a:t>
+            </a:r>
+          </a:p>
+          <a:p>
+            <a:r>
+              <a:rPr sz="1100">
+                <a:latin typeface="맑은 고딕"/>
+              </a:rPr>
+              <a:t>그래서 저희는 AI가 내놓은 장에 공극 응력 적분(Arkkio법)을 걸어 토크까지 계산해서 판정합니다.</a:t>
             </a:r>
           </a:p>
         </p:txBody>
@@ -1832,15 +2210,15 @@
               <a:rPr sz="1100">
                 <a:latin typeface="맑은 고딕"/>
               </a:rPr>
-              <a:t>지금 성적입니다. 연한 막대가 이전 챔피언, 진한 막대가 현재 모델,</a:t>
-            </a:r>
-          </a:p>
-          <a:p>
-            <a:r>
-              <a:rPr sz="1100">
-                <a:latin typeface="맑은 고딕"/>
-              </a:rPr>
-              <a:t>빨간 선이 목표, 제일 진한 부분이 도달 가능한 물리적 바닥입니다.</a:t>
+              <a:t>지금 성적입니다. 연한 막대가 직전 최고 모델, 진한 막대가 현재 모델,</a:t>
+            </a:r>
+          </a:p>
+          <a:p>
+            <a:r>
+              <a:rPr sz="1100">
+                <a:latin typeface="맑은 고딕"/>
+              </a:rPr>
+              <a:t>빨간 선이 합격선, 제일 진한 부분이 이 방식으로 도달 가능한 최저 오차입니다.</a:t>
             </a:r>
           </a:p>
           <a:p/>
@@ -1849,31 +2227,31 @@
               <a:rPr sz="1100">
                 <a:latin typeface="맑은 고딕"/>
               </a:rPr>
-              <a:t>좋은 소식부터. 토크가 5.40에서 3.35%로 내려왔습니다. 목표 3%까지 0.35pp 남았습니다.</a:t>
-            </a:r>
-          </a:p>
-          <a:p>
-            <a:r>
-              <a:rPr sz="1100">
-                <a:latin typeface="맑은 고딕"/>
-              </a:rPr>
-              <a:t>G1' 게이트 두 항목 중 하나가 사정권에 들어온 건 이번이 처음입니다.</a:t>
-            </a:r>
-          </a:p>
-          <a:p>
-            <a:r>
-              <a:rPr sz="1100">
-                <a:latin typeface="맑은 고딕"/>
-              </a:rPr>
-              <a:t>특히 데이터 축으로는 토크가 배가당 0.08pp밖에 안 움직여서 사실상 무망으로 판정했었는데,</a:t>
-            </a:r>
-          </a:p>
-          <a:p>
-            <a:r>
-              <a:rPr sz="1100">
-                <a:latin typeface="맑은 고딕"/>
-              </a:rPr>
-              <a:t>물리 주입은 한 번에 2pp를 움직였습니다.</a:t>
+              <a:t>좋은 소식부터. 토크 오차가 5.40에서 3.35%로 내려왔습니다. 합격선 3%까지 0.35%p 남았습니다.</a:t>
+            </a:r>
+          </a:p>
+          <a:p>
+            <a:r>
+              <a:rPr sz="1100">
+                <a:latin typeface="맑은 고딕"/>
+              </a:rPr>
+              <a:t>합격 기준 두 항목 중 하나가 사정권에 들어온 건 이번이 처음입니다.</a:t>
+            </a:r>
+          </a:p>
+          <a:p>
+            <a:r>
+              <a:rPr sz="1100">
+                <a:latin typeface="맑은 고딕"/>
+              </a:rPr>
+              <a:t>특히 데이터를 두 배로 늘려도 토크는 0.08%p밖에 안 움직여서 그 길은 막혔다고 봤었는데,</a:t>
+            </a:r>
+          </a:p>
+          <a:p>
+            <a:r>
+              <a:rPr sz="1100">
+                <a:latin typeface="맑은 고딕"/>
+              </a:rPr>
+              <a:t>물리 힌트는 한 번에 2%p를 움직였습니다.</a:t>
             </a:r>
           </a:p>
           <a:p/>
@@ -1882,31 +2260,47 @@
               <a:rPr sz="1100">
                 <a:latin typeface="맑은 고딕"/>
               </a:rPr>
-              <a:t>그런데 정직하게 말씀드릴 게 있습니다. 저희가 사전에 등록한 1차 판정 지표는 토크가 아니라</a:t>
-            </a:r>
-          </a:p>
-          <a:p>
-            <a:r>
-              <a:rPr sz="1100">
-                <a:latin typeface="맑은 고딕"/>
-              </a:rPr>
-              <a:t>공극이었습니다. 공극은 7.138%가 나왔고 기준이 7.05%였습니다. 0.09pp 차이로 못 넘었습니다.</a:t>
-            </a:r>
-          </a:p>
-          <a:p>
-            <a:r>
-              <a:rPr sz="1100">
-                <a:latin typeface="맑은 고딕"/>
-              </a:rPr>
-              <a:t>변동 밴드 안이라 "개선됐다"고 주장할 수 없습니다. 그래서 1차 지표 기준으로는 음성입니다.</a:t>
-            </a:r>
-          </a:p>
-          <a:p>
-            <a:r>
-              <a:rPr sz="1100">
-                <a:latin typeface="맑은 고딕"/>
-              </a:rPr>
-              <a:t>사전에 기준을 적어놨기 때문에 유리한 지표로 갈아타는 일 없이 이렇게 보고할 수 있습니다.</a:t>
+              <a:t>그런데 정직하게 말씀드릴 게 있습니다. 결과를 보기 전에 정해둔 1차 판정 기준은</a:t>
+            </a:r>
+          </a:p>
+          <a:p>
+            <a:r>
+              <a:rPr sz="1100">
+                <a:latin typeface="맑은 고딕"/>
+              </a:rPr>
+              <a:t>토크가 아니라 공극이었습니다. 공극은 7.138%가 나왔고 기준이 7.05% 미만이었습니다.</a:t>
+            </a:r>
+          </a:p>
+          <a:p>
+            <a:r>
+              <a:rPr sz="1100">
+                <a:latin typeface="맑은 고딕"/>
+              </a:rPr>
+              <a:t>0.09%p 차이로 못 넘었습니다. 이 정도 차이는 같은 학습을 다시 돌릴 때마다 생기는</a:t>
+            </a:r>
+          </a:p>
+          <a:p>
+            <a:r>
+              <a:rPr sz="1100">
+                <a:latin typeface="맑은 고딕"/>
+              </a:rPr>
+              <a:t>우연 변동 폭 안이라 "넘었다"고 주장할 수 없습니다. 그래서 1차 기준은 미달입니다.</a:t>
+            </a:r>
+          </a:p>
+          <a:p>
+            <a:r>
+              <a:rPr sz="1100">
+                <a:latin typeface="맑은 고딕"/>
+              </a:rPr>
+              <a:t>기준을 미리 적어놨기 때문에, 결과를 보고 유리한 지표로 갈아타는 일 없이</a:t>
+            </a:r>
+          </a:p>
+          <a:p>
+            <a:r>
+              <a:rPr sz="1100">
+                <a:latin typeface="맑은 고딕"/>
+              </a:rPr>
+              <a:t>이렇게 그대로 보고할 수 있습니다. 그게 이 기준의 존재 이유입니다.</a:t>
             </a:r>
           </a:p>
           <a:p/>
@@ -1915,23 +2309,31 @@
               <a:rPr sz="1100">
                 <a:latin typeface="맑은 고딕"/>
               </a:rPr>
-              <a:t>세 번째 줄이 다음 작업의 근거입니다. 공극의 도달 가능 바닥이 2.68%입니다.</a:t>
-            </a:r>
-          </a:p>
-          <a:p>
-            <a:r>
-              <a:rPr sz="1100">
-                <a:latin typeface="맑은 고딕"/>
-              </a:rPr>
-              <a:t>지금 7.14%라는 건 표현의 한계에 부딪힌 게 아니라 아직 학습이 못 따라간 겁니다.</a:t>
-            </a:r>
-          </a:p>
-          <a:p>
-            <a:r>
-              <a:rPr sz="1100">
-                <a:latin typeface="맑은 고딕"/>
-              </a:rPr>
-              <a:t>4.5pp 여유가 실제로 있으니 여기가 공략 지점입니다.</a:t>
+              <a:t>세 번째 줄이 다음 작업의 근거입니다. 이 계산 방식의 한계선 — FEM 참값을 우리 방식으로</a:t>
+            </a:r>
+          </a:p>
+          <a:p>
+            <a:r>
+              <a:rPr sz="1100">
+                <a:latin typeface="맑은 고딕"/>
+              </a:rPr>
+              <a:t>옮겨 적기만 해도 남는 오차 — 이 공극 2.68%입니다.</a:t>
+            </a:r>
+          </a:p>
+          <a:p>
+            <a:r>
+              <a:rPr sz="1100">
+                <a:latin typeface="맑은 고딕"/>
+              </a:rPr>
+              <a:t>지금 7.14%라는 건 방식의 한계에 막힌 게 아니라 학습이 아직 못 따라간 겁니다.</a:t>
+            </a:r>
+          </a:p>
+          <a:p>
+            <a:r>
+              <a:rPr sz="1100">
+                <a:latin typeface="맑은 고딕"/>
+              </a:rPr>
+              <a:t>4.5%p 여유가 실제로 있으니 여기가 공략 지점입니다.</a:t>
             </a:r>
           </a:p>
         </p:txBody>
@@ -2105,7 +2507,7 @@
               <a:rPr sz="1100">
                 <a:latin typeface="맑은 고딕"/>
               </a:rPr>
-              <a:t>한 가지 주의드리면, 패널 제목의 퍼센트는 스코어카드 전체 집계값입니다.</a:t>
+              <a:t>한 가지 주의드리면, 패널 제목의 퍼센트는 시험 형상 전체 집계값입니다.</a:t>
             </a:r>
           </a:p>
           <a:p>
@@ -2186,7 +2588,15 @@
               <a:rPr sz="1100">
                 <a:latin typeface="맑은 고딕"/>
               </a:rPr>
-              <a:t>토크 파형입니다. 이 그림 한 장에 두 가지가 같이 들어 있습니다.</a:t>
+              <a:t>방금 그 케이스를 한 전기 주기, 45개 회전 자세로 돌린 애니메이션입니다.</a:t>
+            </a:r>
+          </a:p>
+          <a:p>
+            <a:r>
+              <a:rPr sz="1100">
+                <a:latin typeface="맑은 고딕"/>
+              </a:rPr>
+              <a:t>왼쪽부터 FEM 참값, AI 예측, 차이입니다. 아래는 토크 파형이고 세로선이 현재 자세입니다.</a:t>
             </a:r>
           </a:p>
           <a:p/>
@@ -2195,39 +2605,7 @@
               <a:rPr sz="1100">
                 <a:latin typeface="맑은 고딕"/>
               </a:rPr>
-              <a:t>파란색이 Motor-CAD가 가상일법으로 계산한 토크입니다. 이게 기준입니다.</a:t>
-            </a:r>
-          </a:p>
-          <a:p>
-            <a:r>
-              <a:rPr sz="1100">
-                <a:latin typeface="맑은 고딕"/>
-              </a:rPr>
-              <a:t>두 번째 곡선은 FEM이 푼 장에 우리 Arkkio 응력 적분을 걸어서 나온 토크입니다.</a:t>
-            </a:r>
-          </a:p>
-          <a:p>
-            <a:r>
-              <a:rPr sz="1100">
-                <a:latin typeface="맑은 고딕"/>
-              </a:rPr>
-              <a:t>이 둘의 차이가 평균 0.35%입니다. 즉 우리 토크 계산기 자체가 맞다는 뜻입니다.</a:t>
-            </a:r>
-          </a:p>
-          <a:p>
-            <a:r>
-              <a:rPr sz="1100">
-                <a:latin typeface="맑은 고딕"/>
-              </a:rPr>
-              <a:t>이게 없으면 "서로게이트 토크 오차 3.35%"라는 말이 의미가 없습니다.</a:t>
-            </a:r>
-          </a:p>
-          <a:p>
-            <a:r>
-              <a:rPr sz="1100">
-                <a:latin typeface="맑은 고딕"/>
-              </a:rPr>
-              <a:t>연산자가 틀렸을 가능성을 먼저 지워야 하니까요.</a:t>
+              <a:t>회전자가 돌면서 자속 경로가 바뀌는 걸 AI가 자세마다 따라가는 게 보입니다.</a:t>
             </a:r>
           </a:p>
           <a:p/>
@@ -2236,98 +2614,31 @@
               <a:rPr sz="1100">
                 <a:latin typeface="맑은 고딕"/>
               </a:rPr>
-              <a:t>빨간색이 서로게이트가 예측한 장에 같은 연산자를 건 결과입니다.</a:t>
-            </a:r>
-          </a:p>
-          <a:p>
-            <a:r>
-              <a:rPr sz="1100">
-                <a:latin typeface="맑은 고딕"/>
-              </a:rPr>
-              <a:t>그러니까 기준선과 빨간 선 사이의 간격이 순수하게 모델 탓입니다.</a:t>
-            </a:r>
-          </a:p>
-          <a:p/>
-          <a:p>
-            <a:r>
-              <a:rPr sz="1100">
-                <a:latin typeface="맑은 고딕"/>
-              </a:rPr>
-              <a:t>여기는 정직하게 봐주셔야 합니다. 평균 수준과 리플의 큰 주기는 따라갑니다.</a:t>
-            </a:r>
-          </a:p>
-          <a:p>
-            <a:r>
-              <a:rPr sz="1100">
-                <a:latin typeface="맑은 고딕"/>
-              </a:rPr>
-              <a:t>슬롯 통과로 생기는 골짜기 위치는 대체로 맞습니다.</a:t>
-            </a:r>
-          </a:p>
-          <a:p>
-            <a:r>
-              <a:rPr sz="1100">
-                <a:latin typeface="맑은 고딕"/>
-              </a:rPr>
-              <a:t>그런데 아래 오차 패널을 보시면, 구간에 따라 오차가 확 커지는 데가 있습니다.</a:t>
-            </a:r>
-          </a:p>
-          <a:p>
-            <a:r>
-              <a:rPr sz="1100">
-                <a:latin typeface="맑은 고딕"/>
-              </a:rPr>
-              <a:t>전기각 230도에서 280도 사이가 특히 그렇습니다. 여기서 리플 진폭을 과대예측합니다.</a:t>
-            </a:r>
-          </a:p>
-          <a:p>
-            <a:r>
-              <a:rPr sz="1100">
-                <a:latin typeface="맑은 고딕"/>
-              </a:rPr>
-              <a:t>평균만 맞춘 건 아니지만, 파형을 그대로 쓸 수 있는 수준도 아직 아닙니다.</a:t>
-            </a:r>
-          </a:p>
-          <a:p/>
-          <a:p>
-            <a:r>
-              <a:rPr sz="1100">
-                <a:latin typeface="맑은 고딕"/>
-              </a:rPr>
-              <a:t>test 전체로 집계한 토크 오차가 3.354%인데, 이 그림은 그 숫자가 한 케이스에서</a:t>
-            </a:r>
-          </a:p>
-          <a:p>
-            <a:r>
-              <a:rPr sz="1100">
-                <a:latin typeface="맑은 고딕"/>
-              </a:rPr>
-              <a:t>어떤 모양으로 나타나는지를 보여주는 겁니다.</a:t>
-            </a:r>
-          </a:p>
-          <a:p>
-            <a:r>
-              <a:rPr sz="1100">
-                <a:latin typeface="맑은 고딕"/>
-              </a:rPr>
-              <a:t>NVH까지 보시려면 이 빨간 곡선이 초록색만큼 붙어야 하고, 그게 남은 과제입니다.</a:t>
-            </a:r>
-          </a:p>
-          <a:p/>
-          <a:p>
-            <a:r>
-              <a:rPr sz="1100">
-                <a:latin typeface="맑은 고딕"/>
-              </a:rPr>
-              <a:t>참고로 이 검증 수치는 한 번 정정된 적이 있습니다. 문서에 0.60%로 적혀 있었는데</a:t>
-            </a:r>
-          </a:p>
-          <a:p>
-            <a:r>
-              <a:rPr sz="1100">
-                <a:latin typeface="맑은 고딕"/>
-              </a:rPr>
-              <a:t>어느 커밋된 아티팩트에서도 재현이 안 돼서 재유도했고, 재현되는 값은 0.35%입니다.</a:t>
+              <a:t>토크 곡선 하나만 짚고 가겠습니다. 봉우리를 세보시면 높은 것 낮은 것이 번갈아 12개입니다.</a:t>
+            </a:r>
+          </a:p>
+          <a:p>
+            <a:r>
+              <a:rPr sz="1100">
+                <a:latin typeface="맑은 고딕"/>
+              </a:rPr>
+              <a:t>3상 기계니까 6개 아니냐고 하실 수 있는데, 이 기계는 슬롯 고조파(12차)가</a:t>
+            </a:r>
+          </a:p>
+          <a:p>
+            <a:r>
+              <a:rPr sz="1100">
+                <a:latin typeface="맑은 고딕"/>
+              </a:rPr>
+              <a:t>6차보다 1.6~2.1배 커서 12개가 맞습니다. 저희도 처음에 6개를 기대하고 파형이 지저분하다고</a:t>
+            </a:r>
+          </a:p>
+          <a:p>
+            <a:r>
+              <a:rPr sz="1100">
+                <a:latin typeface="맑은 고딕"/>
+              </a:rPr>
+              <a:t>생각했다가, 주파수 분석으로 확인하고서야 이게 정상 파형이라는 걸 알았습니다.</a:t>
             </a:r>
           </a:p>
         </p:txBody>
@@ -2400,23 +2711,7 @@
               <a:rPr sz="1100">
                 <a:latin typeface="맑은 고딕"/>
               </a:rPr>
-              <a:t>이게 진단의 근거입니다. 캠페인 전체를 한 장에 담았습니다.</a:t>
-            </a:r>
-          </a:p>
-          <a:p>
-            <a:r>
-              <a:rPr sz="1100">
-                <a:latin typeface="맑은 고딕"/>
-              </a:rPr>
-              <a:t>위가 필드 오차, 아래가 토크 오차. 왼쪽에서 오른쪽으로 시간 순서고,</a:t>
-            </a:r>
-          </a:p>
-          <a:p>
-            <a:r>
-              <a:rPr sz="1100">
-                <a:latin typeface="맑은 고딕"/>
-              </a:rPr>
-              <a:t>각 막대는 바로 앞 구성에서 딱 한 축만 바꾼 겁니다.</a:t>
+              <a:t>토크 파형입니다. 이 그림 한 장에 두 가지가 같이 들어 있습니다.</a:t>
             </a:r>
           </a:p>
           <a:p/>
@@ -2425,15 +2720,39 @@
               <a:rPr sz="1100">
                 <a:latin typeface="맑은 고딕"/>
               </a:rPr>
-              <a:t>파란색은 용량입니다. 파라미터를 230만에서 930만으로 늘렸는데 13.0에서 12.7,</a:t>
-            </a:r>
-          </a:p>
-          <a:p>
-            <a:r>
-              <a:rPr sz="1100">
-                <a:latin typeface="맑은 고딕"/>
-              </a:rPr>
-              <a:t>런간 변동 0.25pp 안에서 안 움직입니다. 깊이를 늘려도 마찬가지입니다.</a:t>
+              <a:t>파란색이 Motor-CAD가 자체 방식(가상일법)으로 계산한 토크입니다. 이게 기준입니다.</a:t>
+            </a:r>
+          </a:p>
+          <a:p>
+            <a:r>
+              <a:rPr sz="1100">
+                <a:latin typeface="맑은 고딕"/>
+              </a:rPr>
+              <a:t>두 번째 곡선은 FEM이 푼 장에 우리 토크 계산기(Arkkio 적분)를 걸어서 나온 토크입니다.</a:t>
+            </a:r>
+          </a:p>
+          <a:p>
+            <a:r>
+              <a:rPr sz="1100">
+                <a:latin typeface="맑은 고딕"/>
+              </a:rPr>
+              <a:t>이 둘의 차이가 평균 0.35%입니다. 즉 우리 토크 계산기 자체가 맞다는 뜻입니다.</a:t>
+            </a:r>
+          </a:p>
+          <a:p>
+            <a:r>
+              <a:rPr sz="1100">
+                <a:latin typeface="맑은 고딕"/>
+              </a:rPr>
+              <a:t>이게 없으면 "AI 토크 오차 3.35%"라는 말이 의미가 없습니다.</a:t>
+            </a:r>
+          </a:p>
+          <a:p>
+            <a:r>
+              <a:rPr sz="1100">
+                <a:latin typeface="맑은 고딕"/>
+              </a:rPr>
+              <a:t>계산기가 틀렸을 가능성을 먼저 지워야 하니까요.</a:t>
             </a:r>
           </a:p>
           <a:p/>
@@ -2442,7 +2761,15 @@
               <a:rPr sz="1100">
                 <a:latin typeface="맑은 고딕"/>
               </a:rPr>
-              <a:t>초록색은 감독 신호. 필드 오차는 평탄합니다. 다만 토크는 움직였습니다 — 이건 뒤에 나옵니다.</a:t>
+              <a:t>빨간색이 AI가 예측한 장에 같은 계산기를 건 결과입니다.</a:t>
+            </a:r>
+          </a:p>
+          <a:p>
+            <a:r>
+              <a:rPr sz="1100">
+                <a:latin typeface="맑은 고딕"/>
+              </a:rPr>
+              <a:t>그러니까 기준선과 빨간 선 사이의 간격이 순수하게 모델 탓입니다.</a:t>
             </a:r>
           </a:p>
           <a:p/>
@@ -2451,15 +2778,39 @@
               <a:rPr sz="1100">
                 <a:latin typeface="맑은 고딕"/>
               </a:rPr>
-              <a:t>주황색은 아키텍처. 전역 어텐션을 넣었더니 16.6%로 오히려 나빠졌고,</a:t>
-            </a:r>
-          </a:p>
-          <a:p>
-            <a:r>
-              <a:rPr sz="1100">
-                <a:latin typeface="맑은 고딕"/>
-              </a:rPr>
-              <a:t>장거리 엣지를 넣어도 제자리입니다.</a:t>
+              <a:t>여기는 정직하게 봐주셔야 합니다. 평균 수준과 리플의 큰 주기는 따라갑니다.</a:t>
+            </a:r>
+          </a:p>
+          <a:p>
+            <a:r>
+              <a:rPr sz="1100">
+                <a:latin typeface="맑은 고딕"/>
+              </a:rPr>
+              <a:t>슬롯 통과로 생기는 골짜기 위치는 대체로 맞습니다.</a:t>
+            </a:r>
+          </a:p>
+          <a:p>
+            <a:r>
+              <a:rPr sz="1100">
+                <a:latin typeface="맑은 고딕"/>
+              </a:rPr>
+              <a:t>그런데 아래 오차 패널을 보시면, 구간에 따라 오차가 확 커지는 데가 있습니다.</a:t>
+            </a:r>
+          </a:p>
+          <a:p>
+            <a:r>
+              <a:rPr sz="1100">
+                <a:latin typeface="맑은 고딕"/>
+              </a:rPr>
+              <a:t>전기각 230도에서 280도 사이가 특히 그렇습니다. 여기서 리플 진폭을 과대예측합니다.</a:t>
+            </a:r>
+          </a:p>
+          <a:p>
+            <a:r>
+              <a:rPr sz="1100">
+                <a:latin typeface="맑은 고딕"/>
+              </a:rPr>
+              <a:t>평균만 맞춘 건 아니지만, 파형을 그대로 쓸 수 있는 수준도 아직 아닙니다.</a:t>
             </a:r>
           </a:p>
           <a:p/>
@@ -2468,7 +2819,23 @@
               <a:rPr sz="1100">
                 <a:latin typeface="맑은 고딕"/>
               </a:rPr>
-              <a:t>빨간색은 출력 표현. 18.7%로 크게 나빠졌습니다.</a:t>
+              <a:t>test 전체로 집계한 토크 오차가 3.354%인데, 이 그림은 그 숫자가 한 케이스에서</a:t>
+            </a:r>
+          </a:p>
+          <a:p>
+            <a:r>
+              <a:rPr sz="1100">
+                <a:latin typeface="맑은 고딕"/>
+              </a:rPr>
+              <a:t>어떤 모양으로 나타나는지를 보여주는 겁니다.</a:t>
+            </a:r>
+          </a:p>
+          <a:p>
+            <a:r>
+              <a:rPr sz="1100">
+                <a:latin typeface="맑은 고딕"/>
+              </a:rPr>
+              <a:t>NVH까지 보시려면 이 빨간 곡선이 초록색만큼 붙어야 하고, 그게 남은 과제입니다.</a:t>
             </a:r>
           </a:p>
           <a:p/>
@@ -2477,32 +2844,15 @@
               <a:rPr sz="1100">
                 <a:latin typeface="맑은 고딕"/>
               </a:rPr>
-              <a:t>그리고 오른쪽 끝 청록색이 데이터입니다. 학습 형상 수를 늘렸더니 처음으로 바닥이 깨졌습니다.</a:t>
-            </a:r>
-          </a:p>
-          <a:p/>
-          <a:p>
-            <a:r>
-              <a:rPr sz="1100">
-                <a:latin typeface="맑은 고딕"/>
-              </a:rPr>
-              <a:t>솔직히 말씀드리면 앞의 네 축은 전부 음성입니다. 실험의 상당수가 실패였습니다.</a:t>
-            </a:r>
-          </a:p>
-          <a:p>
-            <a:r>
-              <a:rPr sz="1100">
-                <a:latin typeface="맑은 고딕"/>
-              </a:rPr>
-              <a:t>그런데 이 실패들이 "병목은 모델이 아니라 데이터, 즉 정보다"라는 진단을 만들어줬습니다.</a:t>
-            </a:r>
-          </a:p>
-          <a:p>
-            <a:r>
-              <a:rPr sz="1100">
-                <a:latin typeface="맑은 고딕"/>
-              </a:rPr>
-              <a:t>하나씩 지워보지 않았으면 지금 물리 주입으로 가는 근거가 없었을 겁니다.</a:t>
+              <a:t>참고로 이 검증 수치는 한 번 정정된 적이 있습니다. 문서에 0.60%로 적혀 있었는데</a:t>
+            </a:r>
+          </a:p>
+          <a:p>
+            <a:r>
+              <a:rPr sz="1100">
+                <a:latin typeface="맑은 고딕"/>
+              </a:rPr>
+              <a:t>어느 커밋된 아티팩트에서도 재현이 안 돼서 재유도했고, 재현되는 값은 0.35%입니다.</a:t>
             </a:r>
           </a:p>
         </p:txBody>
@@ -2575,7 +2925,31 @@
               <a:rPr sz="1100">
                 <a:latin typeface="맑은 고딕"/>
               </a:rPr>
-              <a:t>데이터 축을 자세히 보겠습니다.</a:t>
+              <a:t>이게 진단의 근거입니다. 캠페인 전체를 한 장에 담았습니다.</a:t>
+            </a:r>
+          </a:p>
+          <a:p>
+            <a:r>
+              <a:rPr sz="1100">
+                <a:latin typeface="맑은 고딕"/>
+              </a:rPr>
+              <a:t>위가 필드 오차, 아래가 토크 오차. 왼쪽에서 오른쪽으로 시간 순서고,</a:t>
+            </a:r>
+          </a:p>
+          <a:p>
+            <a:r>
+              <a:rPr sz="1100">
+                <a:latin typeface="맑은 고딕"/>
+              </a:rPr>
+              <a:t>각 막대는 바로 앞 구성에서 딱 한 가지만 바꾼 겁니다.</a:t>
+            </a:r>
+          </a:p>
+          <a:p>
+            <a:r>
+              <a:rPr sz="1100">
+                <a:latin typeface="맑은 고딕"/>
+              </a:rPr>
+              <a:t>바꿔본 네 가지는 앞 요약과 같은 이름으로: 크기, 학습 방법, 구조, 출력 방식입니다.</a:t>
             </a:r>
           </a:p>
           <a:p/>
@@ -2584,23 +2958,23 @@
               <a:rPr sz="1100">
                 <a:latin typeface="맑은 고딕"/>
               </a:rPr>
-              <a:t>학습 형상을 40, 120, 240으로 늘리면 필드 오차가 12.75에서 11.64%까지 내려갑니다.</a:t>
-            </a:r>
-          </a:p>
-          <a:p>
-            <a:r>
-              <a:rPr sz="1100">
-                <a:latin typeface="맑은 고딕"/>
-              </a:rPr>
-              <a:t>개선이 광범위합니다 — 6개 평가 형상이 전부, 매 단계마다 좋아집니다.</a:t>
-            </a:r>
-          </a:p>
-          <a:p>
-            <a:r>
-              <a:rPr sz="1100">
-                <a:latin typeface="맑은 고딕"/>
-              </a:rPr>
-              <a:t>한 케이스가 평균을 끌고 가는 게 아닙니다.</a:t>
+              <a:t>파란색은 모델 크기입니다. 모델 내부의 조절 가능한 숫자(파라미터)를 230만 개에서</a:t>
+            </a:r>
+          </a:p>
+          <a:p>
+            <a:r>
+              <a:rPr sz="1100">
+                <a:latin typeface="맑은 고딕"/>
+              </a:rPr>
+              <a:t>930만 개로 4배 키웠는데 13.0에서 12.7 — 같은 학습을 다시 돌릴 때 생기는</a:t>
+            </a:r>
+          </a:p>
+          <a:p>
+            <a:r>
+              <a:rPr sz="1100">
+                <a:latin typeface="맑은 고딕"/>
+              </a:rPr>
+              <a:t>우연 변동 폭(0.25%p) 안이라 효과가 없는 겁니다. 층을 깊게 해도 마찬가지입니다.</a:t>
             </a:r>
           </a:p>
           <a:p/>
@@ -2609,55 +2983,15 @@
               <a:rPr sz="1100">
                 <a:latin typeface="맑은 고딕"/>
               </a:rPr>
-              <a:t>속이 빈 동그라미를 봐주십시오. 여기에 배울 점이 있습니다.</a:t>
-            </a:r>
-          </a:p>
-          <a:p>
-            <a:r>
-              <a:rPr sz="1100">
-                <a:latin typeface="맑은 고딕"/>
-              </a:rPr>
-              <a:t>저건 처음 나온 240 결과인데, 데이터를 두 배로 늘렸는데 안 내려갔습니다.</a:t>
-            </a:r>
-          </a:p>
-          <a:p>
-            <a:r>
-              <a:rPr sz="1100">
-                <a:latin typeface="맑은 고딕"/>
-              </a:rPr>
-              <a:t>그래서 "스케일링 소진"으로 판정했었습니다.</a:t>
-            </a:r>
-          </a:p>
-          <a:p>
-            <a:r>
-              <a:rPr sz="1100">
-                <a:latin typeface="맑은 고딕"/>
-              </a:rPr>
-              <a:t>원인은 compute를 맞춘다고 에폭을 절반으로 줄인 것이었습니다.</a:t>
-            </a:r>
-          </a:p>
-          <a:p>
-            <a:r>
-              <a:rPr sz="1100">
-                <a:latin typeface="맑은 고딕"/>
-              </a:rPr>
-              <a:t>데이터가 두 배면 에폭도 두 배가 필요한데, 샘플당 노출을 반토막 낸 겁니다.</a:t>
-            </a:r>
-          </a:p>
-          <a:p>
-            <a:r>
-              <a:rPr sz="1100">
-                <a:latin typeface="맑은 고딕"/>
-              </a:rPr>
-              <a:t>다시 돌리니 11.638%가 나왔습니다. 포화가 아니라 학습 부족이었습니다.</a:t>
-            </a:r>
-          </a:p>
-          <a:p>
-            <a:r>
-              <a:rPr sz="1100">
-                <a:latin typeface="맑은 고딕"/>
-              </a:rPr>
-              <a:t>판정 기준을 미리 적어두고 실험했기 때문에 사후 해석 없이 뒤집을 수 있었습니다.</a:t>
+              <a:t>초록색은 학습 방법 — 무엇을 맞히도록 채점할지를 바꾼 실험입니다.</a:t>
+            </a:r>
+          </a:p>
+          <a:p>
+            <a:r>
+              <a:rPr sz="1100">
+                <a:latin typeface="맑은 고딕"/>
+              </a:rPr>
+              <a:t>필드 오차는 평탄합니다. 다만 토크는 움직였습니다 — 이건 뒤에 나옵니다.</a:t>
             </a:r>
           </a:p>
           <a:p/>
@@ -2666,23 +3000,58 @@
               <a:rPr sz="1100">
                 <a:latin typeface="맑은 고딕"/>
               </a:rPr>
-              <a:t>그런데 마지막 두 줄이 문제입니다. 기울기가 데이터 두 배당 0.3pp입니다.</a:t>
-            </a:r>
-          </a:p>
-          <a:p>
-            <a:r>
-              <a:rPr sz="1100">
-                <a:latin typeface="맑은 고딕"/>
-              </a:rPr>
-              <a:t>이 속도로 공극 5%까지 가려면 형상이 3만 4천 개 필요하고, Motor-CAD를 62일 연속 돌려야 합니다.</a:t>
-            </a:r>
-          </a:p>
-          <a:p>
-            <a:r>
-              <a:rPr sz="1100">
-                <a:latin typeface="맑은 고딕"/>
-              </a:rPr>
-              <a:t>현실적으로 안 됩니다. 그래서 다른 레버가 필요하다는 결론이 나온 겁니다.</a:t>
+              <a:t>주황색은 모델 구조. 멀리 떨어진 절점끼리도 직접 정보를 주고받게 하는 구조를</a:t>
+            </a:r>
+          </a:p>
+          <a:p>
+            <a:r>
+              <a:rPr sz="1100">
+                <a:latin typeface="맑은 고딕"/>
+              </a:rPr>
+              <a:t>넣었더니 16.6%로 오히려 나빠졌고, 먼 절점을 직접 잇는 연결선을 추가해도 제자리입니다.</a:t>
+            </a:r>
+          </a:p>
+          <a:p/>
+          <a:p>
+            <a:r>
+              <a:rPr sz="1100">
+                <a:latin typeface="맑은 고딕"/>
+              </a:rPr>
+              <a:t>빨간색은 출력 방식. 18.7%로 크게 나빠졌습니다.</a:t>
+            </a:r>
+          </a:p>
+          <a:p/>
+          <a:p>
+            <a:r>
+              <a:rPr sz="1100">
+                <a:latin typeface="맑은 고딕"/>
+              </a:rPr>
+              <a:t>그리고 오른쪽 끝 청록색이 데이터입니다. 학습 형상 수를 늘렸더니 처음으로 바닥이 깨졌습니다.</a:t>
+            </a:r>
+          </a:p>
+          <a:p/>
+          <a:p>
+            <a:r>
+              <a:rPr sz="1100">
+                <a:latin typeface="맑은 고딕"/>
+              </a:rPr>
+              <a:t>솔직히 말씀드리면 앞의 네 가지는 전부 효과가 없었습니다. 실험의 상당수가 실패였습니다.</a:t>
+            </a:r>
+          </a:p>
+          <a:p>
+            <a:r>
+              <a:rPr sz="1100">
+                <a:latin typeface="맑은 고딕"/>
+              </a:rPr>
+              <a:t>그런데 이 실패들이 "막힌 곳은 모델이 아니라 데이터, 즉 정보다"라는 진단을 만들어줬습니다.</a:t>
+            </a:r>
+          </a:p>
+          <a:p>
+            <a:r>
+              <a:rPr sz="1100">
+                <a:latin typeface="맑은 고딕"/>
+              </a:rPr>
+              <a:t>하나씩 지워보지 않았으면 지금 물리 힌트로 가는 근거가 없었을 겁니다.</a:t>
             </a:r>
           </a:p>
         </p:txBody>
@@ -2755,7 +3124,7 @@
               <a:rPr sz="1100">
                 <a:latin typeface="맑은 고딕"/>
               </a:rPr>
-              <a:t>"그 숫자들을 왜 믿느냐"에 대한 답입니다. 짧게 세 가지만.</a:t>
+              <a:t>데이터 축을 자세히 보겠습니다.</a:t>
             </a:r>
           </a:p>
           <a:p/>
@@ -2764,47 +3133,23 @@
               <a:rPr sz="1100">
                 <a:latin typeface="맑은 고딕"/>
               </a:rPr>
-              <a:t>첫째, 누수를 잡았습니다. time_s라는 입력 특징이 있었는데,</a:t>
-            </a:r>
-          </a:p>
-          <a:p>
-            <a:r>
-              <a:rPr sz="1100">
-                <a:latin typeface="맑은 고딕"/>
-              </a:rPr>
-              <a:t>저희 DOE는 전 케이스가 같은 속도라 이게 회전자각의 상수배였습니다. 상관계수 1.0000.</a:t>
-            </a:r>
-          </a:p>
-          <a:p>
-            <a:r>
-              <a:rPr sz="1100">
-                <a:latin typeface="맑은 고딕"/>
-              </a:rPr>
-              <a:t>독립 정보가 하나도 없는 중복 특징인데 모델이 이걸 주 단서로 학습했습니다.</a:t>
-            </a:r>
-          </a:p>
-          <a:p>
-            <a:r>
-              <a:rPr sz="1100">
-                <a:latin typeface="맑은 고딕"/>
-              </a:rPr>
-              <a:t>이 값만 바꿔서 다시 예측시키니 토크가 −264에서 +48로 부호까지 뒤집혔습니다.</a:t>
-            </a:r>
-          </a:p>
-          <a:p>
-            <a:r>
-              <a:rPr sz="1100">
-                <a:latin typeface="맑은 고딕"/>
-              </a:rPr>
-              <a:t>제거하고 홀드아웃을 케이스 단위로 바꾸니 그때까지 비교하던 모든 모델의 순위가 바뀌었습니다.</a:t>
-            </a:r>
-          </a:p>
-          <a:p>
-            <a:r>
-              <a:rPr sz="1100">
-                <a:latin typeface="맑은 고딕"/>
-              </a:rPr>
-              <a:t>즉 그 전의 비교는 전부 무의미했습니다. 필드 오차만 봤으면 못 잡았을 겁니다.</a:t>
+              <a:t>학습 형상을 40, 120, 240으로 늘리면 필드 오차가 12.75에서 11.64%까지 내려갑니다.</a:t>
+            </a:r>
+          </a:p>
+          <a:p>
+            <a:r>
+              <a:rPr sz="1100">
+                <a:latin typeface="맑은 고딕"/>
+              </a:rPr>
+              <a:t>개선이 광범위합니다 — 6개 평가 형상이 전부, 매 단계마다 좋아집니다.</a:t>
+            </a:r>
+          </a:p>
+          <a:p>
+            <a:r>
+              <a:rPr sz="1100">
+                <a:latin typeface="맑은 고딕"/>
+              </a:rPr>
+              <a:t>한 케이스가 평균을 끌고 가는 게 아닙니다.</a:t>
             </a:r>
           </a:p>
           <a:p/>
@@ -2813,31 +3158,55 @@
               <a:rPr sz="1100">
                 <a:latin typeface="맑은 고딕"/>
               </a:rPr>
-              <a:t>둘째, 표현 바닥값입니다. 성능이 안 나올 때 모델을 탓하기 전에,</a:t>
-            </a:r>
-          </a:p>
-          <a:p>
-            <a:r>
-              <a:rPr sz="1100">
-                <a:latin typeface="맑은 고딕"/>
-              </a:rPr>
-              <a:t>참값을 그 출력 표현으로 한 번 왕복시켜 보면 도달 불가능한 하한이 나옵니다.</a:t>
-            </a:r>
-          </a:p>
-          <a:p>
-            <a:r>
-              <a:rPr sz="1100">
-                <a:latin typeface="맑은 고딕"/>
-              </a:rPr>
-              <a:t>절점 왕복 방식은 토크 바닥이 59%입니다. 쓸 수가 없죠.</a:t>
-            </a:r>
-          </a:p>
-          <a:p>
-            <a:r>
-              <a:rPr sz="1100">
-                <a:latin typeface="맑은 고딕"/>
-              </a:rPr>
-              <a:t>이산 curl은 1.6%입니다. 표현만 바꿔도 37배 차이가 납니다.</a:t>
+              <a:t>속이 빈 동그라미를 봐주십시오. 여기에 배울 점이 있습니다.</a:t>
+            </a:r>
+          </a:p>
+          <a:p>
+            <a:r>
+              <a:rPr sz="1100">
+                <a:latin typeface="맑은 고딕"/>
+              </a:rPr>
+              <a:t>저건 처음 나온 240 결과인데, 데이터를 두 배로 늘렸는데 안 내려갔습니다.</a:t>
+            </a:r>
+          </a:p>
+          <a:p>
+            <a:r>
+              <a:rPr sz="1100">
+                <a:latin typeface="맑은 고딕"/>
+              </a:rPr>
+              <a:t>그래서 "데이터를 늘려도 더는 안 좋아지는 한계에 닿았다"고 판정했었습니다.</a:t>
+            </a:r>
+          </a:p>
+          <a:p>
+            <a:r>
+              <a:rPr sz="1100">
+                <a:latin typeface="맑은 고딕"/>
+              </a:rPr>
+              <a:t>원인은 총 계산 시간을 같게 맞추려고 반복 학습 횟수를 절반으로 줄인 것이었습니다.</a:t>
+            </a:r>
+          </a:p>
+          <a:p>
+            <a:r>
+              <a:rPr sz="1100">
+                <a:latin typeface="맑은 고딕"/>
+              </a:rPr>
+              <a:t>데이터가 두 배면 반복도 두 배가 필요한데, 데이터당 학습량을 반토막 낸 겁니다.</a:t>
+            </a:r>
+          </a:p>
+          <a:p>
+            <a:r>
+              <a:rPr sz="1100">
+                <a:latin typeface="맑은 고딕"/>
+              </a:rPr>
+              <a:t>다시 돌리니 11.638%가 나왔습니다. 한계에 닿은 게 아니라 학습이 부족했던 겁니다.</a:t>
+            </a:r>
+          </a:p>
+          <a:p>
+            <a:r>
+              <a:rPr sz="1100">
+                <a:latin typeface="맑은 고딕"/>
+              </a:rPr>
+              <a:t>판정 기준을 미리 적어두고 실험했기 때문에 사후 해석 없이 뒤집을 수 있었습니다.</a:t>
             </a:r>
           </a:p>
           <a:p/>
@@ -2846,24 +3215,31 @@
               <a:rPr sz="1100">
                 <a:latin typeface="맑은 고딕"/>
               </a:rPr>
-              <a:t>셋째, 토크 연산자 자체를 Motor-CAD와 대조했습니다. 평균 0.35%, 파형 상관 0.996입니다.</a:t>
-            </a:r>
-          </a:p>
-          <a:p>
-            <a:r>
-              <a:rPr sz="1100">
-                <a:latin typeface="맑은 고딕"/>
-              </a:rPr>
-              <a:t>그래서 토크를 1급 지표로 쓸 수 있는 겁니다.</a:t>
-            </a:r>
-          </a:p>
-          <a:p/>
-          <a:p>
-            <a:r>
-              <a:rPr sz="1100">
-                <a:latin typeface="맑은 고딕"/>
-              </a:rPr>
-              <a:t>이 세 가지가 없었으면 앞에서 보여드린 소거 결론을 저희 스스로도 못 믿습니다.</a:t>
+              <a:t>그런데 마지막 두 줄이 문제입니다. 합격 기준 항목인 공극 오차 기준으로,</a:t>
+            </a:r>
+          </a:p>
+          <a:p>
+            <a:r>
+              <a:rPr sz="1100">
+                <a:latin typeface="맑은 고딕"/>
+              </a:rPr>
+              <a:t>줄어드는 속도가 데이터 두 배당 0.32%p입니다.</a:t>
+            </a:r>
+          </a:p>
+          <a:p>
+            <a:r>
+              <a:rPr sz="1100">
+                <a:latin typeface="맑은 고딕"/>
+              </a:rPr>
+              <a:t>이 속도로 공극 5%까지 가려면 형상이 3만 4천 개 필요하고, Motor-CAD를 62일 연속 돌려야 합니다.</a:t>
+            </a:r>
+          </a:p>
+          <a:p>
+            <a:r>
+              <a:rPr sz="1100">
+                <a:latin typeface="맑은 고딕"/>
+              </a:rPr>
+              <a:t>현실적으로 안 됩니다. 그래서 다른 레버가 필요하다는 결론이 나온 겁니다.</a:t>
             </a:r>
           </a:p>
         </p:txBody>
@@ -5942,7 +6318,7 @@
                 </a:solidFill>
                 <a:latin typeface="맑은 고딕"/>
               </a:rPr>
-              <a:t>motorAI — IPM 모터 해석용 GNN 서로게이트</a:t>
+              <a:t>motorAI — Motor-CAD 해석을 대신하는 AI 모델 만들기</a:t>
             </a:r>
           </a:p>
         </p:txBody>
@@ -6015,7 +6391,7 @@
                 </a:solidFill>
                 <a:latin typeface="맑은 고딕"/>
               </a:rPr>
-              <a:t>현재 최고:  공극 |B| 7.14%  ·  토크 3.35%  ·  전체 |B| 11.10%   (held-out 6 geometry)</a:t>
+              <a:t>현재 성적:  공극 자속밀도 오차 7.14%  ·  토크 오차 3.35%   (학습에 쓰지 않은 시험용 형상 6개 기준)</a:t>
             </a:r>
           </a:p>
           <a:p>
@@ -6031,7 +6407,7 @@
                 </a:solidFill>
                 <a:latin typeface="맑은 고딕"/>
               </a:rPr>
-              <a:t>목표 게이트 G1′(공극 5% · 토크 3%) — 공극 2.14 pp, 토크 0.35 pp 남았다</a:t>
+              <a:t>합격 기준(공극 5% · 토크 3%)까지 — 공극 2.14%p, 토크 0.35%p 남았다   ·   낯선 용어는 맨 뒤 용어집 참조</a:t>
             </a:r>
           </a:p>
         </p:txBody>
@@ -6117,7 +6493,7 @@
                 </a:solidFill>
                 <a:latin typeface="맑은 고딕"/>
               </a:rPr>
-              <a:t>개선 항목</a:t>
+              <a:t>근거</a:t>
             </a:r>
           </a:p>
         </p:txBody>
@@ -6151,7 +6527,7 @@
                 </a:solidFill>
                 <a:latin typeface="맑은 고딕"/>
               </a:rPr>
-              <a:t>최근 발견 — DOE 전류축이 솔브에 전달되지 않았다</a:t>
+              <a:t>이 숫자를 믿을 수 있는 이유</a:t>
             </a:r>
           </a:p>
         </p:txBody>
@@ -6186,7 +6562,7 @@
                 </a:solidFill>
                 <a:latin typeface="Consolas"/>
               </a:rPr>
-              <a:t>§24 §26</a:t>
+              <a:t>§7-9 §22</a:t>
             </a:r>
           </a:p>
         </p:txBody>
@@ -6237,6 +6613,802 @@
       </p:sp>
       <p:sp>
         <p:nvSpPr>
+          <p:cNvPr id="6" name="Rectangle 5"/>
+          <p:cNvSpPr/>
+          <p:nvPr/>
+        </p:nvSpPr>
+        <p:spPr>
+          <a:xfrm>
+            <a:off x="566928" y="1645920"/>
+            <a:ext cx="3566160" cy="4069080"/>
+          </a:xfrm>
+          <a:prstGeom prst="rect">
+            <a:avLst/>
+          </a:prstGeom>
+          <a:solidFill>
+            <a:srgbClr val="FAFAFA"/>
+          </a:solidFill>
+          <a:ln>
+            <a:solidFill>
+              <a:srgbClr val="CCD5D3"/>
+            </a:solidFill>
+          </a:ln>
+          <a:effectLst/>
+        </p:spPr>
+        <p:style>
+          <a:lnRef idx="1">
+            <a:schemeClr val="accent1"/>
+          </a:lnRef>
+          <a:fillRef idx="3">
+            <a:schemeClr val="accent1"/>
+          </a:fillRef>
+          <a:effectRef idx="2">
+            <a:schemeClr val="accent1"/>
+          </a:effectRef>
+          <a:fontRef idx="minor">
+            <a:schemeClr val="lt1"/>
+          </a:fontRef>
+        </p:style>
+        <p:txBody>
+          <a:bodyPr rtlCol="0" anchor="ctr" wrap="square" lIns="201168" tIns="164592"/>
+          <a:lstStyle/>
+          <a:p>
+            <a:pPr algn="ctr"/>
+            <a:r>
+              <a:rPr sz="1550" b="1" i="0">
+                <a:solidFill>
+                  <a:srgbClr val="0F7B6C"/>
+                </a:solidFill>
+                <a:latin typeface="맑은 고딕"/>
+              </a:rPr>
+              <a:t>'컨닝'을 세 번 잡아냈다</a:t>
+            </a:r>
+          </a:p>
+          <a:p>
+            <a:pPr>
+              <a:spcAft>
+                <a:spcPts val="300"/>
+              </a:spcAft>
+            </a:pPr>
+            <a:r>
+              <a:rPr sz="1250" b="0" i="0">
+                <a:solidFill>
+                  <a:srgbClr val="1A1A1A"/>
+                </a:solidFill>
+                <a:latin typeface="맑은 고딕"/>
+              </a:rPr>
+              <a:t>시험 답이 학습에 새어 들어가면</a:t>
+            </a:r>
+          </a:p>
+          <a:p>
+            <a:pPr>
+              <a:spcAft>
+                <a:spcPts val="300"/>
+              </a:spcAft>
+            </a:pPr>
+            <a:r>
+              <a:rPr sz="1250" b="0" i="0">
+                <a:solidFill>
+                  <a:srgbClr val="1A1A1A"/>
+                </a:solidFill>
+                <a:latin typeface="맑은 고딕"/>
+              </a:rPr>
+              <a:t>성적이 가짜로 좋아진다(누수).</a:t>
+            </a:r>
+          </a:p>
+          <a:p>
+            <a:pPr>
+              <a:spcAft>
+                <a:spcPts val="300"/>
+              </a:spcAft>
+            </a:pPr>
+            <a:r>
+              <a:rPr sz="1250" b="0" i="0">
+                <a:solidFill>
+                  <a:srgbClr val="1A1A1A"/>
+                </a:solidFill>
+                <a:latin typeface="맑은 고딕"/>
+              </a:rPr>
+              <a:t>예: time_s라는 입력이 회전자각과</a:t>
+            </a:r>
+          </a:p>
+          <a:p>
+            <a:pPr>
+              <a:spcAft>
+                <a:spcPts val="300"/>
+              </a:spcAft>
+            </a:pPr>
+            <a:r>
+              <a:rPr sz="1250" b="0" i="0">
+                <a:solidFill>
+                  <a:srgbClr val="1A1A1A"/>
+                </a:solidFill>
+                <a:latin typeface="맑은 고딕"/>
+              </a:rPr>
+              <a:t>완전히 같은 정보(상관 1.0000)였는데</a:t>
+            </a:r>
+          </a:p>
+          <a:p>
+            <a:pPr>
+              <a:spcAft>
+                <a:spcPts val="300"/>
+              </a:spcAft>
+            </a:pPr>
+            <a:r>
+              <a:rPr sz="1250" b="0" i="0">
+                <a:solidFill>
+                  <a:srgbClr val="1A1A1A"/>
+                </a:solidFill>
+                <a:latin typeface="맑은 고딕"/>
+              </a:rPr>
+              <a:t>AI가 이걸 주 단서로 삼았다.</a:t>
+            </a:r>
+          </a:p>
+          <a:p>
+            <a:pPr>
+              <a:spcAft>
+                <a:spcPts val="300"/>
+              </a:spcAft>
+            </a:pPr>
+            <a:r>
+              <a:rPr sz="1250" b="0" i="0">
+                <a:solidFill>
+                  <a:srgbClr val="1A1A1A"/>
+                </a:solidFill>
+                <a:latin typeface="맑은 고딕"/>
+              </a:rPr>
+              <a:t>이 값 하나만 바꾸니 토크 예측이</a:t>
+            </a:r>
+          </a:p>
+          <a:p>
+            <a:pPr>
+              <a:spcAft>
+                <a:spcPts val="300"/>
+              </a:spcAft>
+            </a:pPr>
+            <a:r>
+              <a:rPr sz="1250" b="0" i="0">
+                <a:solidFill>
+                  <a:srgbClr val="1A1A1A"/>
+                </a:solidFill>
+                <a:latin typeface="맑은 고딕"/>
+              </a:rPr>
+              <a:t>−264 → +48로 부호까지 뒤집혔다.</a:t>
+            </a:r>
+          </a:p>
+          <a:p>
+            <a:pPr>
+              <a:spcAft>
+                <a:spcPts val="300"/>
+              </a:spcAft>
+            </a:pPr>
+            <a:r>
+              <a:rPr sz="1250" b="0" i="0">
+                <a:solidFill>
+                  <a:srgbClr val="1A1A1A"/>
+                </a:solidFill>
+                <a:latin typeface="맑은 고딕"/>
+              </a:rPr>
+              <a:t>제거하고 시험 문제를 형상 단위로</a:t>
+            </a:r>
+          </a:p>
+          <a:p>
+            <a:pPr>
+              <a:spcAft>
+                <a:spcPts val="300"/>
+              </a:spcAft>
+            </a:pPr>
+            <a:r>
+              <a:rPr sz="1250" b="0" i="0">
+                <a:solidFill>
+                  <a:srgbClr val="1A1A1A"/>
+                </a:solidFill>
+                <a:latin typeface="맑은 고딕"/>
+              </a:rPr>
+              <a:t>분리하자 모델들의 순위가 다 바뀌었다.</a:t>
+            </a:r>
+          </a:p>
+        </p:txBody>
+      </p:sp>
+      <p:sp>
+        <p:nvSpPr>
+          <p:cNvPr id="7" name="Rectangle 6"/>
+          <p:cNvSpPr/>
+          <p:nvPr/>
+        </p:nvSpPr>
+        <p:spPr>
+          <a:xfrm>
+            <a:off x="4361688" y="1645920"/>
+            <a:ext cx="3566160" cy="4069080"/>
+          </a:xfrm>
+          <a:prstGeom prst="rect">
+            <a:avLst/>
+          </a:prstGeom>
+          <a:solidFill>
+            <a:srgbClr val="FAFAFA"/>
+          </a:solidFill>
+          <a:ln>
+            <a:solidFill>
+              <a:srgbClr val="CCD5D3"/>
+            </a:solidFill>
+          </a:ln>
+          <a:effectLst/>
+        </p:spPr>
+        <p:style>
+          <a:lnRef idx="1">
+            <a:schemeClr val="accent1"/>
+          </a:lnRef>
+          <a:fillRef idx="3">
+            <a:schemeClr val="accent1"/>
+          </a:fillRef>
+          <a:effectRef idx="2">
+            <a:schemeClr val="accent1"/>
+          </a:effectRef>
+          <a:fontRef idx="minor">
+            <a:schemeClr val="lt1"/>
+          </a:fontRef>
+        </p:style>
+        <p:txBody>
+          <a:bodyPr rtlCol="0" anchor="ctr" wrap="square" lIns="201168" tIns="164592"/>
+          <a:lstStyle/>
+          <a:p>
+            <a:pPr algn="ctr"/>
+            <a:r>
+              <a:rPr sz="1550" b="1" i="0">
+                <a:solidFill>
+                  <a:srgbClr val="0F7B6C"/>
+                </a:solidFill>
+                <a:latin typeface="맑은 고딕"/>
+              </a:rPr>
+              <a:t>방식의 한계선을 먼저 쟀다</a:t>
+            </a:r>
+          </a:p>
+          <a:p>
+            <a:pPr>
+              <a:spcAft>
+                <a:spcPts val="300"/>
+              </a:spcAft>
+            </a:pPr>
+            <a:r>
+              <a:rPr sz="1250" b="0" i="0">
+                <a:solidFill>
+                  <a:srgbClr val="1A1A1A"/>
+                </a:solidFill>
+                <a:latin typeface="맑은 고딕"/>
+              </a:rPr>
+              <a:t>FEM 참값을 우리 계산 방식으로</a:t>
+            </a:r>
+          </a:p>
+          <a:p>
+            <a:pPr>
+              <a:spcAft>
+                <a:spcPts val="300"/>
+              </a:spcAft>
+            </a:pPr>
+            <a:r>
+              <a:rPr sz="1250" b="0" i="0">
+                <a:solidFill>
+                  <a:srgbClr val="1A1A1A"/>
+                </a:solidFill>
+                <a:latin typeface="맑은 고딕"/>
+              </a:rPr>
+              <a:t>옮겨 적기만 해도 남는 오차 =</a:t>
+            </a:r>
+          </a:p>
+          <a:p>
+            <a:pPr>
+              <a:spcAft>
+                <a:spcPts val="300"/>
+              </a:spcAft>
+            </a:pPr>
+            <a:r>
+              <a:rPr sz="1250" b="0" i="0">
+                <a:solidFill>
+                  <a:srgbClr val="1A1A1A"/>
+                </a:solidFill>
+                <a:latin typeface="맑은 고딕"/>
+              </a:rPr>
+              <a:t>어떤 학습으로도 못 넘는 한계선.</a:t>
+            </a:r>
+          </a:p>
+          <a:p>
+            <a:pPr>
+              <a:spcAft>
+                <a:spcPts val="300"/>
+              </a:spcAft>
+            </a:pPr>
+            <a:r>
+              <a:rPr sz="1250" b="0" i="0">
+                <a:solidFill>
+                  <a:srgbClr val="1A1A1A"/>
+                </a:solidFill>
+                <a:latin typeface="맑은 고딕"/>
+              </a:rPr>
+              <a:t/>
+            </a:r>
+          </a:p>
+          <a:p>
+            <a:pPr>
+              <a:spcAft>
+                <a:spcPts val="300"/>
+              </a:spcAft>
+            </a:pPr>
+            <a:r>
+              <a:rPr sz="1250" b="0" i="0">
+                <a:solidFill>
+                  <a:srgbClr val="1A1A1A"/>
+                </a:solidFill>
+                <a:latin typeface="맑은 고딕"/>
+              </a:rPr>
+              <a:t>절점 평균 방식  |B| 16.98%  토크 59.5%</a:t>
+            </a:r>
+          </a:p>
+          <a:p>
+            <a:pPr>
+              <a:spcAft>
+                <a:spcPts val="300"/>
+              </a:spcAft>
+            </a:pPr>
+            <a:r>
+              <a:rPr sz="1250" b="0" i="0">
+                <a:solidFill>
+                  <a:srgbClr val="1A1A1A"/>
+                </a:solidFill>
+                <a:latin typeface="맑은 고딕"/>
+              </a:rPr>
+              <a:t>curl 방식      |B| 5.31%  토크 1.58%</a:t>
+            </a:r>
+          </a:p>
+          <a:p>
+            <a:pPr>
+              <a:spcAft>
+                <a:spcPts val="300"/>
+              </a:spcAft>
+            </a:pPr>
+            <a:r>
+              <a:rPr sz="1250" b="0" i="0">
+                <a:solidFill>
+                  <a:srgbClr val="1A1A1A"/>
+                </a:solidFill>
+                <a:latin typeface="맑은 고딕"/>
+              </a:rPr>
+              <a:t/>
+            </a:r>
+          </a:p>
+          <a:p>
+            <a:pPr>
+              <a:spcAft>
+                <a:spcPts val="300"/>
+              </a:spcAft>
+            </a:pPr>
+            <a:r>
+              <a:rPr sz="1250" b="0" i="0">
+                <a:solidFill>
+                  <a:srgbClr val="1A1A1A"/>
+                </a:solidFill>
+                <a:latin typeface="맑은 고딕"/>
+              </a:rPr>
+              <a:t>방식만 바꿔도 토크 한계가 37배 갈린다.</a:t>
+            </a:r>
+          </a:p>
+          <a:p>
+            <a:pPr>
+              <a:spcAft>
+                <a:spcPts val="300"/>
+              </a:spcAft>
+            </a:pPr>
+            <a:r>
+              <a:rPr sz="1250" b="0" i="0">
+                <a:solidFill>
+                  <a:srgbClr val="1A1A1A"/>
+                </a:solidFill>
+                <a:latin typeface="맑은 고딕"/>
+              </a:rPr>
+              <a:t>AI를 탓하기 전에 이것부터 잰다.</a:t>
+            </a:r>
+          </a:p>
+        </p:txBody>
+      </p:sp>
+      <p:sp>
+        <p:nvSpPr>
+          <p:cNvPr id="8" name="Rectangle 7"/>
+          <p:cNvSpPr/>
+          <p:nvPr/>
+        </p:nvSpPr>
+        <p:spPr>
+          <a:xfrm>
+            <a:off x="8156448" y="1645920"/>
+            <a:ext cx="3566160" cy="4069080"/>
+          </a:xfrm>
+          <a:prstGeom prst="rect">
+            <a:avLst/>
+          </a:prstGeom>
+          <a:solidFill>
+            <a:srgbClr val="FAFAFA"/>
+          </a:solidFill>
+          <a:ln>
+            <a:solidFill>
+              <a:srgbClr val="CCD5D3"/>
+            </a:solidFill>
+          </a:ln>
+          <a:effectLst/>
+        </p:spPr>
+        <p:style>
+          <a:lnRef idx="1">
+            <a:schemeClr val="accent1"/>
+          </a:lnRef>
+          <a:fillRef idx="3">
+            <a:schemeClr val="accent1"/>
+          </a:fillRef>
+          <a:effectRef idx="2">
+            <a:schemeClr val="accent1"/>
+          </a:effectRef>
+          <a:fontRef idx="minor">
+            <a:schemeClr val="lt1"/>
+          </a:fontRef>
+        </p:style>
+        <p:txBody>
+          <a:bodyPr rtlCol="0" anchor="ctr" wrap="square" lIns="201168" tIns="164592"/>
+          <a:lstStyle/>
+          <a:p>
+            <a:pPr algn="ctr"/>
+            <a:r>
+              <a:rPr sz="1550" b="1" i="0">
+                <a:solidFill>
+                  <a:srgbClr val="0F7B6C"/>
+                </a:solidFill>
+                <a:latin typeface="맑은 고딕"/>
+              </a:rPr>
+              <a:t>토크 계산기를 검증했다</a:t>
+            </a:r>
+          </a:p>
+          <a:p>
+            <a:pPr>
+              <a:spcAft>
+                <a:spcPts val="300"/>
+              </a:spcAft>
+            </a:pPr>
+            <a:r>
+              <a:rPr sz="1250" b="0" i="0">
+                <a:solidFill>
+                  <a:srgbClr val="1A1A1A"/>
+                </a:solidFill>
+                <a:latin typeface="맑은 고딕"/>
+              </a:rPr>
+              <a:t>우리 Arkkio 적분 vs Motor-CAD의</a:t>
+            </a:r>
+          </a:p>
+          <a:p>
+            <a:pPr>
+              <a:spcAft>
+                <a:spcPts val="300"/>
+              </a:spcAft>
+            </a:pPr>
+            <a:r>
+              <a:rPr sz="1250" b="0" i="0">
+                <a:solidFill>
+                  <a:srgbClr val="1A1A1A"/>
+                </a:solidFill>
+                <a:latin typeface="맑은 고딕"/>
+              </a:rPr>
+              <a:t>자체 계산, 한 주기 전체 대조:</a:t>
+            </a:r>
+          </a:p>
+          <a:p>
+            <a:pPr>
+              <a:spcAft>
+                <a:spcPts val="300"/>
+              </a:spcAft>
+            </a:pPr>
+            <a:r>
+              <a:rPr sz="1250" b="0" i="0">
+                <a:solidFill>
+                  <a:srgbClr val="1A1A1A"/>
+                </a:solidFill>
+                <a:latin typeface="맑은 고딕"/>
+              </a:rPr>
+              <a:t/>
+            </a:r>
+          </a:p>
+          <a:p>
+            <a:pPr>
+              <a:spcAft>
+                <a:spcPts val="300"/>
+              </a:spcAft>
+            </a:pPr>
+            <a:r>
+              <a:rPr sz="1250" b="0" i="0">
+                <a:solidFill>
+                  <a:srgbClr val="1A1A1A"/>
+                </a:solidFill>
+                <a:latin typeface="맑은 고딕"/>
+              </a:rPr>
+              <a:t>평균 토크 차이      0.35%</a:t>
+            </a:r>
+          </a:p>
+          <a:p>
+            <a:pPr>
+              <a:spcAft>
+                <a:spcPts val="300"/>
+              </a:spcAft>
+            </a:pPr>
+            <a:r>
+              <a:rPr sz="1250" b="0" i="0">
+                <a:solidFill>
+                  <a:srgbClr val="1A1A1A"/>
+                </a:solidFill>
+                <a:latin typeface="맑은 고딕"/>
+              </a:rPr>
+              <a:t>자세별 차이(RMS)   0.54%</a:t>
+            </a:r>
+          </a:p>
+          <a:p>
+            <a:pPr>
+              <a:spcAft>
+                <a:spcPts val="300"/>
+              </a:spcAft>
+            </a:pPr>
+            <a:r>
+              <a:rPr sz="1250" b="0" i="0">
+                <a:solidFill>
+                  <a:srgbClr val="1A1A1A"/>
+                </a:solidFill>
+                <a:latin typeface="맑은 고딕"/>
+              </a:rPr>
+              <a:t>파형 상관계수      0.9955</a:t>
+            </a:r>
+          </a:p>
+          <a:p>
+            <a:pPr>
+              <a:spcAft>
+                <a:spcPts val="300"/>
+              </a:spcAft>
+            </a:pPr>
+            <a:r>
+              <a:rPr sz="1250" b="0" i="0">
+                <a:solidFill>
+                  <a:srgbClr val="1A1A1A"/>
+                </a:solidFill>
+                <a:latin typeface="맑은 고딕"/>
+              </a:rPr>
+              <a:t/>
+            </a:r>
+          </a:p>
+          <a:p>
+            <a:pPr>
+              <a:spcAft>
+                <a:spcPts val="300"/>
+              </a:spcAft>
+            </a:pPr>
+            <a:r>
+              <a:rPr sz="1250" b="0" i="0">
+                <a:solidFill>
+                  <a:srgbClr val="1A1A1A"/>
+                </a:solidFill>
+                <a:latin typeface="맑은 고딕"/>
+              </a:rPr>
+              <a:t>재현성: 같은 채점을 3회 반복해</a:t>
+            </a:r>
+          </a:p>
+          <a:p>
+            <a:pPr>
+              <a:spcAft>
+                <a:spcPts val="300"/>
+              </a:spcAft>
+            </a:pPr>
+            <a:r>
+              <a:rPr sz="1250" b="0" i="0">
+                <a:solidFill>
+                  <a:srgbClr val="1A1A1A"/>
+                </a:solidFill>
+                <a:latin typeface="맑은 고딕"/>
+              </a:rPr>
+              <a:t>바이트까지 동일한 결과 확인.</a:t>
+            </a:r>
+          </a:p>
+        </p:txBody>
+      </p:sp>
+      <p:sp>
+        <p:nvSpPr>
+          <p:cNvPr id="9" name="caption"/>
+          <p:cNvSpPr txBox="1"/>
+          <p:nvPr/>
+        </p:nvSpPr>
+        <p:spPr>
+          <a:xfrm>
+            <a:off x="566928" y="5897880"/>
+            <a:ext cx="11064240" cy="402336"/>
+          </a:xfrm>
+          <a:prstGeom prst="rect">
+            <a:avLst/>
+          </a:prstGeom>
+          <a:noFill/>
+        </p:spPr>
+        <p:txBody>
+          <a:bodyPr wrap="square">
+            <a:spAutoFit/>
+          </a:bodyPr>
+          <a:lstStyle/>
+          <a:p>
+            <a:r>
+              <a:rPr sz="1200" b="0" i="0">
+                <a:solidFill>
+                  <a:srgbClr val="5A5A5A"/>
+                </a:solidFill>
+                <a:latin typeface="맑은 고딕"/>
+              </a:rPr>
+              <a:t>평가 체계를 먼저 세운 것이 이 캠페인의 차별점이다 — 이게 없었다면 위의 소거 결론 자체를 신뢰할 수 없다.</a:t>
+            </a:r>
+          </a:p>
+        </p:txBody>
+      </p:sp>
+    </p:spTree>
+  </p:cSld>
+  <p:clrMapOvr>
+    <a:masterClrMapping/>
+  </p:clrMapOvr>
+</p:sld>
+</file>
+
+<file path=ppt/slides/slide11.xml><?xml version="1.0" encoding="utf-8"?>
+<p:sld xmlns:a="http://schemas.openxmlformats.org/drawingml/2006/main" xmlns:p="http://schemas.openxmlformats.org/presentationml/2006/main" xmlns:r="http://schemas.openxmlformats.org/officeDocument/2006/relationships">
+  <p:cSld>
+    <p:spTree>
+      <p:nvGrpSpPr>
+        <p:cNvPr id="1" name=""/>
+        <p:cNvGrpSpPr/>
+        <p:nvPr/>
+      </p:nvGrpSpPr>
+      <p:grpSpPr/>
+      <p:sp>
+        <p:nvSpPr>
+          <p:cNvPr id="2" name="eyebrow"/>
+          <p:cNvSpPr txBox="1"/>
+          <p:nvPr/>
+        </p:nvSpPr>
+        <p:spPr>
+          <a:xfrm>
+            <a:off x="566928" y="274320"/>
+            <a:ext cx="8229600" cy="310896"/>
+          </a:xfrm>
+          <a:prstGeom prst="rect">
+            <a:avLst/>
+          </a:prstGeom>
+          <a:noFill/>
+        </p:spPr>
+        <p:txBody>
+          <a:bodyPr wrap="square">
+            <a:spAutoFit/>
+          </a:bodyPr>
+          <a:lstStyle/>
+          <a:p>
+            <a:r>
+              <a:rPr sz="1300" b="1" i="0">
+                <a:solidFill>
+                  <a:srgbClr val="0F7B6C"/>
+                </a:solidFill>
+                <a:latin typeface="맑은 고딕"/>
+              </a:rPr>
+              <a:t>개선 항목</a:t>
+            </a:r>
+          </a:p>
+        </p:txBody>
+      </p:sp>
+      <p:sp>
+        <p:nvSpPr>
+          <p:cNvPr id="3" name="title"/>
+          <p:cNvSpPr txBox="1"/>
+          <p:nvPr/>
+        </p:nvSpPr>
+        <p:spPr>
+          <a:xfrm>
+            <a:off x="566928" y="585216"/>
+            <a:ext cx="9601200" cy="713232"/>
+          </a:xfrm>
+          <a:prstGeom prst="rect">
+            <a:avLst/>
+          </a:prstGeom>
+          <a:noFill/>
+        </p:spPr>
+        <p:txBody>
+          <a:bodyPr wrap="square">
+            <a:spAutoFit/>
+          </a:bodyPr>
+          <a:lstStyle/>
+          <a:p>
+            <a:r>
+              <a:rPr sz="2700" b="1" i="0">
+                <a:solidFill>
+                  <a:srgbClr val="1A1A1A"/>
+                </a:solidFill>
+                <a:latin typeface="맑은 고딕"/>
+              </a:rPr>
+              <a:t>최근 발견 — DOE 전류축이 솔브에 전달되지 않았다</a:t>
+            </a:r>
+          </a:p>
+        </p:txBody>
+      </p:sp>
+      <p:sp>
+        <p:nvSpPr>
+          <p:cNvPr id="4" name="sec"/>
+          <p:cNvSpPr txBox="1"/>
+          <p:nvPr/>
+        </p:nvSpPr>
+        <p:spPr>
+          <a:xfrm>
+            <a:off x="10058400" y="365760"/>
+            <a:ext cx="1600200" cy="365760"/>
+          </a:xfrm>
+          <a:prstGeom prst="rect">
+            <a:avLst/>
+          </a:prstGeom>
+          <a:noFill/>
+        </p:spPr>
+        <p:txBody>
+          <a:bodyPr wrap="square">
+            <a:spAutoFit/>
+          </a:bodyPr>
+          <a:lstStyle/>
+          <a:p>
+            <a:pPr algn="r"/>
+            <a:r>
+              <a:rPr sz="1200" b="0" i="0">
+                <a:solidFill>
+                  <a:srgbClr val="5A5A5A"/>
+                </a:solidFill>
+                <a:latin typeface="Consolas"/>
+              </a:rPr>
+              <a:t>§24 §26</a:t>
+            </a:r>
+          </a:p>
+        </p:txBody>
+      </p:sp>
+      <p:sp>
+        <p:nvSpPr>
+          <p:cNvPr id="5" name="Rectangle 4"/>
+          <p:cNvSpPr/>
+          <p:nvPr/>
+        </p:nvSpPr>
+        <p:spPr>
+          <a:xfrm>
+            <a:off x="566928" y="1335024"/>
+            <a:ext cx="11064240" cy="9525"/>
+          </a:xfrm>
+          <a:prstGeom prst="rect">
+            <a:avLst/>
+          </a:prstGeom>
+          <a:solidFill>
+            <a:srgbClr val="E8E8E8"/>
+          </a:solidFill>
+          <a:ln>
+            <a:noFill/>
+          </a:ln>
+          <a:effectLst/>
+        </p:spPr>
+        <p:style>
+          <a:lnRef idx="1">
+            <a:schemeClr val="accent1"/>
+          </a:lnRef>
+          <a:fillRef idx="3">
+            <a:schemeClr val="accent1"/>
+          </a:fillRef>
+          <a:effectRef idx="2">
+            <a:schemeClr val="accent1"/>
+          </a:effectRef>
+          <a:fontRef idx="minor">
+            <a:schemeClr val="lt1"/>
+          </a:fontRef>
+        </p:style>
+        <p:txBody>
+          <a:bodyPr rtlCol="0" anchor="ctr"/>
+          <a:lstStyle/>
+          <a:p>
+            <a:pPr algn="ctr"/>
+          </a:p>
+        </p:txBody>
+      </p:sp>
+      <p:sp>
+        <p:nvSpPr>
           <p:cNvPr id="6" name="TextBox 5"/>
           <p:cNvSpPr txBox="1"/>
           <p:nvPr/>
@@ -6524,7 +7696,7 @@
                 </a:solidFill>
                 <a:latin typeface="맑은 고딕"/>
               </a:rPr>
-              <a:t>· 대응: 전류 모드 수정 + '바꾼 축이 실제로 필드에 도달했는가'를 검사하는 게이트를 생성 파이프라인에 상설화</a:t>
+              <a:t>· 대응: 전류 입력 모드 수정 + '바꾼 변수가 실제로 필드에 도달했는가'를 검사하는 자동 검문을 데이터 생성 절차에 상설화</a:t>
             </a:r>
           </a:p>
         </p:txBody>
@@ -6537,7 +7709,7 @@
 </p:sld>
 </file>
 
-<file path=ppt/slides/slide11.xml><?xml version="1.0" encoding="utf-8"?>
+<file path=ppt/slides/slide12.xml><?xml version="1.0" encoding="utf-8"?>
 <p:sld xmlns:a="http://schemas.openxmlformats.org/drawingml/2006/main" xmlns:p="http://schemas.openxmlformats.org/presentationml/2006/main" xmlns:r="http://schemas.openxmlformats.org/officeDocument/2006/relationships">
   <p:cSld>
     <p:spTree>
@@ -6709,7 +7881,7 @@
                 </a:solidFill>
                 <a:latin typeface="맑은 고딕"/>
               </a:rPr>
-              <a:t>① 물리 사전해 주입 — 판정 완료</a:t>
+              <a:t>① 물리 힌트 입력 — 완료</a:t>
             </a:r>
           </a:p>
           <a:p>
@@ -6725,7 +7897,7 @@
                 </a:solidFill>
                 <a:latin typeface="맑은 고딕"/>
               </a:rPr>
-              <a:t>해석 모델로 계산한 per-node prior를</a:t>
+              <a:t>간이 선형 자기해석을 절점마다 미리</a:t>
             </a:r>
           </a:p>
           <a:p>
@@ -6741,7 +7913,7 @@
                 </a:solidFill>
                 <a:latin typeface="맑은 고딕"/>
               </a:rPr>
-              <a:t>입력 특징에 추가. 네트워크는 장 전체가</a:t>
+              <a:t>계산해 AI 입력에 넣는다. AI는 장 전체가</a:t>
             </a:r>
           </a:p>
           <a:p>
@@ -6757,7 +7929,7 @@
                 </a:solidFill>
                 <a:latin typeface="맑은 고딕"/>
               </a:rPr>
-              <a:t>아니라 prior에 대한 보정을 학습한다.</a:t>
+              <a:t>아니라 '간이해와 실제의 차이'만 배운다.</a:t>
             </a:r>
           </a:p>
           <a:p>
@@ -6789,7 +7961,7 @@
                 </a:solidFill>
                 <a:latin typeface="맑은 고딕"/>
               </a:rPr>
-              <a:t>왜 이 축인가: |B|를 움직인 유일한 레버가</a:t>
+              <a:t>왜 이 방법인가: 오차를 움직인 유일한</a:t>
             </a:r>
           </a:p>
           <a:p>
@@ -6805,7 +7977,7 @@
                 </a:solidFill>
                 <a:latin typeface="맑은 고딕"/>
               </a:rPr>
-              <a:t>정보였다. 손실 감독·사후 사영은 이미</a:t>
+              <a:t>레버가 '정보'였다. 같은 물리를 채점</a:t>
             </a:r>
           </a:p>
           <a:p>
@@ -6821,7 +7993,7 @@
                 </a:solidFill>
                 <a:latin typeface="맑은 고딕"/>
               </a:rPr>
-              <a:t>시도했고 |B|는 안 움직였다 — 입력측</a:t>
+              <a:t>기준이나 후처리에 넣는 건 이미 해봤고</a:t>
             </a:r>
           </a:p>
           <a:p>
@@ -6837,7 +8009,7 @@
                 </a:solidFill>
                 <a:latin typeface="맑은 고딕"/>
               </a:rPr>
-              <a:t>주입만 미시도 축이었다.</a:t>
+              <a:t>효과가 없었다 — 입력에 넣는 것만 남았었다.</a:t>
             </a:r>
           </a:p>
           <a:p>
@@ -6869,7 +8041,7 @@
                 </a:solidFill>
                 <a:latin typeface="맑은 고딕"/>
               </a:rPr>
-              <a:t>결과: 토크 5.40 → 3.35% (-2.05pp)</a:t>
+              <a:t>결과: 토크 5.40 → 3.35% (−2.05%p)</a:t>
             </a:r>
           </a:p>
           <a:p>
@@ -6885,7 +8057,7 @@
                 </a:solidFill>
                 <a:latin typeface="맑은 고딕"/>
               </a:rPr>
-              <a:t>         전체 |B| 11.64 → 11.10%</a:t>
+              <a:t>         전체 오차 11.64 → 11.10%</a:t>
             </a:r>
           </a:p>
           <a:p>
@@ -6901,7 +8073,7 @@
                 </a:solidFill>
                 <a:latin typeface="맑은 고딕"/>
               </a:rPr>
-              <a:t>         공극 7.30 → 7.14% (1차 지표 음성)</a:t>
+              <a:t>         공극 7.30 → 7.14% (1차 기준 미달)</a:t>
             </a:r>
           </a:p>
           <a:p>
@@ -6917,7 +8089,7 @@
                 </a:solidFill>
                 <a:latin typeface="맑은 고딕"/>
               </a:rPr>
-              <a:t>→ prior를 유지하기로 결정 (§27)</a:t>
+              <a:t>→ 힌트를 계속 쓰기로 결정 (§27)</a:t>
             </a:r>
           </a:p>
         </p:txBody>
@@ -6988,7 +8160,7 @@
                 </a:solidFill>
                 <a:latin typeface="맑은 고딕"/>
               </a:rPr>
-              <a:t>여자 배선을 고치고(전류 모드 수정 +</a:t>
+              <a:t>여자 설정 문제를 고치고(전류 입력 모드</a:t>
             </a:r>
           </a:p>
           <a:p>
@@ -7004,7 +8176,7 @@
                 </a:solidFill>
                 <a:latin typeface="맑은 고딕"/>
               </a:rPr>
-              <a:t>A-turns 검사 게이트) 형상×전류 320케이스로</a:t>
+              <a:t>수정 + 암페어턴 자동 검사) 형상×전류</a:t>
             </a:r>
           </a:p>
           <a:p>
@@ -7020,7 +8192,7 @@
                 </a:solidFill>
                 <a:latin typeface="맑은 고딕"/>
               </a:rPr>
-              <a:t>재학습 중. 전류축이 실제로 솔브에</a:t>
+              <a:t>320케이스로 재학습 중. 전류가 실제로</a:t>
             </a:r>
           </a:p>
           <a:p>
@@ -7036,7 +8208,7 @@
                 </a:solidFill>
                 <a:latin typeface="맑은 고딕"/>
               </a:rPr>
-              <a:t>반영되는 첫 데이터셋이다.</a:t>
+              <a:t>해석에 반영되는 첫 데이터셋이다.</a:t>
             </a:r>
           </a:p>
           <a:p>
@@ -7068,7 +8240,7 @@
                 </a:solidFill>
                 <a:latin typeface="맑은 고딕"/>
               </a:rPr>
-              <a:t>현재 running — epoch 25/50 (ETA 2026-08-08 03:54 UTC)</a:t>
+              <a:t>학습 진행 중 — 30/50에폭 (완료 예정 ≈ 2026-08-08 05시 UTC)</a:t>
             </a:r>
           </a:p>
           <a:p>
@@ -7116,7 +8288,7 @@
                 </a:solidFill>
                 <a:latin typeface="맑은 고딕"/>
               </a:rPr>
-              <a:t>부가 자산: numpy+scipy만으로 도는</a:t>
+              <a:t>부가 자산: 상용 라이선스 없이 도는</a:t>
             </a:r>
           </a:p>
           <a:p>
@@ -7132,7 +8304,7 @@
                 </a:solidFill>
                 <a:latin typeface="맑은 고딕"/>
               </a:rPr>
-              <a:t>참조 FEM 솔버를 확보했다.</a:t>
+              <a:t>자체 검증용 FEM 솔버를 확보했다.</a:t>
             </a:r>
           </a:p>
           <a:p>
@@ -7148,7 +8320,7 @@
                 </a:solidFill>
                 <a:latin typeface="맑은 고딕"/>
               </a:rPr>
-              <a:t>Motor-CAD 토크를 0.06~0.18%로 재현 —</a:t>
+              <a:t>Motor-CAD 토크를 0.06~0.18% 차이로 재현 —</a:t>
             </a:r>
           </a:p>
           <a:p>
@@ -7164,7 +8336,7 @@
                 </a:solidFill>
                 <a:latin typeface="맑은 고딕"/>
               </a:rPr>
-              <a:t>라이선스 없이 라벨 생성이 가능하다.</a:t>
+              <a:t>정답 데이터를 우리 손으로 만들 수 있다.</a:t>
             </a:r>
           </a:p>
         </p:txBody>
@@ -7241,7 +8413,7 @@
 </p:sld>
 </file>
 
-<file path=ppt/slides/slide12.xml><?xml version="1.0" encoding="utf-8"?>
+<file path=ppt/slides/slide13.xml><?xml version="1.0" encoding="utf-8"?>
 <p:sld xmlns:a="http://schemas.openxmlformats.org/drawingml/2006/main" xmlns:p="http://schemas.openxmlformats.org/presentationml/2006/main" xmlns:r="http://schemas.openxmlformats.org/officeDocument/2006/relationships">
   <p:cSld>
     <p:spTree>
@@ -7299,7 +8471,7 @@
                 </a:solidFill>
                 <a:latin typeface="맑은 고딕"/>
               </a:rPr>
-              <a:t>이하 백업 — 질문 대응용</a:t>
+              <a:t>이하 백업 — 질문 대응용 · 맨 뒤에 용어집</a:t>
             </a:r>
           </a:p>
         </p:txBody>
@@ -7312,7 +8484,7 @@
 </p:sld>
 </file>
 
-<file path=ppt/slides/slide13.xml><?xml version="1.0" encoding="utf-8"?>
+<file path=ppt/slides/slide14.xml><?xml version="1.0" encoding="utf-8"?>
 <p:sld xmlns:a="http://schemas.openxmlformats.org/drawingml/2006/main" xmlns:p="http://schemas.openxmlformats.org/presentationml/2006/main" xmlns:r="http://schemas.openxmlformats.org/officeDocument/2006/relationships">
   <p:cSld>
     <p:spTree>
@@ -7385,7 +8557,7 @@
                 </a:solidFill>
                 <a:latin typeface="맑은 고딕"/>
               </a:rPr>
-              <a:t>백업 — FEM warm-start PoC (음성)</a:t>
+              <a:t>백업 — AI로 FEM 수렴 가속 시도 (효과 없음)</a:t>
             </a:r>
           </a:p>
         </p:txBody>
@@ -7522,7 +8694,7 @@
                 </a:solidFill>
                 <a:latin typeface="맑은 고딕"/>
               </a:rPr>
-              <a:t>판정: 음성 (사전 등록 기준대로)</a:t>
+              <a:t>결과: 효과 없음 (미리 정한 기준대로 판정)</a:t>
             </a:r>
           </a:p>
           <a:p>
@@ -7538,7 +8710,7 @@
                 </a:solidFill>
                 <a:latin typeface="맑은 고딕"/>
               </a:rPr>
-              <a:t>· zero 초기값 17.50회 → AI 14.82회 (−15%)</a:t>
+              <a:t>· 0에서 시작하면 수렴까지 17.50회 → AI 초기값이면 14.82회 (−15%)</a:t>
             </a:r>
           </a:p>
           <a:p>
@@ -7554,7 +8726,7 @@
                 </a:solidFill>
                 <a:latin typeface="맑은 고딕"/>
               </a:rPr>
-              <a:t>· 직전 회전각 warm-start는 9.27회</a:t>
+              <a:t>· 직전 회전 자세의 해를 이월하면 9.27회 — 실무 표준</a:t>
             </a:r>
           </a:p>
           <a:p>
@@ -7570,7 +8742,7 @@
                 </a:solidFill>
                 <a:latin typeface="맑은 고딕"/>
               </a:rPr>
-              <a:t>· 실무 표준 대비 +60%. 아직 안 산다.</a:t>
+              <a:t>· AI가 실무 표준보다 60% 느리다. 아직 안 산다.</a:t>
             </a:r>
           </a:p>
           <a:p>
@@ -7602,7 +8774,7 @@
                 </a:solidFill>
                 <a:latin typeface="맑은 고딕"/>
               </a:rPr>
-              <a:t>· 이 체크포인트의 |B|는 18.73%(§19)</a:t>
+              <a:t>· 이 실험 당시 모델의 오차는 18.73%(§19) — 지금 모델(7.14%)의 이전 세대</a:t>
             </a:r>
           </a:p>
           <a:p>
@@ -7634,7 +8806,7 @@
                 </a:solidFill>
                 <a:latin typeface="맑은 고딕"/>
               </a:rPr>
-              <a:t>· → 현재 정확도의 귀결이지 아이디어의 반증이 아니다</a:t>
+              <a:t>· → 당시 정확도의 귀결이지 아이디어의 반증이 아니다</a:t>
             </a:r>
           </a:p>
           <a:p>
@@ -7711,7 +8883,7 @@
 </p:sld>
 </file>
 
-<file path=ppt/slides/slide14.xml><?xml version="1.0" encoding="utf-8"?>
+<file path=ppt/slides/slide15.xml><?xml version="1.0" encoding="utf-8"?>
 <p:sld xmlns:a="http://schemas.openxmlformats.org/drawingml/2006/main" xmlns:p="http://schemas.openxmlformats.org/presentationml/2006/main" xmlns:r="http://schemas.openxmlformats.org/officeDocument/2006/relationships">
   <p:cSld>
     <p:spTree>
@@ -7929,7 +9101,7 @@
                           </a:solidFill>
                           <a:latin typeface="맑은 고딕"/>
                         </a:rPr>
-                        <a:t>챔피언 |B|</a:t>
+                        <a:t>직전 최고 모델 오차</a:t>
                       </a:r>
                     </a:p>
                   </a:txBody>
@@ -7952,7 +9124,7 @@
                           </a:solidFill>
                           <a:latin typeface="맑은 고딕"/>
                         </a:rPr>
-                        <a:t>curl 표현 바닥</a:t>
+                        <a:t>방식의 한계선</a:t>
                       </a:r>
                     </a:p>
                   </a:txBody>
@@ -8057,7 +9229,7 @@
                           </a:solidFill>
                           <a:latin typeface="맑은 고딕"/>
                         </a:rPr>
-                        <a:t>토크가 계산되는 곳. 여유 4.6pp</a:t>
+                        <a:t>토크가 계산되는 곳. 여유 4.6%p</a:t>
                       </a:r>
                     </a:p>
                   </a:txBody>
@@ -8291,7 +9463,7 @@
                           </a:solidFill>
                           <a:latin typeface="맑은 고딕"/>
                         </a:rPr>
-                        <a:t>스케일링에서 거의 안 움직인 영역</a:t>
+                        <a:t>데이터를 늘려도 거의 안 움직인 영역</a:t>
                       </a:r>
                     </a:p>
                   </a:txBody>
@@ -8312,7 +9484,7 @@
                           </a:solidFill>
                           <a:latin typeface="맑은 고딕"/>
                         </a:rPr>
-                        <a:t>전체 (pooled)</a:t>
+                        <a:t>전체 평균</a:t>
                       </a:r>
                     </a:p>
                   </a:txBody>
@@ -8369,7 +9541,7 @@
                           </a:solidFill>
                           <a:latin typeface="맑은 고딕"/>
                         </a:rPr>
-                        <a:t>노이즈 지배 영역이 섞여 있음</a:t>
+                        <a:t>장이 약해 %가 튀는 영역이 섞여 있음</a:t>
                       </a:r>
                     </a:p>
                   </a:txBody>
@@ -8390,7 +9562,7 @@
                           </a:solidFill>
                           <a:latin typeface="맑은 고딕"/>
                         </a:rPr>
-                        <a:t>토크 nRMSE</a:t>
+                        <a:t>토크 오차율</a:t>
                       </a:r>
                     </a:p>
                   </a:txBody>
@@ -8447,7 +9619,7 @@
                           </a:solidFill>
                           <a:latin typeface="맑은 고딕"/>
                         </a:rPr>
-                        <a:t>case_32 제외 시 3.938%</a:t>
+                        <a:t>특이 케이스(case_32) 제외 시 3.938%</a:t>
                       </a:r>
                     </a:p>
                   </a:txBody>
@@ -8492,7 +9664,7 @@
                 </a:solidFill>
                 <a:latin typeface="맑은 고딕"/>
               </a:rPr>
-              <a:t>▪ 표는 prior 이전 기준선(doe240_bw30_ep50, 930만 파라미터 / 230 학습 형상 / 50에폭). 물리 prior 적용 후: 공극 7.138 · 전체 11.096 · 토크 3.354% (§27)</a:t>
+              <a:t>▪ 표는 물리 힌트를 넣기 전 모델 기준. 힌트 적용 후: 공극 7.138 · 전체 11.096 · 토크 3.354% (§27)</a:t>
             </a:r>
           </a:p>
           <a:p>
@@ -8508,7 +9680,7 @@
                 </a:solidFill>
                 <a:latin typeface="맑은 고딕"/>
               </a:rPr>
-              <a:t>▪ 재현성 — sha256 체크포인트 registry, 결정성 고정 후 3회 반복 스코어카드 바이트 동일, split manifest에 DOE 다이제스트 내장, 컨테이너 physicsnemo:26.03</a:t>
+              <a:t>▪ 재현성 — 모델 파일마다 지문(체크섬) 관리, 같은 채점 3회 반복해 바이트까지 동일 확인, 시험 문제 구성도 데이터 지문과 함께 고정</a:t>
             </a:r>
           </a:p>
           <a:p>
@@ -8524,11 +9696,1139 @@
                 </a:solidFill>
                 <a:latin typeface="맑은 고딕"/>
               </a:rPr>
-              <a:t>▪ 한계 — 단일 토폴로지(48슬롯/8극), 형상은 두 비율만 변화, 2D 자기정적, val 4 / test 6 형상. 스케일링 곡선 3점은 기울기는 정해도 함수형은 못 정한다</a:t>
-            </a:r>
-          </a:p>
-        </p:txBody>
-      </p:sp>
+              <a:t>▪ 주장 범위 — 슬롯/극 조합은 하나(48슬롯/8극), 형상 변수는 두 비율, 2D 정자기 해석, 시험 형상 6개. 이 범위 밖(다른 토폴로지 등)은 주장하지 않는다</a:t>
+            </a:r>
+          </a:p>
+        </p:txBody>
+      </p:sp>
+    </p:spTree>
+  </p:cSld>
+  <p:clrMapOvr>
+    <a:masterClrMapping/>
+  </p:clrMapOvr>
+</p:sld>
+</file>
+
+<file path=ppt/slides/slide16.xml><?xml version="1.0" encoding="utf-8"?>
+<p:sld xmlns:a="http://schemas.openxmlformats.org/drawingml/2006/main" xmlns:p="http://schemas.openxmlformats.org/presentationml/2006/main" xmlns:r="http://schemas.openxmlformats.org/officeDocument/2006/relationships">
+  <p:cSld>
+    <p:spTree>
+      <p:nvGrpSpPr>
+        <p:cNvPr id="1" name=""/>
+        <p:cNvGrpSpPr/>
+        <p:nvPr/>
+      </p:nvGrpSpPr>
+      <p:grpSpPr/>
+      <p:sp>
+        <p:nvSpPr>
+          <p:cNvPr id="2" name="eyebrow"/>
+          <p:cNvSpPr txBox="1"/>
+          <p:nvPr/>
+        </p:nvSpPr>
+        <p:spPr>
+          <a:xfrm>
+            <a:off x="566928" y="274320"/>
+            <a:ext cx="8229600" cy="310896"/>
+          </a:xfrm>
+          <a:prstGeom prst="rect">
+            <a:avLst/>
+          </a:prstGeom>
+          <a:noFill/>
+        </p:spPr>
+        <p:txBody>
+          <a:bodyPr wrap="square">
+            <a:spAutoFit/>
+          </a:bodyPr>
+          <a:lstStyle/>
+          <a:p>
+            <a:r>
+              <a:rPr sz="1300" b="1" i="0">
+                <a:solidFill>
+                  <a:srgbClr val="0F7B6C"/>
+                </a:solidFill>
+                <a:latin typeface="맑은 고딕"/>
+              </a:rPr>
+              <a:t>부록</a:t>
+            </a:r>
+          </a:p>
+        </p:txBody>
+      </p:sp>
+      <p:sp>
+        <p:nvSpPr>
+          <p:cNvPr id="3" name="title"/>
+          <p:cNvSpPr txBox="1"/>
+          <p:nvPr/>
+        </p:nvSpPr>
+        <p:spPr>
+          <a:xfrm>
+            <a:off x="566928" y="585216"/>
+            <a:ext cx="9601200" cy="713232"/>
+          </a:xfrm>
+          <a:prstGeom prst="rect">
+            <a:avLst/>
+          </a:prstGeom>
+          <a:noFill/>
+        </p:spPr>
+        <p:txBody>
+          <a:bodyPr wrap="square">
+            <a:spAutoFit/>
+          </a:bodyPr>
+          <a:lstStyle/>
+          <a:p>
+            <a:r>
+              <a:rPr sz="2700" b="1" i="0">
+                <a:solidFill>
+                  <a:srgbClr val="1A1A1A"/>
+                </a:solidFill>
+                <a:latin typeface="맑은 고딕"/>
+              </a:rPr>
+              <a:t>용어집 (1/2) — 오늘 나온 낯선 말들</a:t>
+            </a:r>
+          </a:p>
+        </p:txBody>
+      </p:sp>
+      <p:sp>
+        <p:nvSpPr>
+          <p:cNvPr id="4" name="Rectangle 3"/>
+          <p:cNvSpPr/>
+          <p:nvPr/>
+        </p:nvSpPr>
+        <p:spPr>
+          <a:xfrm>
+            <a:off x="566928" y="1335024"/>
+            <a:ext cx="11064240" cy="9525"/>
+          </a:xfrm>
+          <a:prstGeom prst="rect">
+            <a:avLst/>
+          </a:prstGeom>
+          <a:solidFill>
+            <a:srgbClr val="E8E8E8"/>
+          </a:solidFill>
+          <a:ln>
+            <a:noFill/>
+          </a:ln>
+          <a:effectLst/>
+        </p:spPr>
+        <p:style>
+          <a:lnRef idx="1">
+            <a:schemeClr val="accent1"/>
+          </a:lnRef>
+          <a:fillRef idx="3">
+            <a:schemeClr val="accent1"/>
+          </a:fillRef>
+          <a:effectRef idx="2">
+            <a:schemeClr val="accent1"/>
+          </a:effectRef>
+          <a:fontRef idx="minor">
+            <a:schemeClr val="lt1"/>
+          </a:fontRef>
+        </p:style>
+        <p:txBody>
+          <a:bodyPr rtlCol="0" anchor="ctr"/>
+          <a:lstStyle/>
+          <a:p>
+            <a:pPr algn="ctr"/>
+          </a:p>
+        </p:txBody>
+      </p:sp>
+      <p:graphicFrame>
+        <p:nvGraphicFramePr>
+          <p:cNvPr id="5" name="Table 4"/>
+          <p:cNvGraphicFramePr>
+            <a:graphicFrameLocks noGrp="1"/>
+          </p:cNvGraphicFramePr>
+          <p:nvPr/>
+        </p:nvGraphicFramePr>
+        <p:xfrm>
+          <a:off x="566928" y="1572768"/>
+          <a:ext cx="11064240" cy="4663440"/>
+        </p:xfrm>
+        <a:graphic>
+          <a:graphicData uri="http://schemas.openxmlformats.org/drawingml/2006/table">
+            <a:tbl>
+              <a:tblPr firstRow="1" bandRow="1">
+                <a:tableStyleId>{5C22544A-7EE6-4342-B048-85BDC9FD1C3A}</a:tableStyleId>
+              </a:tblPr>
+              <a:tblGrid>
+                <a:gridCol w="3017520"/>
+                <a:gridCol w="8046720"/>
+              </a:tblGrid>
+              <a:tr h="518160">
+                <a:tc>
+                  <a:txBody>
+                    <a:bodyPr/>
+                    <a:lstStyle/>
+                    <a:p>
+                      <a:pPr algn="l"/>
+                      <a:r>
+                        <a:rPr sz="1400" b="1">
+                          <a:solidFill>
+                            <a:srgbClr val="FFFFFF"/>
+                          </a:solidFill>
+                          <a:latin typeface="맑은 고딕"/>
+                        </a:rPr>
+                        <a:t>용어</a:t>
+                      </a:r>
+                    </a:p>
+                  </a:txBody>
+                  <a:tcPr anchor="ctr" marL="73152" marR="73152" marT="18288" marB="18288">
+                    <a:solidFill>
+                      <a:srgbClr val="0F7B6C"/>
+                    </a:solidFill>
+                  </a:tcPr>
+                </a:tc>
+                <a:tc>
+                  <a:txBody>
+                    <a:bodyPr/>
+                    <a:lstStyle/>
+                    <a:p>
+                      <a:pPr algn="ctr"/>
+                      <a:r>
+                        <a:rPr sz="1400" b="1">
+                          <a:solidFill>
+                            <a:srgbClr val="FFFFFF"/>
+                          </a:solidFill>
+                          <a:latin typeface="맑은 고딕"/>
+                        </a:rPr>
+                        <a:t>뜻</a:t>
+                      </a:r>
+                    </a:p>
+                  </a:txBody>
+                  <a:tcPr anchor="ctr" marL="73152" marR="73152" marT="18288" marB="18288">
+                    <a:solidFill>
+                      <a:srgbClr val="0F7B6C"/>
+                    </a:solidFill>
+                  </a:tcPr>
+                </a:tc>
+              </a:tr>
+              <a:tr h="518160">
+                <a:tc>
+                  <a:txBody>
+                    <a:bodyPr/>
+                    <a:lstStyle/>
+                    <a:p>
+                      <a:pPr algn="l"/>
+                      <a:r>
+                        <a:rPr sz="1300" b="0">
+                          <a:solidFill>
+                            <a:srgbClr val="1A1A1A"/>
+                          </a:solidFill>
+                          <a:latin typeface="맑은 고딕"/>
+                        </a:rPr>
+                        <a:t>서로게이트 (대리모델)</a:t>
+                      </a:r>
+                    </a:p>
+                  </a:txBody>
+                  <a:tcPr anchor="ctr" marL="73152" marR="73152" marT="18288" marB="18288"/>
+                </a:tc>
+                <a:tc>
+                  <a:txBody>
+                    <a:bodyPr/>
+                    <a:lstStyle/>
+                    <a:p>
+                      <a:pPr algn="ctr"/>
+                      <a:r>
+                        <a:rPr sz="1300" b="0">
+                          <a:solidFill>
+                            <a:srgbClr val="1A1A1A"/>
+                          </a:solidFill>
+                          <a:latin typeface="맑은 고딕"/>
+                        </a:rPr>
+                        <a:t>FEM 대신 결과를 곧바로 예측하도록 학습시킨 AI 모델</a:t>
+                      </a:r>
+                    </a:p>
+                  </a:txBody>
+                  <a:tcPr anchor="ctr" marL="73152" marR="73152" marT="18288" marB="18288"/>
+                </a:tc>
+              </a:tr>
+              <a:tr h="518160">
+                <a:tc>
+                  <a:txBody>
+                    <a:bodyPr/>
+                    <a:lstStyle/>
+                    <a:p>
+                      <a:pPr algn="l"/>
+                      <a:r>
+                        <a:rPr sz="1300" b="0">
+                          <a:solidFill>
+                            <a:srgbClr val="1A1A1A"/>
+                          </a:solidFill>
+                          <a:latin typeface="맑은 고딕"/>
+                        </a:rPr>
+                        <a:t>GNN / 메시 그래프 신경망</a:t>
+                      </a:r>
+                    </a:p>
+                  </a:txBody>
+                  <a:tcPr anchor="ctr" marL="73152" marR="73152" marT="18288" marB="18288"/>
+                </a:tc>
+                <a:tc>
+                  <a:txBody>
+                    <a:bodyPr/>
+                    <a:lstStyle/>
+                    <a:p>
+                      <a:pPr algn="ctr"/>
+                      <a:r>
+                        <a:rPr sz="1300" b="0">
+                          <a:solidFill>
+                            <a:srgbClr val="1A1A1A"/>
+                          </a:solidFill>
+                          <a:latin typeface="맑은 고딕"/>
+                        </a:rPr>
+                        <a:t>메시를 점(절점)과 선(연결)으로 읽는 AI. 절점이 이웃과 정보를 주고받으며 장을 예측</a:t>
+                      </a:r>
+                    </a:p>
+                  </a:txBody>
+                  <a:tcPr anchor="ctr" marL="73152" marR="73152" marT="18288" marB="18288"/>
+                </a:tc>
+              </a:tr>
+              <a:tr h="518160">
+                <a:tc>
+                  <a:txBody>
+                    <a:bodyPr/>
+                    <a:lstStyle/>
+                    <a:p>
+                      <a:pPr algn="l"/>
+                      <a:r>
+                        <a:rPr sz="1300" b="0">
+                          <a:solidFill>
+                            <a:srgbClr val="1A1A1A"/>
+                          </a:solidFill>
+                          <a:latin typeface="맑은 고딕"/>
+                        </a:rPr>
+                        <a:t>nRMSE (오차율)</a:t>
+                      </a:r>
+                    </a:p>
+                  </a:txBody>
+                  <a:tcPr anchor="ctr" marL="73152" marR="73152" marT="18288" marB="18288"/>
+                </a:tc>
+                <a:tc>
+                  <a:txBody>
+                    <a:bodyPr/>
+                    <a:lstStyle/>
+                    <a:p>
+                      <a:pPr algn="ctr"/>
+                      <a:r>
+                        <a:rPr sz="1300" b="0">
+                          <a:solidFill>
+                            <a:srgbClr val="1A1A1A"/>
+                          </a:solidFill>
+                          <a:latin typeface="맑은 고딕"/>
+                        </a:rPr>
+                        <a:t>AI 예측과 FEM 참값의 차이를 참값의 크기로 나눈 % — 0%면 완벽, 7%면 참값 대비 7% 어긋남</a:t>
+                      </a:r>
+                    </a:p>
+                  </a:txBody>
+                  <a:tcPr anchor="ctr" marL="73152" marR="73152" marT="18288" marB="18288"/>
+                </a:tc>
+              </a:tr>
+              <a:tr h="518160">
+                <a:tc>
+                  <a:txBody>
+                    <a:bodyPr/>
+                    <a:lstStyle/>
+                    <a:p>
+                      <a:pPr algn="l"/>
+                      <a:r>
+                        <a:rPr sz="1300" b="0">
+                          <a:solidFill>
+                            <a:srgbClr val="1A1A1A"/>
+                          </a:solidFill>
+                          <a:latin typeface="맑은 고딕"/>
+                        </a:rPr>
+                        <a:t>|B|</a:t>
+                      </a:r>
+                    </a:p>
+                  </a:txBody>
+                  <a:tcPr anchor="ctr" marL="73152" marR="73152" marT="18288" marB="18288"/>
+                </a:tc>
+                <a:tc>
+                  <a:txBody>
+                    <a:bodyPr/>
+                    <a:lstStyle/>
+                    <a:p>
+                      <a:pPr algn="ctr"/>
+                      <a:r>
+                        <a:rPr sz="1300" b="0">
+                          <a:solidFill>
+                            <a:srgbClr val="1A1A1A"/>
+                          </a:solidFill>
+                          <a:latin typeface="맑은 고딕"/>
+                        </a:rPr>
+                        <a:t>자속밀도의 크기. "공극 |B| 오차 7%"는 공극에서 자속밀도를 평균 7% 틀린다는 뜻</a:t>
+                      </a:r>
+                    </a:p>
+                  </a:txBody>
+                  <a:tcPr anchor="ctr" marL="73152" marR="73152" marT="18288" marB="18288"/>
+                </a:tc>
+              </a:tr>
+              <a:tr h="518160">
+                <a:tc>
+                  <a:txBody>
+                    <a:bodyPr/>
+                    <a:lstStyle/>
+                    <a:p>
+                      <a:pPr algn="l"/>
+                      <a:r>
+                        <a:rPr sz="1300" b="0">
+                          <a:solidFill>
+                            <a:srgbClr val="1A1A1A"/>
+                          </a:solidFill>
+                          <a:latin typeface="맑은 고딕"/>
+                        </a:rPr>
+                        <a:t>홀드아웃 / test (시험 형상)</a:t>
+                      </a:r>
+                    </a:p>
+                  </a:txBody>
+                  <a:tcPr anchor="ctr" marL="73152" marR="73152" marT="18288" marB="18288"/>
+                </a:tc>
+                <a:tc>
+                  <a:txBody>
+                    <a:bodyPr/>
+                    <a:lstStyle/>
+                    <a:p>
+                      <a:pPr algn="ctr"/>
+                      <a:r>
+                        <a:rPr sz="1300" b="0">
+                          <a:solidFill>
+                            <a:srgbClr val="1A1A1A"/>
+                          </a:solidFill>
+                          <a:latin typeface="맑은 고딕"/>
+                        </a:rPr>
+                        <a:t>학습에 쓰지 않고 숨겨둔 형상 6개 — 실력 측정은 반드시 여기서만 한다</a:t>
+                      </a:r>
+                    </a:p>
+                  </a:txBody>
+                  <a:tcPr anchor="ctr" marL="73152" marR="73152" marT="18288" marB="18288"/>
+                </a:tc>
+              </a:tr>
+              <a:tr h="518160">
+                <a:tc>
+                  <a:txBody>
+                    <a:bodyPr/>
+                    <a:lstStyle/>
+                    <a:p>
+                      <a:pPr algn="l"/>
+                      <a:r>
+                        <a:rPr sz="1300" b="0">
+                          <a:solidFill>
+                            <a:srgbClr val="1A1A1A"/>
+                          </a:solidFill>
+                          <a:latin typeface="맑은 고딕"/>
+                        </a:rPr>
+                        <a:t>챔피언</a:t>
+                      </a:r>
+                    </a:p>
+                  </a:txBody>
+                  <a:tcPr anchor="ctr" marL="73152" marR="73152" marT="18288" marB="18288"/>
+                </a:tc>
+                <a:tc>
+                  <a:txBody>
+                    <a:bodyPr/>
+                    <a:lstStyle/>
+                    <a:p>
+                      <a:pPr algn="ctr"/>
+                      <a:r>
+                        <a:rPr sz="1300" b="0">
+                          <a:solidFill>
+                            <a:srgbClr val="1A1A1A"/>
+                          </a:solidFill>
+                          <a:latin typeface="맑은 고딕"/>
+                        </a:rPr>
+                        <a:t>그 시점까지 시험 성적이 가장 좋은 모델을 부르는 이름</a:t>
+                      </a:r>
+                    </a:p>
+                  </a:txBody>
+                  <a:tcPr anchor="ctr" marL="73152" marR="73152" marT="18288" marB="18288"/>
+                </a:tc>
+              </a:tr>
+              <a:tr h="518160">
+                <a:tc>
+                  <a:txBody>
+                    <a:bodyPr/>
+                    <a:lstStyle/>
+                    <a:p>
+                      <a:pPr algn="l"/>
+                      <a:r>
+                        <a:rPr sz="1300" b="0">
+                          <a:solidFill>
+                            <a:srgbClr val="1A1A1A"/>
+                          </a:solidFill>
+                          <a:latin typeface="맑은 고딕"/>
+                        </a:rPr>
+                        <a:t>합격 기준 (게이트, G1′)</a:t>
+                      </a:r>
+                    </a:p>
+                  </a:txBody>
+                  <a:tcPr anchor="ctr" marL="73152" marR="73152" marT="18288" marB="18288"/>
+                </a:tc>
+                <a:tc>
+                  <a:txBody>
+                    <a:bodyPr/>
+                    <a:lstStyle/>
+                    <a:p>
+                      <a:pPr algn="ctr"/>
+                      <a:r>
+                        <a:rPr sz="1300" b="0">
+                          <a:solidFill>
+                            <a:srgbClr val="1A1A1A"/>
+                          </a:solidFill>
+                          <a:latin typeface="맑은 고딕"/>
+                        </a:rPr>
+                        <a:t>공극 오차 5% 미만 그리고 토크 오차 3% 미만 — 실무 투입을 논할 최소선</a:t>
+                      </a:r>
+                    </a:p>
+                  </a:txBody>
+                  <a:tcPr anchor="ctr" marL="73152" marR="73152" marT="18288" marB="18288"/>
+                </a:tc>
+              </a:tr>
+              <a:tr h="518160">
+                <a:tc>
+                  <a:txBody>
+                    <a:bodyPr/>
+                    <a:lstStyle/>
+                    <a:p>
+                      <a:pPr algn="l"/>
+                      <a:r>
+                        <a:rPr sz="1300" b="0">
+                          <a:solidFill>
+                            <a:srgbClr val="1A1A1A"/>
+                          </a:solidFill>
+                          <a:latin typeface="맑은 고딕"/>
+                        </a:rPr>
+                        <a:t>사전 등록 / 1차 기준</a:t>
+                      </a:r>
+                    </a:p>
+                  </a:txBody>
+                  <a:tcPr anchor="ctr" marL="73152" marR="73152" marT="18288" marB="18288"/>
+                </a:tc>
+                <a:tc>
+                  <a:txBody>
+                    <a:bodyPr/>
+                    <a:lstStyle/>
+                    <a:p>
+                      <a:pPr algn="ctr"/>
+                      <a:r>
+                        <a:rPr sz="1300" b="0">
+                          <a:solidFill>
+                            <a:srgbClr val="1A1A1A"/>
+                          </a:solidFill>
+                          <a:latin typeface="맑은 고딕"/>
+                        </a:rPr>
+                        <a:t>실험 결과를 보기 전에 성공 판정선을 문서로 박아두는 것. 물리 힌트 실험의 '공극 7.05% 미만'이 그 예 — 직전 최고(7.30%) 대비 우연 변동을 넘는 진짜 개선인지 가르는 값으로, 실무 합격선 5%와는 별개</a:t>
+                      </a:r>
+                    </a:p>
+                  </a:txBody>
+                  <a:tcPr anchor="ctr" marL="73152" marR="73152" marT="18288" marB="18288"/>
+                </a:tc>
+              </a:tr>
+            </a:tbl>
+          </a:graphicData>
+        </a:graphic>
+      </p:graphicFrame>
+    </p:spTree>
+  </p:cSld>
+  <p:clrMapOvr>
+    <a:masterClrMapping/>
+  </p:clrMapOvr>
+</p:sld>
+</file>
+
+<file path=ppt/slides/slide17.xml><?xml version="1.0" encoding="utf-8"?>
+<p:sld xmlns:a="http://schemas.openxmlformats.org/drawingml/2006/main" xmlns:p="http://schemas.openxmlformats.org/presentationml/2006/main" xmlns:r="http://schemas.openxmlformats.org/officeDocument/2006/relationships">
+  <p:cSld>
+    <p:spTree>
+      <p:nvGrpSpPr>
+        <p:cNvPr id="1" name=""/>
+        <p:cNvGrpSpPr/>
+        <p:nvPr/>
+      </p:nvGrpSpPr>
+      <p:grpSpPr/>
+      <p:sp>
+        <p:nvSpPr>
+          <p:cNvPr id="2" name="eyebrow"/>
+          <p:cNvSpPr txBox="1"/>
+          <p:nvPr/>
+        </p:nvSpPr>
+        <p:spPr>
+          <a:xfrm>
+            <a:off x="566928" y="274320"/>
+            <a:ext cx="8229600" cy="310896"/>
+          </a:xfrm>
+          <a:prstGeom prst="rect">
+            <a:avLst/>
+          </a:prstGeom>
+          <a:noFill/>
+        </p:spPr>
+        <p:txBody>
+          <a:bodyPr wrap="square">
+            <a:spAutoFit/>
+          </a:bodyPr>
+          <a:lstStyle/>
+          <a:p>
+            <a:r>
+              <a:rPr sz="1300" b="1" i="0">
+                <a:solidFill>
+                  <a:srgbClr val="0F7B6C"/>
+                </a:solidFill>
+                <a:latin typeface="맑은 고딕"/>
+              </a:rPr>
+              <a:t>부록</a:t>
+            </a:r>
+          </a:p>
+        </p:txBody>
+      </p:sp>
+      <p:sp>
+        <p:nvSpPr>
+          <p:cNvPr id="3" name="title"/>
+          <p:cNvSpPr txBox="1"/>
+          <p:nvPr/>
+        </p:nvSpPr>
+        <p:spPr>
+          <a:xfrm>
+            <a:off x="566928" y="585216"/>
+            <a:ext cx="9601200" cy="713232"/>
+          </a:xfrm>
+          <a:prstGeom prst="rect">
+            <a:avLst/>
+          </a:prstGeom>
+          <a:noFill/>
+        </p:spPr>
+        <p:txBody>
+          <a:bodyPr wrap="square">
+            <a:spAutoFit/>
+          </a:bodyPr>
+          <a:lstStyle/>
+          <a:p>
+            <a:r>
+              <a:rPr sz="2700" b="1" i="0">
+                <a:solidFill>
+                  <a:srgbClr val="1A1A1A"/>
+                </a:solidFill>
+                <a:latin typeface="맑은 고딕"/>
+              </a:rPr>
+              <a:t>용어집 (2/2) — 오늘 나온 낯선 말들</a:t>
+            </a:r>
+          </a:p>
+        </p:txBody>
+      </p:sp>
+      <p:sp>
+        <p:nvSpPr>
+          <p:cNvPr id="4" name="Rectangle 3"/>
+          <p:cNvSpPr/>
+          <p:nvPr/>
+        </p:nvSpPr>
+        <p:spPr>
+          <a:xfrm>
+            <a:off x="566928" y="1335024"/>
+            <a:ext cx="11064240" cy="9525"/>
+          </a:xfrm>
+          <a:prstGeom prst="rect">
+            <a:avLst/>
+          </a:prstGeom>
+          <a:solidFill>
+            <a:srgbClr val="E8E8E8"/>
+          </a:solidFill>
+          <a:ln>
+            <a:noFill/>
+          </a:ln>
+          <a:effectLst/>
+        </p:spPr>
+        <p:style>
+          <a:lnRef idx="1">
+            <a:schemeClr val="accent1"/>
+          </a:lnRef>
+          <a:fillRef idx="3">
+            <a:schemeClr val="accent1"/>
+          </a:fillRef>
+          <a:effectRef idx="2">
+            <a:schemeClr val="accent1"/>
+          </a:effectRef>
+          <a:fontRef idx="minor">
+            <a:schemeClr val="lt1"/>
+          </a:fontRef>
+        </p:style>
+        <p:txBody>
+          <a:bodyPr rtlCol="0" anchor="ctr"/>
+          <a:lstStyle/>
+          <a:p>
+            <a:pPr algn="ctr"/>
+          </a:p>
+        </p:txBody>
+      </p:sp>
+      <p:graphicFrame>
+        <p:nvGraphicFramePr>
+          <p:cNvPr id="5" name="Table 4"/>
+          <p:cNvGraphicFramePr>
+            <a:graphicFrameLocks noGrp="1"/>
+          </p:cNvGraphicFramePr>
+          <p:nvPr/>
+        </p:nvGraphicFramePr>
+        <p:xfrm>
+          <a:off x="566928" y="1572768"/>
+          <a:ext cx="11064240" cy="4663440"/>
+        </p:xfrm>
+        <a:graphic>
+          <a:graphicData uri="http://schemas.openxmlformats.org/drawingml/2006/table">
+            <a:tbl>
+              <a:tblPr firstRow="1" bandRow="1">
+                <a:tableStyleId>{5C22544A-7EE6-4342-B048-85BDC9FD1C3A}</a:tableStyleId>
+              </a:tblPr>
+              <a:tblGrid>
+                <a:gridCol w="3017520"/>
+                <a:gridCol w="8046720"/>
+              </a:tblGrid>
+              <a:tr h="423949">
+                <a:tc>
+                  <a:txBody>
+                    <a:bodyPr/>
+                    <a:lstStyle/>
+                    <a:p>
+                      <a:pPr algn="l"/>
+                      <a:r>
+                        <a:rPr sz="1400" b="1">
+                          <a:solidFill>
+                            <a:srgbClr val="FFFFFF"/>
+                          </a:solidFill>
+                          <a:latin typeface="맑은 고딕"/>
+                        </a:rPr>
+                        <a:t>용어</a:t>
+                      </a:r>
+                    </a:p>
+                  </a:txBody>
+                  <a:tcPr anchor="ctr" marL="73152" marR="73152" marT="18288" marB="18288">
+                    <a:solidFill>
+                      <a:srgbClr val="0F7B6C"/>
+                    </a:solidFill>
+                  </a:tcPr>
+                </a:tc>
+                <a:tc>
+                  <a:txBody>
+                    <a:bodyPr/>
+                    <a:lstStyle/>
+                    <a:p>
+                      <a:pPr algn="ctr"/>
+                      <a:r>
+                        <a:rPr sz="1400" b="1">
+                          <a:solidFill>
+                            <a:srgbClr val="FFFFFF"/>
+                          </a:solidFill>
+                          <a:latin typeface="맑은 고딕"/>
+                        </a:rPr>
+                        <a:t>뜻</a:t>
+                      </a:r>
+                    </a:p>
+                  </a:txBody>
+                  <a:tcPr anchor="ctr" marL="73152" marR="73152" marT="18288" marB="18288">
+                    <a:solidFill>
+                      <a:srgbClr val="0F7B6C"/>
+                    </a:solidFill>
+                  </a:tcPr>
+                </a:tc>
+              </a:tr>
+              <a:tr h="423949">
+                <a:tc>
+                  <a:txBody>
+                    <a:bodyPr/>
+                    <a:lstStyle/>
+                    <a:p>
+                      <a:pPr algn="l"/>
+                      <a:r>
+                        <a:rPr sz="1300" b="0">
+                          <a:solidFill>
+                            <a:srgbClr val="1A1A1A"/>
+                          </a:solidFill>
+                          <a:latin typeface="맑은 고딕"/>
+                        </a:rPr>
+                        <a:t>판정 양성 / 음성</a:t>
+                      </a:r>
+                    </a:p>
+                  </a:txBody>
+                  <a:tcPr anchor="ctr" marL="73152" marR="73152" marT="18288" marB="18288"/>
+                </a:tc>
+                <a:tc>
+                  <a:txBody>
+                    <a:bodyPr/>
+                    <a:lstStyle/>
+                    <a:p>
+                      <a:pPr algn="ctr"/>
+                      <a:r>
+                        <a:rPr sz="1300" b="0">
+                          <a:solidFill>
+                            <a:srgbClr val="1A1A1A"/>
+                          </a:solidFill>
+                          <a:latin typeface="맑은 고딕"/>
+                        </a:rPr>
+                        <a:t>미리 정한 기준을 넘었다(효과 있음) / 못 넘었다(효과 확인 안 됨) — 의학 시험 용어를 빌린 것</a:t>
+                      </a:r>
+                    </a:p>
+                  </a:txBody>
+                  <a:tcPr anchor="ctr" marL="73152" marR="73152" marT="18288" marB="18288"/>
+                </a:tc>
+              </a:tr>
+              <a:tr h="423949">
+                <a:tc>
+                  <a:txBody>
+                    <a:bodyPr/>
+                    <a:lstStyle/>
+                    <a:p>
+                      <a:pPr algn="l"/>
+                      <a:r>
+                        <a:rPr sz="1300" b="0">
+                          <a:solidFill>
+                            <a:srgbClr val="1A1A1A"/>
+                          </a:solidFill>
+                          <a:latin typeface="맑은 고딕"/>
+                        </a:rPr>
+                        <a:t>표현 바닥 (방식의 한계선)</a:t>
+                      </a:r>
+                    </a:p>
+                  </a:txBody>
+                  <a:tcPr anchor="ctr" marL="73152" marR="73152" marT="18288" marB="18288"/>
+                </a:tc>
+                <a:tc>
+                  <a:txBody>
+                    <a:bodyPr/>
+                    <a:lstStyle/>
+                    <a:p>
+                      <a:pPr algn="ctr"/>
+                      <a:r>
+                        <a:rPr sz="1300" b="0">
+                          <a:solidFill>
+                            <a:srgbClr val="1A1A1A"/>
+                          </a:solidFill>
+                          <a:latin typeface="맑은 고딕"/>
+                        </a:rPr>
+                        <a:t>FEM 참값을 그 계산 방식으로 옮겨 적기만 해도 남는 오차 — 어떤 학습도 이보다 잘할 수 없다</a:t>
+                      </a:r>
+                    </a:p>
+                  </a:txBody>
+                  <a:tcPr anchor="ctr" marL="73152" marR="73152" marT="18288" marB="18288"/>
+                </a:tc>
+              </a:tr>
+              <a:tr h="423949">
+                <a:tc>
+                  <a:txBody>
+                    <a:bodyPr/>
+                    <a:lstStyle/>
+                    <a:p>
+                      <a:pPr algn="l"/>
+                      <a:r>
+                        <a:rPr sz="1300" b="0">
+                          <a:solidFill>
+                            <a:srgbClr val="1A1A1A"/>
+                          </a:solidFill>
+                          <a:latin typeface="맑은 고딕"/>
+                        </a:rPr>
+                        <a:t>물리 prior (물리 힌트)</a:t>
+                      </a:r>
+                    </a:p>
+                  </a:txBody>
+                  <a:tcPr anchor="ctr" marL="73152" marR="73152" marT="18288" marB="18288"/>
+                </a:tc>
+                <a:tc>
+                  <a:txBody>
+                    <a:bodyPr/>
+                    <a:lstStyle/>
+                    <a:p>
+                      <a:pPr algn="ctr"/>
+                      <a:r>
+                        <a:rPr sz="1300" b="0">
+                          <a:solidFill>
+                            <a:srgbClr val="1A1A1A"/>
+                          </a:solidFill>
+                          <a:latin typeface="맑은 고딕"/>
+                        </a:rPr>
+                        <a:t>간이 선형 자기해석 결과를 절점마다 미리 계산해 AI 입력에 주는 것 — AI는 그 보정만 배운다</a:t>
+                      </a:r>
+                    </a:p>
+                  </a:txBody>
+                  <a:tcPr anchor="ctr" marL="73152" marR="73152" marT="18288" marB="18288"/>
+                </a:tc>
+              </a:tr>
+              <a:tr h="423949">
+                <a:tc>
+                  <a:txBody>
+                    <a:bodyPr/>
+                    <a:lstStyle/>
+                    <a:p>
+                      <a:pPr algn="l"/>
+                      <a:r>
+                        <a:rPr sz="1300" b="0">
+                          <a:solidFill>
+                            <a:srgbClr val="1A1A1A"/>
+                          </a:solidFill>
+                          <a:latin typeface="맑은 고딕"/>
+                        </a:rPr>
+                        <a:t>Arkkio 토크</a:t>
+                      </a:r>
+                    </a:p>
+                  </a:txBody>
+                  <a:tcPr anchor="ctr" marL="73152" marR="73152" marT="18288" marB="18288"/>
+                </a:tc>
+                <a:tc>
+                  <a:txBody>
+                    <a:bodyPr/>
+                    <a:lstStyle/>
+                    <a:p>
+                      <a:pPr algn="ctr"/>
+                      <a:r>
+                        <a:rPr sz="1300" b="0">
+                          <a:solidFill>
+                            <a:srgbClr val="1A1A1A"/>
+                          </a:solidFill>
+                          <a:latin typeface="맑은 고딕"/>
+                        </a:rPr>
+                        <a:t>공극 밴드의 자기응력(맥스웰 응력)을 적분해 토크를 얻는 표준 계산법</a:t>
+                      </a:r>
+                    </a:p>
+                  </a:txBody>
+                  <a:tcPr anchor="ctr" marL="73152" marR="73152" marT="18288" marB="18288"/>
+                </a:tc>
+              </a:tr>
+              <a:tr h="423949">
+                <a:tc>
+                  <a:txBody>
+                    <a:bodyPr/>
+                    <a:lstStyle/>
+                    <a:p>
+                      <a:pPr algn="l"/>
+                      <a:r>
+                        <a:rPr sz="1300" b="0">
+                          <a:solidFill>
+                            <a:srgbClr val="1A1A1A"/>
+                          </a:solidFill>
+                          <a:latin typeface="맑은 고딕"/>
+                        </a:rPr>
+                        <a:t>에폭</a:t>
+                      </a:r>
+                    </a:p>
+                  </a:txBody>
+                  <a:tcPr anchor="ctr" marL="73152" marR="73152" marT="18288" marB="18288"/>
+                </a:tc>
+                <a:tc>
+                  <a:txBody>
+                    <a:bodyPr/>
+                    <a:lstStyle/>
+                    <a:p>
+                      <a:pPr algn="ctr"/>
+                      <a:r>
+                        <a:rPr sz="1300" b="0">
+                          <a:solidFill>
+                            <a:srgbClr val="1A1A1A"/>
+                          </a:solidFill>
+                          <a:latin typeface="맑은 고딕"/>
+                        </a:rPr>
+                        <a:t>학습 데이터 전체를 한 바퀴 도는 반복 단위. "50에폭"은 전체를 50번 반복 학습</a:t>
+                      </a:r>
+                    </a:p>
+                  </a:txBody>
+                  <a:tcPr anchor="ctr" marL="73152" marR="73152" marT="18288" marB="18288"/>
+                </a:tc>
+              </a:tr>
+              <a:tr h="423949">
+                <a:tc>
+                  <a:txBody>
+                    <a:bodyPr/>
+                    <a:lstStyle/>
+                    <a:p>
+                      <a:pPr algn="l"/>
+                      <a:r>
+                        <a:rPr sz="1300" b="0">
+                          <a:solidFill>
+                            <a:srgbClr val="1A1A1A"/>
+                          </a:solidFill>
+                          <a:latin typeface="맑은 고딕"/>
+                        </a:rPr>
+                        <a:t>%p (퍼센트포인트)</a:t>
+                      </a:r>
+                    </a:p>
+                  </a:txBody>
+                  <a:tcPr anchor="ctr" marL="73152" marR="73152" marT="18288" marB="18288"/>
+                </a:tc>
+                <a:tc>
+                  <a:txBody>
+                    <a:bodyPr/>
+                    <a:lstStyle/>
+                    <a:p>
+                      <a:pPr algn="ctr"/>
+                      <a:r>
+                        <a:rPr sz="1300" b="0">
+                          <a:solidFill>
+                            <a:srgbClr val="1A1A1A"/>
+                          </a:solidFill>
+                          <a:latin typeface="맑은 고딕"/>
+                        </a:rPr>
+                        <a:t>%값끼리의 차이. 오차 7.14%에서 5%까지는 2.14%p</a:t>
+                      </a:r>
+                    </a:p>
+                  </a:txBody>
+                  <a:tcPr anchor="ctr" marL="73152" marR="73152" marT="18288" marB="18288"/>
+                </a:tc>
+              </a:tr>
+              <a:tr h="423949">
+                <a:tc>
+                  <a:txBody>
+                    <a:bodyPr/>
+                    <a:lstStyle/>
+                    <a:p>
+                      <a:pPr algn="l"/>
+                      <a:r>
+                        <a:rPr sz="1300" b="0">
+                          <a:solidFill>
+                            <a:srgbClr val="1A1A1A"/>
+                          </a:solidFill>
+                          <a:latin typeface="맑은 고딕"/>
+                        </a:rPr>
+                        <a:t>DOE</a:t>
+                      </a:r>
+                    </a:p>
+                  </a:txBody>
+                  <a:tcPr anchor="ctr" marL="73152" marR="73152" marT="18288" marB="18288"/>
+                </a:tc>
+                <a:tc>
+                  <a:txBody>
+                    <a:bodyPr/>
+                    <a:lstStyle/>
+                    <a:p>
+                      <a:pPr algn="ctr"/>
+                      <a:r>
+                        <a:rPr sz="1300" b="0">
+                          <a:solidFill>
+                            <a:srgbClr val="1A1A1A"/>
+                          </a:solidFill>
+                          <a:latin typeface="맑은 고딕"/>
+                        </a:rPr>
+                        <a:t>설계 변수(형상·전류 등)를 계획적으로 바꿔 만든 해석 케이스 모음</a:t>
+                      </a:r>
+                    </a:p>
+                  </a:txBody>
+                  <a:tcPr anchor="ctr" marL="73152" marR="73152" marT="18288" marB="18288"/>
+                </a:tc>
+              </a:tr>
+              <a:tr h="423949">
+                <a:tc>
+                  <a:txBody>
+                    <a:bodyPr/>
+                    <a:lstStyle/>
+                    <a:p>
+                      <a:pPr algn="l"/>
+                      <a:r>
+                        <a:rPr sz="1300" b="0">
+                          <a:solidFill>
+                            <a:srgbClr val="1A1A1A"/>
+                          </a:solidFill>
+                          <a:latin typeface="맑은 고딕"/>
+                        </a:rPr>
+                        <a:t>누수 (컨닝)</a:t>
+                      </a:r>
+                    </a:p>
+                  </a:txBody>
+                  <a:tcPr anchor="ctr" marL="73152" marR="73152" marT="18288" marB="18288"/>
+                </a:tc>
+                <a:tc>
+                  <a:txBody>
+                    <a:bodyPr/>
+                    <a:lstStyle/>
+                    <a:p>
+                      <a:pPr algn="ctr"/>
+                      <a:r>
+                        <a:rPr sz="1300" b="0">
+                          <a:solidFill>
+                            <a:srgbClr val="1A1A1A"/>
+                          </a:solidFill>
+                          <a:latin typeface="맑은 고딕"/>
+                        </a:rPr>
+                        <a:t>시험 형상의 정보가 학습에 섞여 성적이 가짜로 좋아지는 것 — 세 번 잡아서 고쳤다</a:t>
+                      </a:r>
+                    </a:p>
+                  </a:txBody>
+                  <a:tcPr anchor="ctr" marL="73152" marR="73152" marT="18288" marB="18288"/>
+                </a:tc>
+              </a:tr>
+              <a:tr h="423949">
+                <a:tc>
+                  <a:txBody>
+                    <a:bodyPr/>
+                    <a:lstStyle/>
+                    <a:p>
+                      <a:pPr algn="l"/>
+                      <a:r>
+                        <a:rPr sz="1300" b="0">
+                          <a:solidFill>
+                            <a:srgbClr val="1A1A1A"/>
+                          </a:solidFill>
+                          <a:latin typeface="맑은 고딕"/>
+                        </a:rPr>
+                        <a:t>파라미터</a:t>
+                      </a:r>
+                    </a:p>
+                  </a:txBody>
+                  <a:tcPr anchor="ctr" marL="73152" marR="73152" marT="18288" marB="18288"/>
+                </a:tc>
+                <a:tc>
+                  <a:txBody>
+                    <a:bodyPr/>
+                    <a:lstStyle/>
+                    <a:p>
+                      <a:pPr algn="ctr"/>
+                      <a:r>
+                        <a:rPr sz="1300" b="0">
+                          <a:solidFill>
+                            <a:srgbClr val="1A1A1A"/>
+                          </a:solidFill>
+                          <a:latin typeface="맑은 고딕"/>
+                        </a:rPr>
+                        <a:t>AI 모델 내부의 조절 가능한 숫자들 — 많을수록 큰 모델 (우리는 930만 개)</a:t>
+                      </a:r>
+                    </a:p>
+                  </a:txBody>
+                  <a:tcPr anchor="ctr" marL="73152" marR="73152" marT="18288" marB="18288"/>
+                </a:tc>
+              </a:tr>
+              <a:tr h="423950">
+                <a:tc>
+                  <a:txBody>
+                    <a:bodyPr/>
+                    <a:lstStyle/>
+                    <a:p>
+                      <a:pPr algn="l"/>
+                      <a:r>
+                        <a:rPr sz="1300" b="0">
+                          <a:solidFill>
+                            <a:srgbClr val="1A1A1A"/>
+                          </a:solidFill>
+                          <a:latin typeface="맑은 고딕"/>
+                        </a:rPr>
+                        <a:t>체크포인트</a:t>
+                      </a:r>
+                    </a:p>
+                  </a:txBody>
+                  <a:tcPr anchor="ctr" marL="73152" marR="73152" marT="18288" marB="18288"/>
+                </a:tc>
+                <a:tc>
+                  <a:txBody>
+                    <a:bodyPr/>
+                    <a:lstStyle/>
+                    <a:p>
+                      <a:pPr algn="ctr"/>
+                      <a:r>
+                        <a:rPr sz="1300" b="0">
+                          <a:solidFill>
+                            <a:srgbClr val="1A1A1A"/>
+                          </a:solidFill>
+                          <a:latin typeface="맑은 고딕"/>
+                        </a:rPr>
+                        <a:t>학습 도중 특정 시점의 모델을 저장해 둔 파일 — "당시 모델"이라고 하면 이것</a:t>
+                      </a:r>
+                    </a:p>
+                  </a:txBody>
+                  <a:tcPr anchor="ctr" marL="73152" marR="73152" marT="18288" marB="18288"/>
+                </a:tc>
+              </a:tr>
+            </a:tbl>
+          </a:graphicData>
+        </a:graphic>
+      </p:graphicFrame>
     </p:spTree>
   </p:cSld>
   <p:clrMapOvr>
@@ -8691,7 +10991,7 @@
                 </a:solidFill>
                 <a:latin typeface="맑은 고딕"/>
               </a:rPr>
-              <a:t>공극 |B|  7.14%   (목표 5%)</a:t>
+              <a:t>공극 오차  7.14%   (합격선 5%)</a:t>
             </a:r>
           </a:p>
           <a:p>
@@ -8707,7 +11007,7 @@
                 </a:solidFill>
                 <a:latin typeface="맑은 고딕"/>
               </a:rPr>
-              <a:t>토크      3.35%   (목표 3%)</a:t>
+              <a:t>토크 오차  3.35%   (합격선 3%)</a:t>
             </a:r>
           </a:p>
           <a:p>
@@ -8723,7 +11023,7 @@
                 </a:solidFill>
                 <a:latin typeface="맑은 고딕"/>
               </a:rPr>
-              <a:t>전체 |B|  11.10%</a:t>
+              <a:t>전체 오차  11.10%</a:t>
             </a:r>
           </a:p>
           <a:p>
@@ -8755,7 +11055,7 @@
                 </a:solidFill>
                 <a:latin typeface="맑은 고딕"/>
               </a:rPr>
-              <a:t>설계 스크리닝 용도(순위 보존)는</a:t>
+              <a:t>여러 설계 중 좋은 것 고르기</a:t>
             </a:r>
           </a:p>
           <a:p>
@@ -8771,7 +11071,7 @@
                 </a:solidFill>
                 <a:latin typeface="맑은 고딕"/>
               </a:rPr>
-              <a:t>현행 정확도로 이미 성립.</a:t>
+              <a:t>(순위 매기기)는 지금도 된다.</a:t>
             </a:r>
           </a:p>
           <a:p>
@@ -8787,7 +11087,23 @@
                 </a:solidFill>
                 <a:latin typeface="맑은 고딕"/>
               </a:rPr>
-              <a:t>정량 예측 용도는 아직 미달.</a:t>
+              <a:t>"토크가 정확히 몇 N·m"로</a:t>
+            </a:r>
+          </a:p>
+          <a:p>
+            <a:pPr>
+              <a:spcAft>
+                <a:spcPts val="300"/>
+              </a:spcAft>
+            </a:pPr>
+            <a:r>
+              <a:rPr sz="1350" b="0" i="0">
+                <a:solidFill>
+                  <a:srgbClr val="1A1A1A"/>
+                </a:solidFill>
+                <a:latin typeface="맑은 고딕"/>
+              </a:rPr>
+              <a:t>쓰기에는 아직 부족하다.</a:t>
             </a:r>
           </a:p>
         </p:txBody>
@@ -8842,7 +11158,7 @@
                 </a:solidFill>
                 <a:latin typeface="맑은 고딕"/>
               </a:rPr>
-              <a:t>병목 진단</a:t>
+              <a:t>왜 안 내려가나</a:t>
             </a:r>
           </a:p>
           <a:p>
@@ -8858,7 +11174,7 @@
                 </a:solidFill>
                 <a:latin typeface="맑은 고딕"/>
               </a:rPr>
-              <a:t>모델 축은 소진됐다.</a:t>
+              <a:t>AI 모델 쪽 개선책은 다 써봤다.</a:t>
             </a:r>
           </a:p>
           <a:p>
@@ -8874,7 +11190,7 @@
                 </a:solidFill>
                 <a:latin typeface="맑은 고딕"/>
               </a:rPr>
-              <a:t>용량·감독·아키텍처·표현 네 축을</a:t>
+              <a:t>크기·학습 방법·구조·출력 방식</a:t>
             </a:r>
           </a:p>
           <a:p>
@@ -8890,7 +11206,7 @@
                 </a:solidFill>
                 <a:latin typeface="맑은 고딕"/>
               </a:rPr>
-              <a:t>단일축 통제로 실험 — |B| 바닥</a:t>
+              <a:t>네 가지를 하나씩 바꿔 실험 —</a:t>
             </a:r>
           </a:p>
           <a:p>
@@ -8906,7 +11222,7 @@
                 </a:solidFill>
                 <a:latin typeface="맑은 고딕"/>
               </a:rPr>
-              <a:t>12.7%가 전부 안 움직였다.</a:t>
+              <a:t>오차 12.7%가 꿈쩍 안 했다.</a:t>
             </a:r>
           </a:p>
           <a:p>
@@ -8938,7 +11254,7 @@
                 </a:solidFill>
                 <a:latin typeface="맑은 고딕"/>
               </a:rPr>
-              <a:t>움직인 축은 데이터 하나뿐.</a:t>
+              <a:t>효과가 있던 건 데이터 늘리기</a:t>
             </a:r>
           </a:p>
           <a:p>
@@ -8954,7 +11270,7 @@
                 </a:solidFill>
                 <a:latin typeface="맑은 고딕"/>
               </a:rPr>
-              <a:t>그런데 그 기울기로는</a:t>
+              <a:t>하나뿐인데, 그 속도로는</a:t>
             </a:r>
           </a:p>
           <a:p>
@@ -8970,7 +11286,7 @@
                 </a:solidFill>
                 <a:latin typeface="맑은 고딕"/>
               </a:rPr>
-              <a:t>게이트에 못 닿는다.</a:t>
+              <a:t>합격선까지 60일 넘게 걸린다.</a:t>
             </a:r>
           </a:p>
         </p:txBody>
@@ -9025,7 +11341,7 @@
                 </a:solidFill>
                 <a:latin typeface="맑은 고딕"/>
               </a:rPr>
-              <a:t>처방과 첫 결과</a:t>
+              <a:t>그래서 한 일과 첫 결과</a:t>
             </a:r>
           </a:p>
           <a:p>
@@ -9041,7 +11357,7 @@
                 </a:solidFill>
                 <a:latin typeface="맑은 고딕"/>
               </a:rPr>
-              <a:t>① 물리 사전해를 입력에 주입 → 판정 완료</a:t>
+              <a:t>① 간이 자기해석 결과를 힌트로 입력</a:t>
             </a:r>
           </a:p>
           <a:p>
@@ -9057,7 +11373,7 @@
                 </a:solidFill>
                 <a:latin typeface="맑은 고딕"/>
               </a:rPr>
-              <a:t>   토크 5.40 → 3.35%</a:t>
+              <a:t>   토크 오차 5.40 → 3.35%</a:t>
             </a:r>
           </a:p>
           <a:p>
@@ -9073,7 +11389,7 @@
                 </a:solidFill>
                 <a:latin typeface="맑은 고딕"/>
               </a:rPr>
-              <a:t>   (단, 1차 지표 공극은 음성 — 밴드 내)</a:t>
+              <a:t>   (미리 정한 1차 기준인 공극은</a:t>
             </a:r>
           </a:p>
           <a:p>
@@ -9089,7 +11405,7 @@
                 </a:solidFill>
                 <a:latin typeface="맑은 고딕"/>
               </a:rPr>
-              <a:t/>
+              <a:t>    통과 못 함 — 0.09%p 차이)</a:t>
             </a:r>
           </a:p>
           <a:p>
@@ -9105,7 +11421,7 @@
                 </a:solidFill>
                 <a:latin typeface="맑은 고딕"/>
               </a:rPr>
-              <a:t>② 지금: 형상×전류 320케이스 학습 중</a:t>
+              <a:t/>
             </a:r>
           </a:p>
           <a:p>
@@ -9121,7 +11437,7 @@
                 </a:solidFill>
                 <a:latin typeface="맑은 고딕"/>
               </a:rPr>
-              <a:t>   전류축을 처음으로 실제 반영</a:t>
+              <a:t>② 지금: 형상×전류 320케이스 학습 중</a:t>
             </a:r>
           </a:p>
           <a:p>
@@ -9137,7 +11453,7 @@
                 </a:solidFill>
                 <a:latin typeface="맑은 고딕"/>
               </a:rPr>
-              <a:t/>
+              <a:t>   전류축을 처음으로 실제 반영</a:t>
             </a:r>
           </a:p>
           <a:p>
@@ -9153,7 +11469,23 @@
                 </a:solidFill>
                 <a:latin typeface="맑은 고딕"/>
               </a:rPr>
-              <a:t>③ 평가·재현성 자산은 이미 확보</a:t>
+              <a:t/>
+            </a:r>
+          </a:p>
+          <a:p>
+            <a:pPr>
+              <a:spcAft>
+                <a:spcPts val="300"/>
+              </a:spcAft>
+            </a:pPr>
+            <a:r>
+              <a:rPr sz="1350" b="0" i="0">
+                <a:solidFill>
+                  <a:srgbClr val="1A1A1A"/>
+                </a:solidFill>
+                <a:latin typeface="맑은 고딕"/>
+              </a:rPr>
+              <a:t>③ 채점·재현 체계는 이미 확보</a:t>
             </a:r>
           </a:p>
         </p:txBody>
@@ -9217,7 +11549,7 @@
                 </a:solidFill>
                 <a:latin typeface="맑은 고딕"/>
               </a:rPr>
-              <a:t>모델을 키워서는 안 됐고 데이터로는 닿지 않았다 — 물리를 주입하자 토크가 처음으로 게이트 사정권에 들어왔다.</a:t>
+              <a:t>모델 키우기는 효과가 없었고 데이터만으로는 너무 오래 걸린다 — 물리 힌트를 넣자 토크가 처음으로 합격선 코앞까지 왔다.</a:t>
             </a:r>
           </a:p>
         </p:txBody>
@@ -9553,7 +11885,7 @@
                 </a:solidFill>
                 <a:latin typeface="맑은 고딕"/>
               </a:rPr>
-              <a:t>노드 = 메시 절점</a:t>
+              <a:t>메시를 그대로 입력:</a:t>
             </a:r>
           </a:p>
           <a:p>
@@ -9569,7 +11901,7 @@
                 </a:solidFill>
                 <a:latin typeface="맑은 고딕"/>
               </a:rPr>
-              <a:t>엣지 = 요소 변</a:t>
+              <a:t>점 = 메시 절점</a:t>
             </a:r>
           </a:p>
           <a:p>
@@ -9585,7 +11917,7 @@
                 </a:solidFill>
                 <a:latin typeface="맑은 고딕"/>
               </a:rPr>
-              <a:t>메시 6-12k 노드</a:t>
+              <a:t>선 = 요소 변</a:t>
             </a:r>
           </a:p>
           <a:p>
@@ -9601,7 +11933,7 @@
                 </a:solidFill>
                 <a:latin typeface="맑은 고딕"/>
               </a:rPr>
-              <a:t>케이스마다 메시가</a:t>
+              <a:t>형상마다 메시가 달라</a:t>
             </a:r>
           </a:p>
           <a:p>
@@ -9617,7 +11949,7 @@
                 </a:solidFill>
                 <a:latin typeface="맑은 고딕"/>
               </a:rPr>
-              <a:t>다르므로 CNN 불가</a:t>
+              <a:t>격자식 AI는 못 쓴다</a:t>
             </a:r>
           </a:p>
         </p:txBody>
@@ -9672,7 +12004,7 @@
                 </a:solidFill>
                 <a:latin typeface="맑은 고딕"/>
               </a:rPr>
-              <a:t>③ 모델</a:t>
+              <a:t>③ AI 모델</a:t>
             </a:r>
           </a:p>
           <a:p>
@@ -9688,7 +12020,7 @@
                 </a:solidFill>
                 <a:latin typeface="맑은 고딕"/>
               </a:rPr>
-              <a:t>MeshGraphNet</a:t>
+              <a:t>메시 그래프 신경망</a:t>
             </a:r>
           </a:p>
           <a:p>
@@ -9704,7 +12036,7 @@
                 </a:solidFill>
                 <a:latin typeface="맑은 고딕"/>
               </a:rPr>
-              <a:t>절점이 이웃과</a:t>
+              <a:t>각 절점이 이웃과</a:t>
             </a:r>
           </a:p>
           <a:p>
@@ -9720,7 +12052,7 @@
                 </a:solidFill>
                 <a:latin typeface="맑은 고딕"/>
               </a:rPr>
-              <a:t>15회 메시지 교환</a:t>
+              <a:t>15회 정보를 주고받으며</a:t>
             </a:r>
           </a:p>
           <a:p>
@@ -9736,7 +12068,7 @@
                 </a:solidFill>
                 <a:latin typeface="맑은 고딕"/>
               </a:rPr>
-              <a:t>9.29 M 파라미터</a:t>
+              <a:t>자기 값을 갱신</a:t>
             </a:r>
           </a:p>
           <a:p>
@@ -9752,7 +12084,7 @@
                 </a:solidFill>
                 <a:latin typeface="맑은 고딕"/>
               </a:rPr>
-              <a:t>출력 = 절점 B</a:t>
+              <a:t>출력 = 절점의 B</a:t>
             </a:r>
           </a:p>
         </p:txBody>
@@ -9807,7 +12139,7 @@
                 </a:solidFill>
                 <a:latin typeface="맑은 고딕"/>
               </a:rPr>
-              <a:t>④ 평가</a:t>
+              <a:t>④ 채점</a:t>
             </a:r>
           </a:p>
           <a:p>
@@ -9823,7 +12155,7 @@
                 </a:solidFill>
                 <a:latin typeface="맑은 고딕"/>
               </a:rPr>
-              <a:t>요소 지지 |B| nRMSE</a:t>
+              <a:t>|B| 오차율(nRMSE)</a:t>
             </a:r>
           </a:p>
           <a:p>
@@ -9855,7 +12187,7 @@
                 </a:solidFill>
                 <a:latin typeface="맑은 고딕"/>
               </a:rPr>
-              <a:t>영역별 분해</a:t>
+              <a:t>영역별로 나눠 채점</a:t>
             </a:r>
           </a:p>
           <a:p>
@@ -9871,7 +12203,23 @@
                 </a:solidFill>
                 <a:latin typeface="맑은 고딕"/>
               </a:rPr>
-              <a:t>case-level 홀드아웃</a:t>
+              <a:t>시험 형상은 학습에서</a:t>
+            </a:r>
+          </a:p>
+          <a:p>
+            <a:pPr>
+              <a:spcAft>
+                <a:spcPts val="300"/>
+              </a:spcAft>
+            </a:pPr>
+            <a:r>
+              <a:rPr sz="1350" b="0" i="0">
+                <a:solidFill>
+                  <a:srgbClr val="1A1A1A"/>
+                </a:solidFill>
+                <a:latin typeface="맑은 고딕"/>
+              </a:rPr>
+              <a:t>완전히 분리</a:t>
             </a:r>
           </a:p>
         </p:txBody>
@@ -9910,7 +12258,7 @@
                 </a:solidFill>
                 <a:latin typeface="맑은 고딕"/>
               </a:rPr>
-              <a:t>▪ 설계 DOE는 FEA 호출 수천~수만 회. DOE를 +120 케이스 늘리는 데만 5~6시간이 든다</a:t>
+              <a:t>▪ 설계 탐색(DOE)은 FEA 호출 수천~수만 회. 우리 DOE를 +120케이스 늘리는 데만 5~6시간이 들었다</a:t>
             </a:r>
           </a:p>
           <a:p>
@@ -9926,7 +12274,7 @@
                 </a:solidFill>
                 <a:latin typeface="맑은 고딕"/>
               </a:rPr>
-              <a:t>▪ 서로게이트가 밀리초에 장을 뱉으면 스크리닝을 맡기고 상위 후보만 FEM으로 검증할 수 있다</a:t>
+              <a:t>▪ AI가 밀리초에 장을 내주면, 후보 걸러내기는 AI에 맡기고 상위 후보만 FEM으로 확인하면 된다</a:t>
             </a:r>
           </a:p>
           <a:p>
@@ -9942,7 +12290,7 @@
                 </a:solidFill>
                 <a:latin typeface="맑은 고딕"/>
               </a:rPr>
-              <a:t>▪ 핵심 설계 결정: 필드 오차에서 멈추지 않고 공극 밴드에 Arkkio 응력 적분을 걸어 토크까지 평가한다 — 설계자가 실제로 보는 숫자로 판정하기 위해</a:t>
+              <a:t>▪ 처음부터 지킨 원칙: 필드 오차에서 멈추지 않고 공극의 자기응력을 적분(Arkkio법)해 토크까지 채점한다 — 설계자가 실제로 보는 숫자로 판정하기 위해</a:t>
             </a:r>
           </a:p>
         </p:txBody>
@@ -10028,7 +12376,7 @@
                 </a:solidFill>
                 <a:latin typeface="맑은 고딕"/>
               </a:rPr>
-              <a:t>지금 성적 — 목표 게이트까지 남은 거리</a:t>
+              <a:t>지금 성적 — 합격 기준까지 남은 거리</a:t>
             </a:r>
           </a:p>
         </p:txBody>
@@ -10170,7 +12518,7 @@
                 </a:solidFill>
                 <a:latin typeface="맑은 고딕"/>
               </a:rPr>
-              <a:t>▪ 물리 prior 주입으로 토크 5.40 → 3.35% — G1′의 두 항목 중 하나가 사정권(0.35pp)에 들어온 것은 이번이 처음이다</a:t>
+              <a:t>▪ 물리 힌트를 넣자 토크 오차 5.40 → 3.35% — 합격 기준 두 항목 중 하나가 사정권(0.35%p)에 들어온 것은 이번이 처음이다</a:t>
             </a:r>
           </a:p>
           <a:p>
@@ -10186,7 +12534,7 @@
                 </a:solidFill>
                 <a:latin typeface="맑은 고딕"/>
               </a:rPr>
-              <a:t>▪ 다만 사전 등록 1차 지표는 공극이었고 판정은 음성이다 — 7.138%로 기준 7.05%에 0.09pp 못 미쳤다(변동 밴드 내). 두 사실을 같이 보고한다</a:t>
+              <a:t>▪ 다만 결과를 보기 전에 정해둔 1차 기준은 공극이었고, 통과하지 못했다 — 7.138%로 기준 7.05%에 0.09%p 못 미침(우연 변동 폭 안). 두 사실을 같이 보고한다</a:t>
             </a:r>
           </a:p>
           <a:p>
@@ -10202,7 +12550,7 @@
                 </a:solidFill>
                 <a:latin typeface="맑은 고딕"/>
               </a:rPr>
-              <a:t>▪ 공극의 도달 가능 바닥은 2.68%다. 현재 7.14%에는 아직 4.5pp 여유가 있다 — 표현의 한계가 아니라 아직 학습이 못 따라간 것</a:t>
+              <a:t>▪ 이 계산 방식이 낼 수 있는 최저 오차(한계선)는 공극 2.68%다. 현재 7.14%와는 4.5%p 차이 — 방식의 한계가 아니라 학습이 아직 못 따라간 것이므로 공략할 여지가 실제로 있다</a:t>
             </a:r>
           </a:p>
         </p:txBody>
@@ -10425,7 +12773,7 @@
                 </a:solidFill>
                 <a:latin typeface="맑은 고딕"/>
               </a:rPr>
-              <a:t>행마다 FEM 참값 · 예측 · 차이(예측−FEM). 요소 단위 flat shading으로 메시 연결성 그대로 그렸고, 슬라이딩 밴드 요소는 유효 형상이 없어 공백으로 둔다. 패널 제목의 수치는 스코어카드의 test 집계값이지 이 한 스텝의 오차가 아니다.</a:t>
+              <a:t>행마다 FEM 참값 · AI 예측 · 차이(예측−FEM). 공극을 따라가는 흰 호는 오차가 아니라 회전 자세마다 다시 만들어지는 요소(슬라이딩 밴드)라 그리지 않은 것. 패널 제목의 %는 시험 형상 전체 집계값이지 이 한 장면의 오차가 아니다.</a:t>
             </a:r>
           </a:p>
         </p:txBody>
@@ -10511,7 +12859,7 @@
                 </a:solidFill>
                 <a:latin typeface="맑은 고딕"/>
               </a:rPr>
-              <a:t>토크 파형 — 연산자 검증과 모델 성능을 한 프레임에서</a:t>
+              <a:t>같은 케이스를 한 바퀴 돌려보면 — 애니메이션</a:t>
             </a:r>
           </a:p>
         </p:txBody>
@@ -10546,7 +12894,7 @@
                 </a:solidFill>
                 <a:latin typeface="Consolas"/>
               </a:rPr>
-              <a:t>§8c §22</a:t>
+              <a:t>case 4 / 45자세</a:t>
             </a:r>
           </a:p>
         </p:txBody>
@@ -10597,7 +12945,7 @@
       </p:sp>
       <p:pic>
         <p:nvPicPr>
-          <p:cNvPr id="6" name="Picture 5" descr="seminar_torque_waveform.png"/>
+          <p:cNvPr id="6" name="Picture 5" descr="case0004_field_torque_smooth.gif"/>
           <p:cNvPicPr>
             <a:picLocks noChangeAspect="1"/>
           </p:cNvPicPr>
@@ -10611,8 +12959,8 @@
         </p:blipFill>
         <p:spPr>
           <a:xfrm>
-            <a:off x="1207008" y="1481328"/>
-            <a:ext cx="6857999" cy="4526280"/>
+            <a:off x="2489064" y="1481328"/>
+            <a:ext cx="7219968" cy="4526280"/>
           </a:xfrm>
           <a:prstGeom prst="rect">
             <a:avLst/>
@@ -10621,14 +12969,14 @@
       </p:pic>
       <p:sp>
         <p:nvSpPr>
-          <p:cNvPr id="7" name="TextBox 6"/>
+          <p:cNvPr id="7" name="caption"/>
           <p:cNvSpPr txBox="1"/>
           <p:nvPr/>
         </p:nvSpPr>
         <p:spPr>
           <a:xfrm>
-            <a:off x="8869680" y="1737360"/>
-            <a:ext cx="2926080" cy="4206240"/>
+            <a:off x="566928" y="6327648"/>
+            <a:ext cx="11064240" cy="402336"/>
           </a:xfrm>
           <a:prstGeom prst="rect">
             <a:avLst/>
@@ -10642,93 +12990,13 @@
           <a:lstStyle/>
           <a:p>
             <a:r>
-              <a:rPr sz="1600" b="1" i="0">
-                <a:solidFill>
-                  <a:srgbClr val="0F7B6C"/>
-                </a:solidFill>
-                <a:latin typeface="맑은 고딕"/>
-              </a:rPr>
-              <a:t>세 곡선이 말하는 것</a:t>
-            </a:r>
-          </a:p>
-          <a:p>
-            <a:pPr>
-              <a:spcAft>
-                <a:spcPts val="900"/>
-              </a:spcAft>
-            </a:pPr>
-            <a:r>
-              <a:rPr sz="1300" b="0" i="0">
-                <a:solidFill>
-                  <a:srgbClr val="1A1A1A"/>
-                </a:solidFill>
-                <a:latin typeface="맑은 고딕"/>
-              </a:rPr>
-              <a:t>· 파랑 = Motor-CAD 가상일법 (기준)</a:t>
-            </a:r>
-          </a:p>
-          <a:p>
-            <a:pPr>
-              <a:spcAft>
-                <a:spcPts val="900"/>
-              </a:spcAft>
-            </a:pPr>
-            <a:r>
-              <a:rPr sz="1300" b="1" i="0">
-                <a:solidFill>
-                  <a:srgbClr val="0F7B6C"/>
-                </a:solidFill>
-                <a:latin typeface="맑은 고딕"/>
-              </a:rPr>
-              <a:t>· 초록 = FEM 장 + 우리 Arkkio 연산자. 기준과 겹쳐서 구분이 안 된다 — 평균 0.35%, 연산자 자체의 절대 검증</a:t>
-            </a:r>
-          </a:p>
-          <a:p>
-            <a:pPr>
-              <a:spcAft>
-                <a:spcPts val="900"/>
-              </a:spcAft>
-            </a:pPr>
-            <a:r>
-              <a:rPr sz="1300" b="0" i="0">
-                <a:solidFill>
-                  <a:srgbClr val="1A1A1A"/>
-                </a:solidFill>
-                <a:latin typeface="맑은 고딕"/>
-              </a:rPr>
-              <a:t>· 빨강 = 서로게이트 장 + 같은 연산자. 기준과의 간격이 순수한 모델 오차다</a:t>
-            </a:r>
-          </a:p>
-          <a:p>
-            <a:pPr>
-              <a:spcAft>
-                <a:spcPts val="900"/>
-              </a:spcAft>
-            </a:pPr>
-            <a:r>
-              <a:rPr sz="1300" b="1" i="0">
-                <a:solidFill>
-                  <a:srgbClr val="C44E52"/>
-                </a:solidFill>
-                <a:latin typeface="맑은 고딕"/>
-              </a:rPr>
-              <a:t>· 평균과 리플의 큰 흐름은 따라가지만 일부 구간에서 눈에 띄게 벗어난다 — 아래 오차 패널이 그 구간을 보여준다</a:t>
-            </a:r>
-          </a:p>
-          <a:p>
-            <a:pPr>
-              <a:spcAft>
-                <a:spcPts val="900"/>
-              </a:spcAft>
-            </a:pPr>
-            <a:r>
-              <a:rPr sz="1300" b="0" i="0">
+              <a:rPr sz="1200" b="0" i="0">
                 <a:solidFill>
                   <a:srgbClr val="5A5A5A"/>
                 </a:solidFill>
                 <a:latin typeface="맑은 고딕"/>
               </a:rPr>
-              <a:t>· test 집계 토크 nRMSE는 3.354% (§27)</a:t>
+              <a:t>슬라이드쇼 모드에서 자동 재생. 아래 토크 곡선의 매끈한 선은 45개 계산점을 수학적으로 복원한 실제 파형이고(§28), 점이 실제 계산 위치다. 리플 봉우리가 높낮이를 번갈아 12개 — 이 기계의 지배 리플은 12차(슬롯 고조파, 6차의 1.6~2.1배)다.</a:t>
             </a:r>
           </a:p>
         </p:txBody>
@@ -10780,7 +13048,7 @@
                 </a:solidFill>
                 <a:latin typeface="맑은 고딕"/>
               </a:rPr>
-              <a:t>진단</a:t>
+              <a:t>상황</a:t>
             </a:r>
           </a:p>
         </p:txBody>
@@ -10814,7 +13082,7 @@
                 </a:solidFill>
                 <a:latin typeface="맑은 고딕"/>
               </a:rPr>
-              <a:t>모델 축은 소진됐다 — 단일축 통제 실험</a:t>
+              <a:t>토크 파형 — 계산기 검증과 AI 성능을 한 장에서</a:t>
             </a:r>
           </a:p>
         </p:txBody>
@@ -10849,7 +13117,7 @@
                 </a:solidFill>
                 <a:latin typeface="Consolas"/>
               </a:rPr>
-              <a:t>§13 §15-21b</a:t>
+              <a:t>§8c §22</a:t>
             </a:r>
           </a:p>
         </p:txBody>
@@ -10900,7 +13168,7 @@
       </p:sp>
       <p:pic>
         <p:nvPicPr>
-          <p:cNvPr id="6" name="Picture 5" descr="seminar_fig1_elimination.png"/>
+          <p:cNvPr id="6" name="Picture 5" descr="seminar_torque_waveform.png"/>
           <p:cNvPicPr>
             <a:picLocks noChangeAspect="1"/>
           </p:cNvPicPr>
@@ -10914,8 +13182,8 @@
         </p:blipFill>
         <p:spPr>
           <a:xfrm>
-            <a:off x="2475679" y="1481328"/>
-            <a:ext cx="7246738" cy="4709160"/>
+            <a:off x="1207008" y="1481328"/>
+            <a:ext cx="6857999" cy="4526280"/>
           </a:xfrm>
           <a:prstGeom prst="rect">
             <a:avLst/>
@@ -10924,14 +13192,14 @@
       </p:pic>
       <p:sp>
         <p:nvSpPr>
-          <p:cNvPr id="7" name="caption"/>
+          <p:cNvPr id="7" name="TextBox 6"/>
           <p:cNvSpPr txBox="1"/>
           <p:nvPr/>
         </p:nvSpPr>
         <p:spPr>
           <a:xfrm>
-            <a:off x="566928" y="6327648"/>
-            <a:ext cx="11064240" cy="402336"/>
+            <a:off x="8869680" y="1737360"/>
+            <a:ext cx="2926080" cy="4206240"/>
           </a:xfrm>
           <a:prstGeom prst="rect">
             <a:avLst/>
@@ -10945,13 +13213,93 @@
           <a:lstStyle/>
           <a:p>
             <a:r>
-              <a:rPr sz="1200" b="0" i="0">
+              <a:rPr sz="1600" b="1" i="0">
+                <a:solidFill>
+                  <a:srgbClr val="0F7B6C"/>
+                </a:solidFill>
+                <a:latin typeface="맑은 고딕"/>
+              </a:rPr>
+              <a:t>세 곡선이 말하는 것</a:t>
+            </a:r>
+          </a:p>
+          <a:p>
+            <a:pPr>
+              <a:spcAft>
+                <a:spcPts val="900"/>
+              </a:spcAft>
+            </a:pPr>
+            <a:r>
+              <a:rPr sz="1300" b="0" i="0">
+                <a:solidFill>
+                  <a:srgbClr val="1A1A1A"/>
+                </a:solidFill>
+                <a:latin typeface="맑은 고딕"/>
+              </a:rPr>
+              <a:t>· 파랑 = Motor-CAD가 직접 계산한 토크 (기준)</a:t>
+            </a:r>
+          </a:p>
+          <a:p>
+            <a:pPr>
+              <a:spcAft>
+                <a:spcPts val="900"/>
+              </a:spcAft>
+            </a:pPr>
+            <a:r>
+              <a:rPr sz="1300" b="1" i="0">
+                <a:solidFill>
+                  <a:srgbClr val="0F7B6C"/>
+                </a:solidFill>
+                <a:latin typeface="맑은 고딕"/>
+              </a:rPr>
+              <a:t>· 초록 = FEM이 푼 장에 우리 토크 계산기(Arkkio 적분)를 적용. 기준과 겹쳐서 구분이 안 된다 — 평균 차이 0.35%, 토크 계산기 자체가 맞다는 검증</a:t>
+            </a:r>
+          </a:p>
+          <a:p>
+            <a:pPr>
+              <a:spcAft>
+                <a:spcPts val="900"/>
+              </a:spcAft>
+            </a:pPr>
+            <a:r>
+              <a:rPr sz="1300" b="0" i="0">
+                <a:solidFill>
+                  <a:srgbClr val="1A1A1A"/>
+                </a:solidFill>
+                <a:latin typeface="맑은 고딕"/>
+              </a:rPr>
+              <a:t>· 빨강 = AI가 예측한 장에 같은 계산기를 적용. 기준과의 간격이 곧 AI의 오차다</a:t>
+            </a:r>
+          </a:p>
+          <a:p>
+            <a:pPr>
+              <a:spcAft>
+                <a:spcPts val="900"/>
+              </a:spcAft>
+            </a:pPr>
+            <a:r>
+              <a:rPr sz="1300" b="1" i="0">
+                <a:solidFill>
+                  <a:srgbClr val="C44E52"/>
+                </a:solidFill>
+                <a:latin typeface="맑은 고딕"/>
+              </a:rPr>
+              <a:t>· 평균과 리플의 큰 흐름은 따라가지만 일부 구간에서 눈에 띄게 벗어난다 — 아래 오차 패널이 그 구간을 보여준다</a:t>
+            </a:r>
+          </a:p>
+          <a:p>
+            <a:pPr>
+              <a:spcAft>
+                <a:spcPts val="900"/>
+              </a:spcAft>
+            </a:pPr>
+            <a:r>
+              <a:rPr sz="1300" b="0" i="0">
                 <a:solidFill>
                   <a:srgbClr val="5A5A5A"/>
                 </a:solidFill>
                 <a:latin typeface="맑은 고딕"/>
               </a:rPr>
-              <a:t>각 막대는 바로 앞 구성에서 이름 붙은 축 하나만 바꾼 것 — 동일 홀드아웃·동일 샘플·동일 채점. 청록색(데이터)만 바닥을 깼다.</a:t>
+              <a:t>· 시험 형상 전체로 집계한 토크 오차율은 3.354% (§27)</a:t>
             </a:r>
           </a:p>
         </p:txBody>
@@ -11037,7 +13385,7 @@
                 </a:solidFill>
                 <a:latin typeface="맑은 고딕"/>
               </a:rPr>
-              <a:t>데이터는 통했다 — 그러나 기울기가 게이트에 못 닿는다</a:t>
+              <a:t>AI 모델 쪽 개선책은 다 써봤다 — 하나씩 바꾼 실험</a:t>
             </a:r>
           </a:p>
         </p:txBody>
@@ -11072,7 +13420,7 @@
                 </a:solidFill>
                 <a:latin typeface="Consolas"/>
               </a:rPr>
-              <a:t>§20 §21b §21c</a:t>
+              <a:t>§13 §15-21b</a:t>
             </a:r>
           </a:p>
         </p:txBody>
@@ -11123,7 +13471,7 @@
       </p:sp>
       <p:pic>
         <p:nvPicPr>
-          <p:cNvPr id="6" name="Picture 5" descr="seminar_fig2_scaling.png"/>
+          <p:cNvPr id="6" name="Picture 5" descr="seminar_fig1_elimination.png"/>
           <p:cNvPicPr>
             <a:picLocks noChangeAspect="1"/>
           </p:cNvPicPr>
@@ -11137,8 +13485,8 @@
         </p:blipFill>
         <p:spPr>
           <a:xfrm>
-            <a:off x="583224" y="1463040"/>
-            <a:ext cx="7739808" cy="4709160"/>
+            <a:off x="2475679" y="1481328"/>
+            <a:ext cx="7246738" cy="4709160"/>
           </a:xfrm>
           <a:prstGeom prst="rect">
             <a:avLst/>
@@ -11147,14 +13495,14 @@
       </p:pic>
       <p:sp>
         <p:nvSpPr>
-          <p:cNvPr id="7" name="TextBox 6"/>
+          <p:cNvPr id="7" name="caption"/>
           <p:cNvSpPr txBox="1"/>
           <p:nvPr/>
         </p:nvSpPr>
         <p:spPr>
           <a:xfrm>
-            <a:off x="8549640" y="1691640"/>
-            <a:ext cx="3200400" cy="4480560"/>
+            <a:off x="566928" y="6327648"/>
+            <a:ext cx="11064240" cy="402336"/>
           </a:xfrm>
           <a:prstGeom prst="rect">
             <a:avLst/>
@@ -11168,93 +13516,13 @@
           <a:lstStyle/>
           <a:p>
             <a:r>
-              <a:rPr sz="1600" b="1" i="0">
-                <a:solidFill>
-                  <a:srgbClr val="0F7B6C"/>
-                </a:solidFill>
-                <a:latin typeface="맑은 고딕"/>
-              </a:rPr>
-              <a:t>읽는 법</a:t>
-            </a:r>
-          </a:p>
-          <a:p>
-            <a:pPr>
-              <a:spcAft>
-                <a:spcPts val="1000"/>
-              </a:spcAft>
-            </a:pPr>
-            <a:r>
-              <a:rPr sz="1350" b="1" i="0">
-                <a:solidFill>
-                  <a:srgbClr val="0F7B6C"/>
-                </a:solidFill>
-                <a:latin typeface="맑은 고딕"/>
-              </a:rPr>
-              <a:t>· 학습 형상 40 → 120 → 240에서 |B| 12.75 → 11.96 → 11.64%</a:t>
-            </a:r>
-          </a:p>
-          <a:p>
-            <a:pPr>
-              <a:spcAft>
-                <a:spcPts val="1000"/>
-              </a:spcAft>
-            </a:pPr>
-            <a:r>
-              <a:rPr sz="1350" b="0" i="0">
-                <a:solidFill>
-                  <a:srgbClr val="1A1A1A"/>
-                </a:solidFill>
-                <a:latin typeface="맑은 고딕"/>
-              </a:rPr>
-              <a:t>· 6개 test 형상 전부, 매 단계 개선 — 한 케이스가 끄는 게 아니다</a:t>
-            </a:r>
-          </a:p>
-          <a:p>
-            <a:pPr>
-              <a:spcAft>
-                <a:spcPts val="1000"/>
-              </a:spcAft>
-            </a:pPr>
-            <a:r>
-              <a:rPr sz="1350" b="0" i="0">
+              <a:rPr sz="1200" b="0" i="0">
                 <a:solidFill>
                   <a:srgbClr val="5A5A5A"/>
                 </a:solidFill>
                 <a:latin typeface="맑은 고딕"/>
               </a:rPr>
-              <a:t>· 속 빈 점: 같은 데이터를 절반 에폭으로 학습한 결과. '포화'로 오독했던 지점 → 에폭을 데이터에 맞춰 늘리자 회복됐다</a:t>
-            </a:r>
-          </a:p>
-          <a:p>
-            <a:pPr>
-              <a:spcAft>
-                <a:spcPts val="1000"/>
-              </a:spcAft>
-            </a:pPr>
-            <a:r>
-              <a:rPr sz="1350" b="1" i="0">
-                <a:solidFill>
-                  <a:srgbClr val="C44E52"/>
-                </a:solidFill>
-                <a:latin typeface="맑은 고딕"/>
-              </a:rPr>
-              <a:t>· 측정 기울기 −0.30pp/배가. 공극 기준으로도 5%까지 약 7배가 ≈ 3.4만 형상 ≈ 솔브 62일</a:t>
-            </a:r>
-          </a:p>
-          <a:p>
-            <a:pPr>
-              <a:spcAft>
-                <a:spcPts val="1000"/>
-              </a:spcAft>
-            </a:pPr>
-            <a:r>
-              <a:rPr sz="1350" b="1" i="0">
-                <a:solidFill>
-                  <a:srgbClr val="C44E52"/>
-                </a:solidFill>
-                <a:latin typeface="맑은 고딕"/>
-              </a:rPr>
-              <a:t>· → 데이터 축은 살아 있으나 현실적 비용 안에서는 게이트에 못 닿는다</a:t>
+              <a:t>각 막대는 직전 구성에서 딱 한 가지만 바꾼 결과 — 시험 문제도 채점 방식도 동일. 데이터 늘리기(청록)만 오차를 낮췄다.</a:t>
             </a:r>
           </a:p>
         </p:txBody>
@@ -11306,7 +13574,7 @@
                 </a:solidFill>
                 <a:latin typeface="맑은 고딕"/>
               </a:rPr>
-              <a:t>근거</a:t>
+              <a:t>진단</a:t>
             </a:r>
           </a:p>
         </p:txBody>
@@ -11340,7 +13608,7 @@
                 </a:solidFill>
                 <a:latin typeface="맑은 고딕"/>
               </a:rPr>
-              <a:t>이 숫자를 믿을 수 있는 이유</a:t>
+              <a:t>데이터 늘리기는 통한다 — 그러나 너무 느리다</a:t>
             </a:r>
           </a:p>
         </p:txBody>
@@ -11375,7 +13643,7 @@
                 </a:solidFill>
                 <a:latin typeface="Consolas"/>
               </a:rPr>
-              <a:t>§7-9 §22</a:t>
+              <a:t>§20 §21b §21c</a:t>
             </a:r>
           </a:p>
         </p:txBody>
@@ -11424,581 +13692,40 @@
           </a:p>
         </p:txBody>
       </p:sp>
-      <p:sp>
-        <p:nvSpPr>
-          <p:cNvPr id="6" name="Rectangle 5"/>
-          <p:cNvSpPr/>
+      <p:pic>
+        <p:nvPicPr>
+          <p:cNvPr id="6" name="Picture 5" descr="seminar_fig2_scaling.png"/>
+          <p:cNvPicPr>
+            <a:picLocks noChangeAspect="1"/>
+          </p:cNvPicPr>
           <p:nvPr/>
-        </p:nvSpPr>
+        </p:nvPicPr>
+        <p:blipFill>
+          <a:blip r:embed="rId2"/>
+          <a:stretch>
+            <a:fillRect/>
+          </a:stretch>
+        </p:blipFill>
         <p:spPr>
           <a:xfrm>
-            <a:off x="566928" y="1645920"/>
-            <a:ext cx="3566160" cy="4069080"/>
+            <a:off x="583224" y="1463040"/>
+            <a:ext cx="7739808" cy="4709160"/>
           </a:xfrm>
           <a:prstGeom prst="rect">
             <a:avLst/>
           </a:prstGeom>
-          <a:solidFill>
-            <a:srgbClr val="FAFAFA"/>
-          </a:solidFill>
-          <a:ln>
-            <a:solidFill>
-              <a:srgbClr val="CCD5D3"/>
-            </a:solidFill>
-          </a:ln>
-          <a:effectLst/>
         </p:spPr>
-        <p:style>
-          <a:lnRef idx="1">
-            <a:schemeClr val="accent1"/>
-          </a:lnRef>
-          <a:fillRef idx="3">
-            <a:schemeClr val="accent1"/>
-          </a:fillRef>
-          <a:effectRef idx="2">
-            <a:schemeClr val="accent1"/>
-          </a:effectRef>
-          <a:fontRef idx="minor">
-            <a:schemeClr val="lt1"/>
-          </a:fontRef>
-        </p:style>
-        <p:txBody>
-          <a:bodyPr rtlCol="0" anchor="ctr" wrap="square" lIns="201168" tIns="164592"/>
-          <a:lstStyle/>
-          <a:p>
-            <a:pPr algn="ctr"/>
-            <a:r>
-              <a:rPr sz="1550" b="1" i="0">
-                <a:solidFill>
-                  <a:srgbClr val="0F7B6C"/>
-                </a:solidFill>
-                <a:latin typeface="맑은 고딕"/>
-              </a:rPr>
-              <a:t>누수를 세 종류로 잡아냈다</a:t>
-            </a:r>
-          </a:p>
-          <a:p>
-            <a:pPr>
-              <a:spcAft>
-                <a:spcPts val="300"/>
-              </a:spcAft>
-            </a:pPr>
-            <a:r>
-              <a:rPr sz="1250" b="0" i="0">
-                <a:solidFill>
-                  <a:srgbClr val="1A1A1A"/>
-                </a:solidFill>
-                <a:latin typeface="맑은 고딕"/>
-              </a:rPr>
-              <a:t>타깃 / 지름길 / split 누수</a:t>
-            </a:r>
-          </a:p>
-          <a:p>
-            <a:pPr>
-              <a:spcAft>
-                <a:spcPts val="300"/>
-              </a:spcAft>
-            </a:pPr>
-            <a:r>
-              <a:rPr sz="1250" b="0" i="0">
-                <a:solidFill>
-                  <a:srgbClr val="1A1A1A"/>
-                </a:solidFill>
-                <a:latin typeface="맑은 고딕"/>
-              </a:rPr>
-              <a:t>time_s는 회전자각과 상관계수 1.0000 —</a:t>
-            </a:r>
-          </a:p>
-          <a:p>
-            <a:pPr>
-              <a:spcAft>
-                <a:spcPts val="300"/>
-              </a:spcAft>
-            </a:pPr>
-            <a:r>
-              <a:rPr sz="1250" b="0" i="0">
-                <a:solidFill>
-                  <a:srgbClr val="1A1A1A"/>
-                </a:solidFill>
-                <a:latin typeface="맑은 고딕"/>
-              </a:rPr>
-              <a:t>정보량 0인 중복 특징인데 모델이</a:t>
-            </a:r>
-          </a:p>
-          <a:p>
-            <a:pPr>
-              <a:spcAft>
-                <a:spcPts val="300"/>
-              </a:spcAft>
-            </a:pPr>
-            <a:r>
-              <a:rPr sz="1250" b="0" i="0">
-                <a:solidFill>
-                  <a:srgbClr val="1A1A1A"/>
-                </a:solidFill>
-                <a:latin typeface="맑은 고딕"/>
-              </a:rPr>
-              <a:t>주 단서로 학습했다.</a:t>
-            </a:r>
-          </a:p>
-          <a:p>
-            <a:pPr>
-              <a:spcAft>
-                <a:spcPts val="300"/>
-              </a:spcAft>
-            </a:pPr>
-            <a:r>
-              <a:rPr sz="1250" b="0" i="0">
-                <a:solidFill>
-                  <a:srgbClr val="1A1A1A"/>
-                </a:solidFill>
-                <a:latin typeface="맑은 고딕"/>
-              </a:rPr>
-              <a:t>이 값 하나만 바꾸니 토크가</a:t>
-            </a:r>
-          </a:p>
-          <a:p>
-            <a:pPr>
-              <a:spcAft>
-                <a:spcPts val="300"/>
-              </a:spcAft>
-            </a:pPr>
-            <a:r>
-              <a:rPr sz="1250" b="0" i="0">
-                <a:solidFill>
-                  <a:srgbClr val="1A1A1A"/>
-                </a:solidFill>
-                <a:latin typeface="맑은 고딕"/>
-              </a:rPr>
-              <a:t>−264 → +48로 부호까지 뒤집혔다.</a:t>
-            </a:r>
-          </a:p>
-          <a:p>
-            <a:pPr>
-              <a:spcAft>
-                <a:spcPts val="300"/>
-              </a:spcAft>
-            </a:pPr>
-            <a:r>
-              <a:rPr sz="1250" b="0" i="0">
-                <a:solidFill>
-                  <a:srgbClr val="1A1A1A"/>
-                </a:solidFill>
-                <a:latin typeface="맑은 고딕"/>
-              </a:rPr>
-              <a:t>제거 + case-level 홀드아웃 후</a:t>
-            </a:r>
-          </a:p>
-          <a:p>
-            <a:pPr>
-              <a:spcAft>
-                <a:spcPts val="300"/>
-              </a:spcAft>
-            </a:pPr>
-            <a:r>
-              <a:rPr sz="1250" b="0" i="0">
-                <a:solidFill>
-                  <a:srgbClr val="1A1A1A"/>
-                </a:solidFill>
-                <a:latin typeface="맑은 고딕"/>
-              </a:rPr>
-              <a:t>전 모델의 순위가 바뀌었다.</a:t>
-            </a:r>
-          </a:p>
-        </p:txBody>
-      </p:sp>
-      <p:sp>
-        <p:nvSpPr>
-          <p:cNvPr id="7" name="Rectangle 6"/>
-          <p:cNvSpPr/>
+      </p:pic>
+      <p:sp>
+        <p:nvSpPr>
+          <p:cNvPr id="7" name="TextBox 6"/>
+          <p:cNvSpPr txBox="1"/>
           <p:nvPr/>
         </p:nvSpPr>
         <p:spPr>
           <a:xfrm>
-            <a:off x="4361688" y="1645920"/>
-            <a:ext cx="3566160" cy="4069080"/>
-          </a:xfrm>
-          <a:prstGeom prst="rect">
-            <a:avLst/>
-          </a:prstGeom>
-          <a:solidFill>
-            <a:srgbClr val="FAFAFA"/>
-          </a:solidFill>
-          <a:ln>
-            <a:solidFill>
-              <a:srgbClr val="CCD5D3"/>
-            </a:solidFill>
-          </a:ln>
-          <a:effectLst/>
-        </p:spPr>
-        <p:style>
-          <a:lnRef idx="1">
-            <a:schemeClr val="accent1"/>
-          </a:lnRef>
-          <a:fillRef idx="3">
-            <a:schemeClr val="accent1"/>
-          </a:fillRef>
-          <a:effectRef idx="2">
-            <a:schemeClr val="accent1"/>
-          </a:effectRef>
-          <a:fontRef idx="minor">
-            <a:schemeClr val="lt1"/>
-          </a:fontRef>
-        </p:style>
-        <p:txBody>
-          <a:bodyPr rtlCol="0" anchor="ctr" wrap="square" lIns="201168" tIns="164592"/>
-          <a:lstStyle/>
-          <a:p>
-            <a:pPr algn="ctr"/>
-            <a:r>
-              <a:rPr sz="1550" b="1" i="0">
-                <a:solidFill>
-                  <a:srgbClr val="0F7B6C"/>
-                </a:solidFill>
-                <a:latin typeface="맑은 고딕"/>
-              </a:rPr>
-              <a:t>표현 바닥값을 먼저 쟀다</a:t>
-            </a:r>
-          </a:p>
-          <a:p>
-            <a:pPr>
-              <a:spcAft>
-                <a:spcPts val="300"/>
-              </a:spcAft>
-            </a:pPr>
-            <a:r>
-              <a:rPr sz="1250" b="0" i="0">
-                <a:solidFill>
-                  <a:srgbClr val="1A1A1A"/>
-                </a:solidFill>
-                <a:latin typeface="맑은 고딕"/>
-              </a:rPr>
-              <a:t>참값을 그 표현으로 왕복시킨 오차 =</a:t>
-            </a:r>
-          </a:p>
-          <a:p>
-            <a:pPr>
-              <a:spcAft>
-                <a:spcPts val="300"/>
-              </a:spcAft>
-            </a:pPr>
-            <a:r>
-              <a:rPr sz="1250" b="0" i="0">
-                <a:solidFill>
-                  <a:srgbClr val="1A1A1A"/>
-                </a:solidFill>
-                <a:latin typeface="맑은 고딕"/>
-              </a:rPr>
-              <a:t>학습으로 도달 불가능한 하한.</a:t>
-            </a:r>
-          </a:p>
-          <a:p>
-            <a:pPr>
-              <a:spcAft>
-                <a:spcPts val="300"/>
-              </a:spcAft>
-            </a:pPr>
-            <a:r>
-              <a:rPr sz="1250" b="0" i="0">
-                <a:solidFill>
-                  <a:srgbClr val="1A1A1A"/>
-                </a:solidFill>
-                <a:latin typeface="맑은 고딕"/>
-              </a:rPr>
-              <a:t/>
-            </a:r>
-          </a:p>
-          <a:p>
-            <a:pPr>
-              <a:spcAft>
-                <a:spcPts val="300"/>
-              </a:spcAft>
-            </a:pPr>
-            <a:r>
-              <a:rPr sz="1250" b="0" i="0">
-                <a:solidFill>
-                  <a:srgbClr val="1A1A1A"/>
-                </a:solidFill>
-                <a:latin typeface="맑은 고딕"/>
-              </a:rPr>
-              <a:t>절점 왕복   |B| 16.98%  토크 59.5%</a:t>
-            </a:r>
-          </a:p>
-          <a:p>
-            <a:pPr>
-              <a:spcAft>
-                <a:spcPts val="300"/>
-              </a:spcAft>
-            </a:pPr>
-            <a:r>
-              <a:rPr sz="1250" b="0" i="0">
-                <a:solidFill>
-                  <a:srgbClr val="1A1A1A"/>
-                </a:solidFill>
-                <a:latin typeface="맑은 고딕"/>
-              </a:rPr>
-              <a:t>이산 curl   |B| 5.31%  토크 1.58%</a:t>
-            </a:r>
-          </a:p>
-          <a:p>
-            <a:pPr>
-              <a:spcAft>
-                <a:spcPts val="300"/>
-              </a:spcAft>
-            </a:pPr>
-            <a:r>
-              <a:rPr sz="1250" b="0" i="0">
-                <a:solidFill>
-                  <a:srgbClr val="1A1A1A"/>
-                </a:solidFill>
-                <a:latin typeface="맑은 고딕"/>
-              </a:rPr>
-              <a:t/>
-            </a:r>
-          </a:p>
-          <a:p>
-            <a:pPr>
-              <a:spcAft>
-                <a:spcPts val="300"/>
-              </a:spcAft>
-            </a:pPr>
-            <a:r>
-              <a:rPr sz="1250" b="0" i="0">
-                <a:solidFill>
-                  <a:srgbClr val="1A1A1A"/>
-                </a:solidFill>
-                <a:latin typeface="맑은 고딕"/>
-              </a:rPr>
-              <a:t>표현만 바꿔도 토크 바닥이 37배 갈린다.</a:t>
-            </a:r>
-          </a:p>
-          <a:p>
-            <a:pPr>
-              <a:spcAft>
-                <a:spcPts val="300"/>
-              </a:spcAft>
-            </a:pPr>
-            <a:r>
-              <a:rPr sz="1250" b="0" i="0">
-                <a:solidFill>
-                  <a:srgbClr val="1A1A1A"/>
-                </a:solidFill>
-                <a:latin typeface="맑은 고딕"/>
-              </a:rPr>
-              <a:t>모델을 탓하기 전에 잴 것.</a:t>
-            </a:r>
-          </a:p>
-        </p:txBody>
-      </p:sp>
-      <p:sp>
-        <p:nvSpPr>
-          <p:cNvPr id="8" name="Rectangle 7"/>
-          <p:cNvSpPr/>
-          <p:nvPr/>
-        </p:nvSpPr>
-        <p:spPr>
-          <a:xfrm>
-            <a:off x="8156448" y="1645920"/>
-            <a:ext cx="3566160" cy="4069080"/>
-          </a:xfrm>
-          <a:prstGeom prst="rect">
-            <a:avLst/>
-          </a:prstGeom>
-          <a:solidFill>
-            <a:srgbClr val="FAFAFA"/>
-          </a:solidFill>
-          <a:ln>
-            <a:solidFill>
-              <a:srgbClr val="CCD5D3"/>
-            </a:solidFill>
-          </a:ln>
-          <a:effectLst/>
-        </p:spPr>
-        <p:style>
-          <a:lnRef idx="1">
-            <a:schemeClr val="accent1"/>
-          </a:lnRef>
-          <a:fillRef idx="3">
-            <a:schemeClr val="accent1"/>
-          </a:fillRef>
-          <a:effectRef idx="2">
-            <a:schemeClr val="accent1"/>
-          </a:effectRef>
-          <a:fontRef idx="minor">
-            <a:schemeClr val="lt1"/>
-          </a:fontRef>
-        </p:style>
-        <p:txBody>
-          <a:bodyPr rtlCol="0" anchor="ctr" wrap="square" lIns="201168" tIns="164592"/>
-          <a:lstStyle/>
-          <a:p>
-            <a:pPr algn="ctr"/>
-            <a:r>
-              <a:rPr sz="1550" b="1" i="0">
-                <a:solidFill>
-                  <a:srgbClr val="0F7B6C"/>
-                </a:solidFill>
-                <a:latin typeface="맑은 고딕"/>
-              </a:rPr>
-              <a:t>토크 연산자를 절대 검증했다</a:t>
-            </a:r>
-          </a:p>
-          <a:p>
-            <a:pPr>
-              <a:spcAft>
-                <a:spcPts val="300"/>
-              </a:spcAft>
-            </a:pPr>
-            <a:r>
-              <a:rPr sz="1250" b="0" i="0">
-                <a:solidFill>
-                  <a:srgbClr val="1A1A1A"/>
-                </a:solidFill>
-                <a:latin typeface="맑은 고딕"/>
-              </a:rPr>
-              <a:t>Arkkio 적분 vs Motor-CAD 가상일법,</a:t>
-            </a:r>
-          </a:p>
-          <a:p>
-            <a:pPr>
-              <a:spcAft>
-                <a:spcPts val="300"/>
-              </a:spcAft>
-            </a:pPr>
-            <a:r>
-              <a:rPr sz="1250" b="0" i="0">
-                <a:solidFill>
-                  <a:srgbClr val="1A1A1A"/>
-                </a:solidFill>
-                <a:latin typeface="맑은 고딕"/>
-              </a:rPr>
-              <a:t>전기각 한 주기 전체 대조:</a:t>
-            </a:r>
-          </a:p>
-          <a:p>
-            <a:pPr>
-              <a:spcAft>
-                <a:spcPts val="300"/>
-              </a:spcAft>
-            </a:pPr>
-            <a:r>
-              <a:rPr sz="1250" b="0" i="0">
-                <a:solidFill>
-                  <a:srgbClr val="1A1A1A"/>
-                </a:solidFill>
-                <a:latin typeface="맑은 고딕"/>
-              </a:rPr>
-              <a:t/>
-            </a:r>
-          </a:p>
-          <a:p>
-            <a:pPr>
-              <a:spcAft>
-                <a:spcPts val="300"/>
-              </a:spcAft>
-            </a:pPr>
-            <a:r>
-              <a:rPr sz="1250" b="0" i="0">
-                <a:solidFill>
-                  <a:srgbClr val="1A1A1A"/>
-                </a:solidFill>
-                <a:latin typeface="맑은 고딕"/>
-              </a:rPr>
-              <a:t>평균 토크 오차      0.35%</a:t>
-            </a:r>
-          </a:p>
-          <a:p>
-            <a:pPr>
-              <a:spcAft>
-                <a:spcPts val="300"/>
-              </a:spcAft>
-            </a:pPr>
-            <a:r>
-              <a:rPr sz="1250" b="0" i="0">
-                <a:solidFill>
-                  <a:srgbClr val="1A1A1A"/>
-                </a:solidFill>
-                <a:latin typeface="맑은 고딕"/>
-              </a:rPr>
-              <a:t>자세별 RMSE        0.54%</a:t>
-            </a:r>
-          </a:p>
-          <a:p>
-            <a:pPr>
-              <a:spcAft>
-                <a:spcPts val="300"/>
-              </a:spcAft>
-            </a:pPr>
-            <a:r>
-              <a:rPr sz="1250" b="0" i="0">
-                <a:solidFill>
-                  <a:srgbClr val="1A1A1A"/>
-                </a:solidFill>
-                <a:latin typeface="맑은 고딕"/>
-              </a:rPr>
-              <a:t>파형 상관계수      0.996</a:t>
-            </a:r>
-          </a:p>
-          <a:p>
-            <a:pPr>
-              <a:spcAft>
-                <a:spcPts val="300"/>
-              </a:spcAft>
-            </a:pPr>
-            <a:r>
-              <a:rPr sz="1250" b="0" i="0">
-                <a:solidFill>
-                  <a:srgbClr val="1A1A1A"/>
-                </a:solidFill>
-                <a:latin typeface="맑은 고딕"/>
-              </a:rPr>
-              <a:t/>
-            </a:r>
-          </a:p>
-          <a:p>
-            <a:pPr>
-              <a:spcAft>
-                <a:spcPts val="300"/>
-              </a:spcAft>
-            </a:pPr>
-            <a:r>
-              <a:rPr sz="1250" b="0" i="0">
-                <a:solidFill>
-                  <a:srgbClr val="1A1A1A"/>
-                </a:solidFill>
-                <a:latin typeface="맑은 고딕"/>
-              </a:rPr>
-              <a:t>재현성: sha256 체크포인트 registry,</a:t>
-            </a:r>
-          </a:p>
-          <a:p>
-            <a:pPr>
-              <a:spcAft>
-                <a:spcPts val="300"/>
-              </a:spcAft>
-            </a:pPr>
-            <a:r>
-              <a:rPr sz="1250" b="0" i="0">
-                <a:solidFill>
-                  <a:srgbClr val="1A1A1A"/>
-                </a:solidFill>
-                <a:latin typeface="맑은 고딕"/>
-              </a:rPr>
-              <a:t>3회 반복 스코어카드 바이트 동일.</a:t>
-            </a:r>
-          </a:p>
-        </p:txBody>
-      </p:sp>
-      <p:sp>
-        <p:nvSpPr>
-          <p:cNvPr id="9" name="caption"/>
-          <p:cNvSpPr txBox="1"/>
-          <p:nvPr/>
-        </p:nvSpPr>
-        <p:spPr>
-          <a:xfrm>
-            <a:off x="566928" y="5897880"/>
-            <a:ext cx="11064240" cy="402336"/>
+            <a:off x="8549640" y="1691640"/>
+            <a:ext cx="3200400" cy="4480560"/>
           </a:xfrm>
           <a:prstGeom prst="rect">
             <a:avLst/>
@@ -12012,13 +13739,93 @@
           <a:lstStyle/>
           <a:p>
             <a:r>
-              <a:rPr sz="1200" b="0" i="0">
+              <a:rPr sz="1600" b="1" i="0">
+                <a:solidFill>
+                  <a:srgbClr val="0F7B6C"/>
+                </a:solidFill>
+                <a:latin typeface="맑은 고딕"/>
+              </a:rPr>
+              <a:t>읽는 법</a:t>
+            </a:r>
+          </a:p>
+          <a:p>
+            <a:pPr>
+              <a:spcAft>
+                <a:spcPts val="1000"/>
+              </a:spcAft>
+            </a:pPr>
+            <a:r>
+              <a:rPr sz="1350" b="1" i="0">
+                <a:solidFill>
+                  <a:srgbClr val="0F7B6C"/>
+                </a:solidFill>
+                <a:latin typeface="맑은 고딕"/>
+              </a:rPr>
+              <a:t>· 학습 형상 40 → 120 → 240에서 오차 12.75 → 11.96 → 11.64%</a:t>
+            </a:r>
+          </a:p>
+          <a:p>
+            <a:pPr>
+              <a:spcAft>
+                <a:spcPts val="1000"/>
+              </a:spcAft>
+            </a:pPr>
+            <a:r>
+              <a:rPr sz="1350" b="0" i="0">
+                <a:solidFill>
+                  <a:srgbClr val="1A1A1A"/>
+                </a:solidFill>
+                <a:latin typeface="맑은 고딕"/>
+              </a:rPr>
+              <a:t>· 시험 형상 6개 전부, 매 단계 개선 — 한 케이스가 평균을 끄는 게 아니다</a:t>
+            </a:r>
+          </a:p>
+          <a:p>
+            <a:pPr>
+              <a:spcAft>
+                <a:spcPts val="1000"/>
+              </a:spcAft>
+            </a:pPr>
+            <a:r>
+              <a:rPr sz="1350" b="0" i="0">
                 <a:solidFill>
                   <a:srgbClr val="5A5A5A"/>
                 </a:solidFill>
                 <a:latin typeface="맑은 고딕"/>
               </a:rPr>
-              <a:t>평가 체계를 먼저 세운 것이 이 캠페인의 차별점이다 — 이게 없었다면 위의 소거 결론 자체를 신뢰할 수 없다.</a:t>
+              <a:t>· 속 빈 점: 같은 데이터를 학습 횟수 절반으로 돌린 결과. '한계에 닿았다'고 잘못 읽을 뻔한 지점 → 학습을 충분히 시키니 회복됐다</a:t>
+            </a:r>
+          </a:p>
+          <a:p>
+            <a:pPr>
+              <a:spcAft>
+                <a:spcPts val="1000"/>
+              </a:spcAft>
+            </a:pPr>
+            <a:r>
+              <a:rPr sz="1350" b="1" i="0">
+                <a:solidFill>
+                  <a:srgbClr val="C44E52"/>
+                </a:solidFill>
+                <a:latin typeface="맑은 고딕"/>
+              </a:rPr>
+              <a:t>· 합격 기준 항목인 공극 오차는 데이터 두 배당 0.32%p씩 줄어든다(§25). 이 속도로 공극 5%까지 가려면 형상 약 3.4만 개 = Motor-CAD 62일 연속 계산</a:t>
+            </a:r>
+          </a:p>
+          <a:p>
+            <a:pPr>
+              <a:spcAft>
+                <a:spcPts val="1000"/>
+              </a:spcAft>
+            </a:pPr>
+            <a:r>
+              <a:rPr sz="1350" b="1" i="0">
+                <a:solidFill>
+                  <a:srgbClr val="C44E52"/>
+                </a:solidFill>
+                <a:latin typeface="맑은 고딕"/>
+              </a:rPr>
+              <a:t>· → 데이터 늘리기는 유효하지만, 현실적 비용 안에서는 합격선에 못 닿는다</a:t>
             </a:r>
           </a:p>
         </p:txBody>

--- a/results/viz/motorai_seminar_20260807.pptx
+++ b/results/viz/motorai_seminar_20260807.pptx
@@ -546,23 +546,39 @@
               <a:rPr sz="1100">
                 <a:latin typeface="맑은 고딕"/>
               </a:rPr>
-              <a:t>지금 공극 자속밀도 오차 7.14%, 토크 오차 3.35%입니다. 합격선은 5%와 3%입니다.</a:t>
-            </a:r>
-          </a:p>
-          <a:p>
-            <a:r>
-              <a:rPr sz="1100">
-                <a:latin typeface="맑은 고딕"/>
-              </a:rPr>
-              <a:t>공극은 아직 2.1%p 남았지만, 토크는 0.35%p까지 붙었습니다.</a:t>
-            </a:r>
-          </a:p>
-          <a:p>
-            <a:r>
-              <a:rPr sz="1100">
-                <a:latin typeface="맑은 고딕"/>
-              </a:rPr>
-              <a:t>불과 얼마 전까지 토크가 5.4%였으니 최근에 크게 움직인 겁니다.</a:t>
+              <a:t>지금 공극 자속밀도 오차 6.62%, 토크 오차 3.27%입니다. 합격선은 5%와 3%입니다.</a:t>
+            </a:r>
+          </a:p>
+          <a:p>
+            <a:r>
+              <a:rPr sz="1100">
+                <a:latin typeface="맑은 고딕"/>
+              </a:rPr>
+              <a:t>공극은 1.62%p, 토크는 0.27%p 남았습니다.</a:t>
+            </a:r>
+          </a:p>
+          <a:p>
+            <a:r>
+              <a:rPr sz="1100">
+                <a:latin typeface="맑은 고딕"/>
+              </a:rPr>
+              <a:t>얼마 전까지 토크 5.4%, 공극 7.3%였으니 최근에 크게 움직인 겁니다.</a:t>
+            </a:r>
+          </a:p>
+          <a:p>
+            <a:r>
+              <a:rPr sz="1100">
+                <a:latin typeface="맑은 고딕"/>
+              </a:rPr>
+              <a:t>그리고 전류를 바꿔도 통하는 모델이 처음으로 생겼습니다 — 학습에 없던</a:t>
+            </a:r>
+          </a:p>
+          <a:p>
+            <a:r>
+              <a:rPr sz="1100">
+                <a:latin typeface="맑은 고딕"/>
+              </a:rPr>
+              <a:t>형상과 전류 조합에서 공극 5.35%, 토크 2.61%입니다.</a:t>
             </a:r>
           </a:p>
           <a:p>
@@ -1817,15 +1833,23 @@
               <a:rPr sz="1100">
                 <a:latin typeface="맑은 고딕"/>
               </a:rPr>
-              <a:t>왼쪽, 지금 위치. 공극 오차 7.14%, 토크 오차 3.35%입니다. 합격선은 5%와 3%.</a:t>
-            </a:r>
-          </a:p>
-          <a:p>
-            <a:r>
-              <a:rPr sz="1100">
-                <a:latin typeface="맑은 고딕"/>
-              </a:rPr>
-              <a:t>"오차 7%"는 시험용 형상에서 AI 예측과 FEM 참값의 차이를 참값 크기로 나눈 값입니다.</a:t>
+              <a:t>왼쪽, 지금 위치. 공극 오차 6.62%, 토크 오차 3.27%입니다. 합격선은 5%와 3%.</a:t>
+            </a:r>
+          </a:p>
+          <a:p>
+            <a:r>
+              <a:rPr sz="1100">
+                <a:latin typeface="맑은 고딕"/>
+              </a:rPr>
+              <a:t>"오차 6%"는 시험용 형상에서 AI 예측과 FEM 참값의 차이를 참값 크기로 나눈 값입니다.</a:t>
+            </a:r>
+          </a:p>
+          <a:p>
+            <a:r>
+              <a:rPr sz="1100">
+                <a:latin typeface="맑은 고딕"/>
+              </a:rPr>
+              <a:t>미학습 형상×전류 조합에서도 공극 5.35%, 토크 2.61%로 통합니다.</a:t>
             </a:r>
           </a:p>
           <a:p>
@@ -1964,7 +1988,23 @@
               <a:rPr sz="1100">
                 <a:latin typeface="맑은 고딕"/>
               </a:rPr>
-              <a:t>지금은 형상에 전류축을 더한 320케이스 학습이 돌고 있습니다.</a:t>
+              <a:t>그 다음으로 형상에 전류축을 더한 320케이스를 학습시켰고, 그게 지금 성적입니다.</a:t>
+            </a:r>
+          </a:p>
+          <a:p>
+            <a:r>
+              <a:rPr sz="1100">
+                <a:latin typeface="맑은 고딕"/>
+              </a:rPr>
+              <a:t>공극이 7.14에서 6.62%로 내려왔고, 전류를 바꿔도 통하는 걸 확인했습니다.</a:t>
+            </a:r>
+          </a:p>
+          <a:p>
+            <a:r>
+              <a:rPr sz="1100">
+                <a:latin typeface="맑은 고딕"/>
+              </a:rPr>
+              <a:t>지금은 480케이스 확장 데이터를 생성하고 있습니다.</a:t>
             </a:r>
           </a:p>
           <a:p/>
@@ -2210,15 +2250,23 @@
               <a:rPr sz="1100">
                 <a:latin typeface="맑은 고딕"/>
               </a:rPr>
-              <a:t>지금 성적입니다. 연한 막대가 직전 최고 모델, 진한 막대가 현재 모델,</a:t>
-            </a:r>
-          </a:p>
-          <a:p>
-            <a:r>
-              <a:rPr sz="1100">
-                <a:latin typeface="맑은 고딕"/>
-              </a:rPr>
-              <a:t>빨간 선이 합격선, 제일 진한 부분이 이 방식으로 도달 가능한 최저 오차입니다.</a:t>
+              <a:t>지금 성적입니다. 그림에 세 세대가 있습니다. 제일 연한 막대가 champion(물리 힌트 전),</a:t>
+            </a:r>
+          </a:p>
+          <a:p>
+            <a:r>
+              <a:rPr sz="1100">
+                <a:latin typeface="맑은 고딕"/>
+              </a:rPr>
+              <a:t>중간이 물리 힌트를 넣은 모델, 제일 진한 막대가 현재 v2 — 형상×전류 320케이스로</a:t>
+            </a:r>
+          </a:p>
+          <a:p>
+            <a:r>
+              <a:rPr sz="1100">
+                <a:latin typeface="맑은 고딕"/>
+              </a:rPr>
+              <a:t>학습한 모델입니다. 빨간 선이 합격선, 진한 회색이 도달 가능한 최저 오차입니다.</a:t>
             </a:r>
           </a:p>
           <a:p/>
@@ -2227,31 +2275,23 @@
               <a:rPr sz="1100">
                 <a:latin typeface="맑은 고딕"/>
               </a:rPr>
-              <a:t>좋은 소식부터. 토크 오차가 5.40에서 3.35%로 내려왔습니다. 합격선 3%까지 0.35%p 남았습니다.</a:t>
-            </a:r>
-          </a:p>
-          <a:p>
-            <a:r>
-              <a:rPr sz="1100">
-                <a:latin typeface="맑은 고딕"/>
-              </a:rPr>
-              <a:t>합격 기준 두 항목 중 하나가 사정권에 들어온 건 이번이 처음입니다.</a:t>
-            </a:r>
-          </a:p>
-          <a:p>
-            <a:r>
-              <a:rPr sz="1100">
-                <a:latin typeface="맑은 고딕"/>
-              </a:rPr>
-              <a:t>특히 데이터를 두 배로 늘려도 토크는 0.08%p밖에 안 움직여서 그 길은 막혔다고 봤었는데,</a:t>
-            </a:r>
-          </a:p>
-          <a:p>
-            <a:r>
-              <a:rPr sz="1100">
-                <a:latin typeface="맑은 고딕"/>
-              </a:rPr>
-              <a:t>물리 힌트는 한 번에 2%p를 움직였습니다.</a:t>
+              <a:t>진행을 보면, 토크는 5.40 → 3.35 → 3.27%로 물리 힌트가 크게 움직였고,</a:t>
+            </a:r>
+          </a:p>
+          <a:p>
+            <a:r>
+              <a:rPr sz="1100">
+                <a:latin typeface="맑은 고딕"/>
+              </a:rPr>
+              <a:t>공극은 7.30 → 7.14 → 6.62%로 전류축 데이터가 움직였습니다.</a:t>
+            </a:r>
+          </a:p>
+          <a:p>
+            <a:r>
+              <a:rPr sz="1100">
+                <a:latin typeface="맑은 고딕"/>
+              </a:rPr>
+              <a:t>합격선까지 공극 1.62%p, 토크 0.27%p — 역대 가장 가깝습니다.</a:t>
             </a:r>
           </a:p>
           <a:p/>
@@ -2260,47 +2300,39 @@
               <a:rPr sz="1100">
                 <a:latin typeface="맑은 고딕"/>
               </a:rPr>
-              <a:t>그런데 정직하게 말씀드릴 게 있습니다. 결과를 보기 전에 정해둔 1차 판정 기준은</a:t>
-            </a:r>
-          </a:p>
-          <a:p>
-            <a:r>
-              <a:rPr sz="1100">
-                <a:latin typeface="맑은 고딕"/>
-              </a:rPr>
-              <a:t>토크가 아니라 공극이었습니다. 공극은 7.138%가 나왔고 기준이 7.05% 미만이었습니다.</a:t>
-            </a:r>
-          </a:p>
-          <a:p>
-            <a:r>
-              <a:rPr sz="1100">
-                <a:latin typeface="맑은 고딕"/>
-              </a:rPr>
-              <a:t>0.09%p 차이로 못 넘었습니다. 이 정도 차이는 같은 학습을 다시 돌릴 때마다 생기는</a:t>
-            </a:r>
-          </a:p>
-          <a:p>
-            <a:r>
-              <a:rPr sz="1100">
-                <a:latin typeface="맑은 고딕"/>
-              </a:rPr>
-              <a:t>우연 변동 폭 안이라 "넘었다"고 주장할 수 없습니다. 그래서 1차 기준은 미달입니다.</a:t>
-            </a:r>
-          </a:p>
-          <a:p>
-            <a:r>
-              <a:rPr sz="1100">
-                <a:latin typeface="맑은 고딕"/>
-              </a:rPr>
-              <a:t>기준을 미리 적어놨기 때문에, 결과를 보고 유리한 지표로 갈아타는 일 없이</a:t>
-            </a:r>
-          </a:p>
-          <a:p>
-            <a:r>
-              <a:rPr sz="1100">
-                <a:latin typeface="맑은 고딕"/>
-              </a:rPr>
-              <a:t>이렇게 그대로 보고할 수 있습니다. 그게 이 기준의 존재 이유입니다.</a:t>
+              <a:t>정직하게 말씀드릴 것 두 가지. 물리 힌트 실험의 사전 1차 기준(공극 7.05% 미만)은</a:t>
+            </a:r>
+          </a:p>
+          <a:p>
+            <a:r>
+              <a:rPr sz="1100">
+                <a:latin typeface="맑은 고딕"/>
+              </a:rPr>
+              <a:t>7.138%로 0.09%p 차 미달이었습니다 — 우연 변동 폭 안이라 "넘었다"고 주장하지 않습니다.</a:t>
+            </a:r>
+          </a:p>
+          <a:p>
+            <a:r>
+              <a:rPr sz="1100">
+                <a:latin typeface="맑은 고딕"/>
+              </a:rPr>
+              <a:t>그리고 v2의 공극 개선 0.52%p는 전류 케이스 40개(형상 20개×2레벨)를 추가한 학습의</a:t>
+            </a:r>
+          </a:p>
+          <a:p>
+            <a:r>
+              <a:rPr sz="1100">
+                <a:latin typeface="맑은 고딕"/>
+              </a:rPr>
+              <a:t>결과인데, 물리 힌트 없는 대조군이 없어 어느 요소 덕인지 따로 떼어 말할 수는 없습니다.</a:t>
+            </a:r>
+          </a:p>
+          <a:p>
+            <a:r>
+              <a:rPr sz="1100">
+                <a:latin typeface="맑은 고딕"/>
+              </a:rPr>
+              <a:t>기준을 미리 적어놨기 때문에 이런 보고가 가능합니다.</a:t>
             </a:r>
           </a:p>
           <a:p/>
@@ -2309,31 +2341,23 @@
               <a:rPr sz="1100">
                 <a:latin typeface="맑은 고딕"/>
               </a:rPr>
-              <a:t>세 번째 줄이 다음 작업의 근거입니다. 이 계산 방식의 한계선 — FEM 참값을 우리 방식으로</a:t>
-            </a:r>
-          </a:p>
-          <a:p>
-            <a:r>
-              <a:rPr sz="1100">
-                <a:latin typeface="맑은 고딕"/>
-              </a:rPr>
-              <a:t>옮겨 적기만 해도 남는 오차 — 이 공극 2.68%입니다.</a:t>
-            </a:r>
-          </a:p>
-          <a:p>
-            <a:r>
-              <a:rPr sz="1100">
-                <a:latin typeface="맑은 고딕"/>
-              </a:rPr>
-              <a:t>지금 7.14%라는 건 방식의 한계에 막힌 게 아니라 학습이 아직 못 따라간 겁니다.</a:t>
-            </a:r>
-          </a:p>
-          <a:p>
-            <a:r>
-              <a:rPr sz="1100">
-                <a:latin typeface="맑은 고딕"/>
-              </a:rPr>
-              <a:t>4.5%p 여유가 실제로 있으니 여기가 공략 지점입니다.</a:t>
+              <a:t>세 번째 줄이 다음 작업의 근거입니다. 이 계산 방식의 한계선이 공극 2.68%인데</a:t>
+            </a:r>
+          </a:p>
+          <a:p>
+            <a:r>
+              <a:rPr sz="1100">
+                <a:latin typeface="맑은 고딕"/>
+              </a:rPr>
+              <a:t>지금 6.62%니까, 방식의 한계가 아니라 학습이 아직 못 따라간 겁니다.</a:t>
+            </a:r>
+          </a:p>
+          <a:p>
+            <a:r>
+              <a:rPr sz="1100">
+                <a:latin typeface="맑은 고딕"/>
+              </a:rPr>
+              <a:t>3.9%p 여유가 실제로 있으니 여기가 공략 지점입니다.</a:t>
             </a:r>
           </a:p>
         </p:txBody>
@@ -6391,7 +6415,7 @@
                 </a:solidFill>
                 <a:latin typeface="맑은 고딕"/>
               </a:rPr>
-              <a:t>현재 성적:  공극 자속밀도 오차 7.14%  ·  토크 오차 3.35%   (학습에 쓰지 않은 시험용 형상 6개 기준)</a:t>
+              <a:t>현재 성적:  공극 자속밀도 오차 6.62%  ·  토크 오차 3.27%   (학습에 쓰지 않은 시험용 형상 6개 기준)</a:t>
             </a:r>
           </a:p>
           <a:p>
@@ -6407,7 +6431,23 @@
                 </a:solidFill>
                 <a:latin typeface="맑은 고딕"/>
               </a:rPr>
-              <a:t>합격 기준(공극 5% · 토크 3%)까지 — 공극 2.14%p, 토크 0.35%p 남았다   ·   낯선 용어는 맨 뒤 용어집 참조</a:t>
+              <a:t>전류를 바꿔도 통한다:  미학습 형상×전류 12케이스에서 공극 5.35% · 토크 2.61% (§29)</a:t>
+            </a:r>
+          </a:p>
+          <a:p>
+            <a:pPr>
+              <a:spcAft>
+                <a:spcPts val="900"/>
+              </a:spcAft>
+            </a:pPr>
+            <a:r>
+              <a:rPr sz="1600" b="0" i="0">
+                <a:solidFill>
+                  <a:srgbClr val="5A5A5A"/>
+                </a:solidFill>
+                <a:latin typeface="맑은 고딕"/>
+              </a:rPr>
+              <a:t>합격 기준(공극 5% · 토크 3%)까지 — 공극 1.62%p, 토크 0.27%p 남았다   ·   낯선 용어는 맨 뒤 용어집 참조</a:t>
             </a:r>
           </a:p>
         </p:txBody>
@@ -8113,7 +8153,7 @@
           </a:solidFill>
           <a:ln>
             <a:solidFill>
-              <a:srgbClr val="C44E52"/>
+              <a:srgbClr val="0F7B6C"/>
             </a:solidFill>
           </a:ln>
           <a:effectLst/>
@@ -8140,11 +8180,11 @@
             <a:r>
               <a:rPr sz="1600" b="1" i="0">
                 <a:solidFill>
-                  <a:srgbClr val="C44E52"/>
-                </a:solidFill>
-                <a:latin typeface="맑은 고딕"/>
-              </a:rPr>
-              <a:t>② 전류축 복구 후 확장 — 진행 중</a:t>
+                  <a:srgbClr val="0F7B6C"/>
+                </a:solidFill>
+                <a:latin typeface="맑은 고딕"/>
+              </a:rPr>
+              <a:t>② 전류축 복구 후 확장 — 1단계 완료</a:t>
             </a:r>
           </a:p>
           <a:p>
@@ -8160,7 +8200,7 @@
                 </a:solidFill>
                 <a:latin typeface="맑은 고딕"/>
               </a:rPr>
-              <a:t>여자 설정 문제를 고치고(전류 입력 모드</a:t>
+              <a:t>여자 설정을 고치고(전류 입력 모드 수정 +</a:t>
             </a:r>
           </a:p>
           <a:p>
@@ -8176,7 +8216,7 @@
                 </a:solidFill>
                 <a:latin typeface="맑은 고딕"/>
               </a:rPr>
-              <a:t>수정 + 암페어턴 자동 검사) 형상×전류</a:t>
+              <a:t>암페어턴 자동 검사) 형상×전류 320케이스</a:t>
             </a:r>
           </a:p>
           <a:p>
@@ -8192,7 +8232,7 @@
                 </a:solidFill>
                 <a:latin typeface="맑은 고딕"/>
               </a:rPr>
-              <a:t>320케이스로 재학습 중. 전류가 실제로</a:t>
+              <a:t>학습 완료. 미학습 형상×전류 12케이스에서</a:t>
             </a:r>
           </a:p>
           <a:p>
@@ -8208,7 +8248,7 @@
                 </a:solidFill>
                 <a:latin typeface="맑은 고딕"/>
               </a:rPr>
-              <a:t>해석에 반영되는 첫 데이터셋이다.</a:t>
+              <a:t>공극 5.35% · 토크 2.61% —</a:t>
             </a:r>
           </a:p>
           <a:p>
@@ -8224,7 +8264,7 @@
                 </a:solidFill>
                 <a:latin typeface="맑은 고딕"/>
               </a:rPr>
-              <a:t/>
+              <a:t>전류를 바꿔도 통하고, 원래 과제도</a:t>
             </a:r>
           </a:p>
           <a:p>
@@ -8240,7 +8280,7 @@
                 </a:solidFill>
                 <a:latin typeface="맑은 고딕"/>
               </a:rPr>
-              <a:t>학습 진행 중 — 30/50에폭 (완료 예정 ≈ 2026-08-08 05시 UTC)</a:t>
+              <a:t>후퇴하지 않았다 (§29).</a:t>
             </a:r>
           </a:p>
           <a:p>
@@ -8250,13 +8290,13 @@
               </a:spcAft>
             </a:pPr>
             <a:r>
-              <a:rPr sz="1300" b="1" i="0">
-                <a:solidFill>
-                  <a:srgbClr val="C44E52"/>
-                </a:solidFill>
-                <a:latin typeface="맑은 고딕"/>
-              </a:rPr>
-              <a:t>※ 발표 시점에 진행/결과를 갱신할 것</a:t>
+              <a:rPr sz="1300" b="0" i="0">
+                <a:solidFill>
+                  <a:srgbClr val="1A1A1A"/>
+                </a:solidFill>
+                <a:latin typeface="맑은 고딕"/>
+              </a:rPr>
+              <a:t/>
             </a:r>
           </a:p>
           <a:p>
@@ -8272,7 +8312,7 @@
                 </a:solidFill>
                 <a:latin typeface="맑은 고딕"/>
               </a:rPr>
-              <a:t/>
+              <a:t>지금: 480케이스 확장 생성 중(+120 형상</a:t>
             </a:r>
           </a:p>
           <a:p>
@@ -8288,7 +8328,7 @@
                 </a:solidFill>
                 <a:latin typeface="맑은 고딕"/>
               </a:rPr>
-              <a:t>부가 자산: 상용 라이선스 없이 도는</a:t>
+              <a:t>+ 전류 팩토리얼 + 보간 프로브, §30)</a:t>
             </a:r>
           </a:p>
           <a:p>
@@ -8304,7 +8344,7 @@
                 </a:solidFill>
                 <a:latin typeface="맑은 고딕"/>
               </a:rPr>
-              <a:t>자체 검증용 FEM 솔버를 확보했다.</a:t>
+              <a:t/>
             </a:r>
           </a:p>
           <a:p>
@@ -8320,7 +8360,7 @@
                 </a:solidFill>
                 <a:latin typeface="맑은 고딕"/>
               </a:rPr>
-              <a:t>Motor-CAD 토크를 0.06~0.18% 차이로 재현 —</a:t>
+              <a:t>부가 자산: 상용 라이선스 없이 도는</a:t>
             </a:r>
           </a:p>
           <a:p>
@@ -8336,7 +8376,7 @@
                 </a:solidFill>
                 <a:latin typeface="맑은 고딕"/>
               </a:rPr>
-              <a:t>정답 데이터를 우리 손으로 만들 수 있다.</a:t>
+              <a:t>자체 검증용 FEM 솔버(토크 0.06~0.18% 재현).</a:t>
             </a:r>
           </a:p>
         </p:txBody>
@@ -10991,7 +11031,7 @@
                 </a:solidFill>
                 <a:latin typeface="맑은 고딕"/>
               </a:rPr>
-              <a:t>공극 오차  7.14%   (합격선 5%)</a:t>
+              <a:t>공극 오차  6.62%   (합격선 5%)</a:t>
             </a:r>
           </a:p>
           <a:p>
@@ -11007,7 +11047,7 @@
                 </a:solidFill>
                 <a:latin typeface="맑은 고딕"/>
               </a:rPr>
-              <a:t>토크 오차  3.35%   (합격선 3%)</a:t>
+              <a:t>토크 오차  3.27%   (합격선 3%)</a:t>
             </a:r>
           </a:p>
           <a:p>
@@ -11023,7 +11063,23 @@
                 </a:solidFill>
                 <a:latin typeface="맑은 고딕"/>
               </a:rPr>
-              <a:t>전체 오차  11.10%</a:t>
+              <a:t>미학습 형상×전류에서도</a:t>
+            </a:r>
+          </a:p>
+          <a:p>
+            <a:pPr>
+              <a:spcAft>
+                <a:spcPts val="300"/>
+              </a:spcAft>
+            </a:pPr>
+            <a:r>
+              <a:rPr sz="1350" b="0" i="0">
+                <a:solidFill>
+                  <a:srgbClr val="1A1A1A"/>
+                </a:solidFill>
+                <a:latin typeface="맑은 고딕"/>
+              </a:rPr>
+              <a:t>공극 5.35% · 토크 2.61%</a:t>
             </a:r>
           </a:p>
           <a:p>
@@ -11254,7 +11310,7 @@
                 </a:solidFill>
                 <a:latin typeface="맑은 고딕"/>
               </a:rPr>
-              <a:t>효과가 있던 건 데이터 늘리기</a:t>
+              <a:t>효과가 있던 건 데이터 늘리기와</a:t>
             </a:r>
           </a:p>
           <a:p>
@@ -11270,7 +11326,7 @@
                 </a:solidFill>
                 <a:latin typeface="맑은 고딕"/>
               </a:rPr>
-              <a:t>하나뿐인데, 그 속도로는</a:t>
+              <a:t>물리 힌트 두 가지뿐. 데이터만으로는</a:t>
             </a:r>
           </a:p>
           <a:p>
@@ -11341,7 +11397,7 @@
                 </a:solidFill>
                 <a:latin typeface="맑은 고딕"/>
               </a:rPr>
-              <a:t>그래서 한 일과 첫 결과</a:t>
+              <a:t>그래서 한 일과 결과</a:t>
             </a:r>
           </a:p>
           <a:p>
@@ -11357,7 +11413,7 @@
                 </a:solidFill>
                 <a:latin typeface="맑은 고딕"/>
               </a:rPr>
-              <a:t>① 간이 자기해석 결과를 힌트로 입력</a:t>
+              <a:t>① 간이 자기해석을 힌트로 입력</a:t>
             </a:r>
           </a:p>
           <a:p>
@@ -11437,7 +11493,7 @@
                 </a:solidFill>
                 <a:latin typeface="맑은 고딕"/>
               </a:rPr>
-              <a:t>② 지금: 형상×전류 320케이스 학습 중</a:t>
+              <a:t>② 형상×전류 320케이스 학습 완료:</a:t>
             </a:r>
           </a:p>
           <a:p>
@@ -11453,7 +11509,7 @@
                 </a:solidFill>
                 <a:latin typeface="맑은 고딕"/>
               </a:rPr>
-              <a:t>   전류축을 처음으로 실제 반영</a:t>
+              <a:t>   전류 일반화 성립 + 공극 7.14</a:t>
             </a:r>
           </a:p>
           <a:p>
@@ -11469,7 +11525,7 @@
                 </a:solidFill>
                 <a:latin typeface="맑은 고딕"/>
               </a:rPr>
-              <a:t/>
+              <a:t>   → 6.62%, 원래 과제 후퇴 없음 (§29)</a:t>
             </a:r>
           </a:p>
           <a:p>
@@ -11485,7 +11541,23 @@
                 </a:solidFill>
                 <a:latin typeface="맑은 고딕"/>
               </a:rPr>
-              <a:t>③ 채점·재현 체계는 이미 확보</a:t>
+              <a:t/>
+            </a:r>
+          </a:p>
+          <a:p>
+            <a:pPr>
+              <a:spcAft>
+                <a:spcPts val="300"/>
+              </a:spcAft>
+            </a:pPr>
+            <a:r>
+              <a:rPr sz="1350" b="0" i="0">
+                <a:solidFill>
+                  <a:srgbClr val="1A1A1A"/>
+                </a:solidFill>
+                <a:latin typeface="맑은 고딕"/>
+              </a:rPr>
+              <a:t>③ 다음: 480케이스 확장 생성 중</a:t>
             </a:r>
           </a:p>
         </p:txBody>
@@ -11549,7 +11621,7 @@
                 </a:solidFill>
                 <a:latin typeface="맑은 고딕"/>
               </a:rPr>
-              <a:t>모델 키우기는 효과가 없었고 데이터만으로는 너무 오래 걸린다 — 물리 힌트를 넣자 토크가 처음으로 합격선 코앞까지 왔다.</a:t>
+              <a:t>물리 힌트로 토크가, 전류축 데이터로 공극이 움직여 합격선 코앞까지 왔고 — 전류를 바꿔도 통하는 모델이 처음으로 생겼다.</a:t>
             </a:r>
           </a:p>
         </p:txBody>
@@ -12476,8 +12548,8 @@
         </p:blipFill>
         <p:spPr>
           <a:xfrm>
-            <a:off x="2861338" y="1517904"/>
-            <a:ext cx="6475420" cy="3200400"/>
+            <a:off x="2839477" y="1517904"/>
+            <a:ext cx="6519142" cy="3200400"/>
           </a:xfrm>
           <a:prstGeom prst="rect">
             <a:avLst/>
@@ -12518,7 +12590,7 @@
                 </a:solidFill>
                 <a:latin typeface="맑은 고딕"/>
               </a:rPr>
-              <a:t>▪ 물리 힌트를 넣자 토크 오차 5.40 → 3.35% — 합격 기준 두 항목 중 하나가 사정권(0.35%p)에 들어온 것은 이번이 처음이다</a:t>
+              <a:t>▪ 3세대 진행: 공극 7.30 → 7.14 → 6.62%, 토크 5.40 → 3.35 → 3.27% — 물리 힌트가 토크를, 전류축 데이터가 공극을 움직였다</a:t>
             </a:r>
           </a:p>
           <a:p>
@@ -12528,13 +12600,13 @@
               </a:spcAft>
             </a:pPr>
             <a:r>
-              <a:rPr sz="1550" b="1" i="0">
-                <a:solidFill>
-                  <a:srgbClr val="C44E52"/>
-                </a:solidFill>
-                <a:latin typeface="맑은 고딕"/>
-              </a:rPr>
-              <a:t>▪ 다만 결과를 보기 전에 정해둔 1차 기준은 공극이었고, 통과하지 못했다 — 7.138%로 기준 7.05%에 0.09%p 못 미침(우연 변동 폭 안). 두 사실을 같이 보고한다</a:t>
+              <a:rPr sz="1550" b="0" i="0">
+                <a:solidFill>
+                  <a:srgbClr val="1A1A1A"/>
+                </a:solidFill>
+                <a:latin typeface="맑은 고딕"/>
+              </a:rPr>
+              <a:t>▪ 정직 노트: 물리 힌트 실험의 사전 1차 기준(공극 7.05%)은 0.09%p 차로 미달이었고, 전류축 학습(320케이스)이 공극을 추가로 0.52%p 내리며 원래 과제도 후퇴하지 않았다 (§27, §29)</a:t>
             </a:r>
           </a:p>
           <a:p>
@@ -12550,7 +12622,7 @@
                 </a:solidFill>
                 <a:latin typeface="맑은 고딕"/>
               </a:rPr>
-              <a:t>▪ 이 계산 방식이 낼 수 있는 최저 오차(한계선)는 공극 2.68%다. 현재 7.14%와는 4.5%p 차이 — 방식의 한계가 아니라 학습이 아직 못 따라간 것이므로 공략할 여지가 실제로 있다</a:t>
+              <a:t>▪ 이 계산 방식이 낼 수 있는 최저 오차(한계선)는 공극 2.68%다. 현재 6.62%와는 3.9%p 차이 — 방식의 한계가 아니라 학습이 아직 못 따라간 것이므로 공략할 여지가 실제로 있다</a:t>
             </a:r>
           </a:p>
         </p:txBody>
